--- a/a7/build/out/u3/A7 3.06  Slides.pptx
+++ b/a7/build/out/u3/A7 3.06  Slides.pptx
@@ -39,6 +39,7 @@
     <p:sldId id="287" r:id="rId38"/>
     <p:sldId id="288" r:id="rId39"/>
     <p:sldId id="289" r:id="rId40"/>
+    <p:sldId id="290" r:id="rId41"/>
   </p:sldIdLst>
   <p:sldSz cx="12191969" cy="6858000" type="screen4x3"/>
   <p:notesSz cx="6858000" cy="9144000"/>
@@ -9210,9 +9211,44 @@
           </a:p>
         </p:txBody>
       </p:sp>
+      <p:sp>
+        <p:nvSpPr>
+          <p:cNvPr id="9" name="TextBox 8"/>
+          <p:cNvSpPr txBox="1"/>
+          <p:nvPr/>
+        </p:nvSpPr>
+        <p:spPr>
+          <a:xfrm>
+            <a:off x="3534156" y="2171700"/>
+            <a:ext cx="2785872" cy="457200"/>
+          </a:xfrm>
+          <a:prstGeom prst="rect">
+            <a:avLst/>
+          </a:prstGeom>
+          <a:noFill/>
+        </p:spPr>
+        <p:txBody>
+          <a:bodyPr wrap="none" lIns="45720" rIns="45720" tIns="18288" bIns="18288" anchor="ctr">
+            <a:spAutoFit/>
+          </a:bodyPr>
+          <a:lstStyle/>
+          <a:p>
+            <a:pPr algn="l"/>
+            <a:r>
+              <a:rPr sz="2600" b="0" i="0">
+                <a:solidFill>
+                  <a:srgbClr val="1A1A1A"/>
+                </a:solidFill>
+                <a:latin typeface="Century Schoolbook"/>
+              </a:rPr>
+              <a:t>A drive holds  </a:t>
+            </a:r>
+          </a:p>
+        </p:txBody>
+      </p:sp>
       <p:pic>
         <p:nvPicPr>
-          <p:cNvPr id="9" name="Picture 8" descr="55f2034e6a363a4a.png"/>
+          <p:cNvPr id="10" name="Picture 9" descr="326fb02d0e36fa30.png"/>
           <p:cNvPicPr>
             <a:picLocks noChangeAspect="1"/>
           </p:cNvPicPr>
@@ -9226,8 +9262,8 @@
         </p:blipFill>
         <p:spPr>
           <a:xfrm>
-            <a:off x="5887211" y="2194560"/>
-            <a:ext cx="387096" cy="429768"/>
+            <a:off x="6182868" y="2226564"/>
+            <a:ext cx="310896" cy="347472"/>
           </a:xfrm>
           <a:prstGeom prst="rect">
             <a:avLst/>
@@ -9236,7 +9272,171 @@
       </p:pic>
       <p:sp>
         <p:nvSpPr>
-          <p:cNvPr id="10" name="TextBox 9"/>
+          <p:cNvPr id="11" name="TextBox 10"/>
+          <p:cNvSpPr txBox="1"/>
+          <p:nvPr/>
+        </p:nvSpPr>
+        <p:spPr>
+          <a:xfrm>
+            <a:off x="6493764" y="2171700"/>
+            <a:ext cx="2270760" cy="457200"/>
+          </a:xfrm>
+          <a:prstGeom prst="rect">
+            <a:avLst/>
+          </a:prstGeom>
+          <a:noFill/>
+        </p:spPr>
+        <p:txBody>
+          <a:bodyPr wrap="none" lIns="45720" rIns="45720" tIns="18288" bIns="18288" anchor="ctr">
+            <a:spAutoFit/>
+          </a:bodyPr>
+          <a:lstStyle/>
+          <a:p>
+            <a:pPr algn="l"/>
+            <a:r>
+              <a:rPr sz="2600" b="0" i="0">
+                <a:solidFill>
+                  <a:srgbClr val="1A1A1A"/>
+                </a:solidFill>
+                <a:latin typeface="Century Schoolbook"/>
+              </a:rPr>
+              <a:t>  megabytes.</a:t>
+            </a:r>
+          </a:p>
+        </p:txBody>
+      </p:sp>
+      <p:sp>
+        <p:nvSpPr>
+          <p:cNvPr id="12" name="TextBox 11"/>
+          <p:cNvSpPr txBox="1"/>
+          <p:nvPr/>
+        </p:nvSpPr>
+        <p:spPr>
+          <a:xfrm>
+            <a:off x="777240" y="2880360"/>
+            <a:ext cx="10607040" cy="465151"/>
+          </a:xfrm>
+          <a:prstGeom prst="rect">
+            <a:avLst/>
+          </a:prstGeom>
+          <a:noFill/>
+        </p:spPr>
+        <p:txBody>
+          <a:bodyPr wrap="square" lIns="45720" rIns="45720" tIns="18288" bIns="18288" anchor="t">
+            <a:spAutoFit/>
+          </a:bodyPr>
+          <a:lstStyle/>
+          <a:p>
+            <a:pPr algn="ctr"/>
+            <a:r>
+              <a:rPr sz="2600" b="0" i="0">
+                <a:solidFill>
+                  <a:srgbClr val="1A1A1A"/>
+                </a:solidFill>
+                <a:latin typeface="Century Schoolbook"/>
+              </a:rPr>
+              <a:t>It costs 45 dollars.</a:t>
+            </a:r>
+          </a:p>
+        </p:txBody>
+      </p:sp>
+      <p:sp>
+        <p:nvSpPr>
+          <p:cNvPr id="13" name="TextBox 12"/>
+          <p:cNvSpPr txBox="1"/>
+          <p:nvPr/>
+        </p:nvSpPr>
+        <p:spPr>
+          <a:xfrm>
+            <a:off x="3705859" y="3432379"/>
+            <a:ext cx="1412240" cy="457200"/>
+          </a:xfrm>
+          <a:prstGeom prst="rect">
+            <a:avLst/>
+          </a:prstGeom>
+          <a:noFill/>
+        </p:spPr>
+        <p:txBody>
+          <a:bodyPr wrap="none" lIns="45720" rIns="45720" tIns="18288" bIns="18288" anchor="ctr">
+            <a:spAutoFit/>
+          </a:bodyPr>
+          <a:lstStyle/>
+          <a:p>
+            <a:pPr algn="l"/>
+            <a:r>
+              <a:rPr sz="2600" b="0" i="0">
+                <a:solidFill>
+                  <a:srgbClr val="1A1A1A"/>
+                </a:solidFill>
+                <a:latin typeface="Century Schoolbook"/>
+              </a:rPr>
+              <a:t>Write  </a:t>
+            </a:r>
+          </a:p>
+        </p:txBody>
+      </p:sp>
+      <p:pic>
+        <p:nvPicPr>
+          <p:cNvPr id="14" name="Picture 13" descr="326fb02d0e36fa30.png"/>
+          <p:cNvPicPr>
+            <a:picLocks noChangeAspect="1"/>
+          </p:cNvPicPr>
+          <p:nvPr/>
+        </p:nvPicPr>
+        <p:blipFill>
+          <a:blip r:embed="rId2"/>
+          <a:stretch>
+            <a:fillRect/>
+          </a:stretch>
+        </p:blipFill>
+        <p:spPr>
+          <a:xfrm>
+            <a:off x="4980940" y="3487243"/>
+            <a:ext cx="310896" cy="347472"/>
+          </a:xfrm>
+          <a:prstGeom prst="rect">
+            <a:avLst/>
+          </a:prstGeom>
+        </p:spPr>
+      </p:pic>
+      <p:sp>
+        <p:nvSpPr>
+          <p:cNvPr id="15" name="TextBox 14"/>
+          <p:cNvSpPr txBox="1"/>
+          <p:nvPr/>
+        </p:nvSpPr>
+        <p:spPr>
+          <a:xfrm>
+            <a:off x="5291836" y="3432379"/>
+            <a:ext cx="3300984" cy="457200"/>
+          </a:xfrm>
+          <a:prstGeom prst="rect">
+            <a:avLst/>
+          </a:prstGeom>
+          <a:noFill/>
+        </p:spPr>
+        <p:txBody>
+          <a:bodyPr wrap="none" lIns="45720" rIns="45720" tIns="18288" bIns="18288" anchor="ctr">
+            <a:spAutoFit/>
+          </a:bodyPr>
+          <a:lstStyle/>
+          <a:p>
+            <a:pPr algn="l"/>
+            <a:r>
+              <a:rPr sz="2600" b="0" i="0">
+                <a:solidFill>
+                  <a:srgbClr val="1A1A1A"/>
+                </a:solidFill>
+                <a:latin typeface="Century Schoolbook"/>
+              </a:rPr>
+              <a:t>  as a power of 2.</a:t>
+            </a:r>
+          </a:p>
+        </p:txBody>
+      </p:sp>
+      <p:sp>
+        <p:nvSpPr>
+          <p:cNvPr id="16" name="TextBox 15"/>
           <p:cNvSpPr txBox="1"/>
           <p:nvPr/>
         </p:nvSpPr>
@@ -9271,7 +9471,7 @@
       </p:sp>
       <p:sp>
         <p:nvSpPr>
-          <p:cNvPr id="11" name="TextBox 10"/>
+          <p:cNvPr id="17" name="TextBox 16"/>
           <p:cNvSpPr txBox="1"/>
           <p:nvPr/>
         </p:nvSpPr>
@@ -9567,9 +9767,44 @@
           </a:p>
         </p:txBody>
       </p:sp>
+      <p:sp>
+        <p:nvSpPr>
+          <p:cNvPr id="9" name="TextBox 8"/>
+          <p:cNvSpPr txBox="1"/>
+          <p:nvPr/>
+        </p:nvSpPr>
+        <p:spPr>
+          <a:xfrm>
+            <a:off x="3534156" y="2080260"/>
+            <a:ext cx="2785872" cy="457200"/>
+          </a:xfrm>
+          <a:prstGeom prst="rect">
+            <a:avLst/>
+          </a:prstGeom>
+          <a:noFill/>
+        </p:spPr>
+        <p:txBody>
+          <a:bodyPr wrap="none" lIns="45720" rIns="45720" tIns="18288" bIns="18288" anchor="ctr">
+            <a:spAutoFit/>
+          </a:bodyPr>
+          <a:lstStyle/>
+          <a:p>
+            <a:pPr algn="l"/>
+            <a:r>
+              <a:rPr sz="2600" b="0" i="0">
+                <a:solidFill>
+                  <a:srgbClr val="1A1A1A"/>
+                </a:solidFill>
+                <a:latin typeface="Century Schoolbook"/>
+              </a:rPr>
+              <a:t>A drive holds  </a:t>
+            </a:r>
+          </a:p>
+        </p:txBody>
+      </p:sp>
       <p:pic>
         <p:nvPicPr>
-          <p:cNvPr id="9" name="Picture 8" descr="55f2034e6a363a4a.png"/>
+          <p:cNvPr id="10" name="Picture 9" descr="326fb02d0e36fa30.png"/>
           <p:cNvPicPr>
             <a:picLocks noChangeAspect="1"/>
           </p:cNvPicPr>
@@ -9583,8 +9818,8 @@
         </p:blipFill>
         <p:spPr>
           <a:xfrm>
-            <a:off x="5887211" y="2103120"/>
-            <a:ext cx="387096" cy="429768"/>
+            <a:off x="6182868" y="2135124"/>
+            <a:ext cx="310896" cy="347472"/>
           </a:xfrm>
           <a:prstGeom prst="rect">
             <a:avLst/>
@@ -9593,14 +9828,49 @@
       </p:pic>
       <p:sp>
         <p:nvSpPr>
-          <p:cNvPr id="10" name="TextBox 9"/>
-          <p:cNvSpPr txBox="1"/>
-          <p:nvPr/>
-        </p:nvSpPr>
-        <p:spPr>
-          <a:xfrm>
-            <a:off x="1828800" y="2807207"/>
-            <a:ext cx="8503920" cy="548640"/>
+          <p:cNvPr id="11" name="TextBox 10"/>
+          <p:cNvSpPr txBox="1"/>
+          <p:nvPr/>
+        </p:nvSpPr>
+        <p:spPr>
+          <a:xfrm>
+            <a:off x="6493764" y="2080260"/>
+            <a:ext cx="2270760" cy="457200"/>
+          </a:xfrm>
+          <a:prstGeom prst="rect">
+            <a:avLst/>
+          </a:prstGeom>
+          <a:noFill/>
+        </p:spPr>
+        <p:txBody>
+          <a:bodyPr wrap="none" lIns="45720" rIns="45720" tIns="18288" bIns="18288" anchor="ctr">
+            <a:spAutoFit/>
+          </a:bodyPr>
+          <a:lstStyle/>
+          <a:p>
+            <a:pPr algn="l"/>
+            <a:r>
+              <a:rPr sz="2600" b="0" i="0">
+                <a:solidFill>
+                  <a:srgbClr val="1A1A1A"/>
+                </a:solidFill>
+                <a:latin typeface="Century Schoolbook"/>
+              </a:rPr>
+              <a:t>  megabytes.</a:t>
+            </a:r>
+          </a:p>
+        </p:txBody>
+      </p:sp>
+      <p:sp>
+        <p:nvSpPr>
+          <p:cNvPr id="12" name="TextBox 11"/>
+          <p:cNvSpPr txBox="1"/>
+          <p:nvPr/>
+        </p:nvSpPr>
+        <p:spPr>
+          <a:xfrm>
+            <a:off x="777240" y="2788920"/>
+            <a:ext cx="10607040" cy="465151"/>
           </a:xfrm>
           <a:prstGeom prst="rect">
             <a:avLst/>
@@ -9615,100 +9885,229 @@
           <a:p>
             <a:pPr algn="ctr"/>
             <a:r>
-              <a:rPr sz="2400" b="0" i="0">
-                <a:solidFill>
-                  <a:srgbClr val="6B6B6B"/>
-                </a:solidFill>
-                <a:latin typeface="Century Schoolbook"/>
-              </a:rPr>
-              <a:t>8 = 2</a:t>
-            </a:r>
-            <a:r>
-              <a:rPr sz="2400" b="0" i="0" baseline="30000">
-                <a:solidFill>
-                  <a:srgbClr val="6B6B6B"/>
-                </a:solidFill>
-                <a:latin typeface="Century Schoolbook"/>
-              </a:rPr>
-              <a:t>3</a:t>
-            </a:r>
-            <a:r>
-              <a:rPr sz="2400" b="0" i="0">
-                <a:solidFill>
-                  <a:srgbClr val="6B6B6B"/>
-                </a:solidFill>
-                <a:latin typeface="Century Schoolbook"/>
-              </a:rPr>
-              <a:t>, so (2</a:t>
-            </a:r>
-            <a:r>
-              <a:rPr sz="2400" b="0" i="0" baseline="30000">
-                <a:solidFill>
-                  <a:srgbClr val="6B6B6B"/>
-                </a:solidFill>
-                <a:latin typeface="Century Schoolbook"/>
-              </a:rPr>
-              <a:t>3</a:t>
-            </a:r>
-            <a:r>
-              <a:rPr sz="2400" b="0" i="0">
-                <a:solidFill>
-                  <a:srgbClr val="6B6B6B"/>
-                </a:solidFill>
-                <a:latin typeface="Century Schoolbook"/>
-              </a:rPr>
-              <a:t>)</a:t>
-            </a:r>
-            <a:r>
-              <a:rPr sz="2400" b="0" i="0" baseline="30000">
-                <a:solidFill>
-                  <a:srgbClr val="6B6B6B"/>
-                </a:solidFill>
-                <a:latin typeface="Century Schoolbook"/>
-              </a:rPr>
-              <a:t>5</a:t>
-            </a:r>
-          </a:p>
-        </p:txBody>
-      </p:sp>
-      <p:sp>
-        <p:nvSpPr>
-          <p:cNvPr id="11" name="TextBox 10"/>
-          <p:cNvSpPr txBox="1"/>
-          <p:nvPr/>
-        </p:nvSpPr>
-        <p:spPr>
-          <a:xfrm>
-            <a:off x="4829556" y="4600956"/>
-            <a:ext cx="1920240" cy="548640"/>
-          </a:xfrm>
-          <a:prstGeom prst="rect">
-            <a:avLst/>
-          </a:prstGeom>
-          <a:noFill/>
-        </p:spPr>
-        <p:txBody>
-          <a:bodyPr wrap="square" lIns="45720" rIns="45720" tIns="18288" bIns="18288" anchor="ctr">
+              <a:rPr sz="2600" b="0" i="0">
+                <a:solidFill>
+                  <a:srgbClr val="1A1A1A"/>
+                </a:solidFill>
+                <a:latin typeface="Century Schoolbook"/>
+              </a:rPr>
+              <a:t>It costs 45 dollars.</a:t>
+            </a:r>
+          </a:p>
+        </p:txBody>
+      </p:sp>
+      <p:sp>
+        <p:nvSpPr>
+          <p:cNvPr id="13" name="TextBox 12"/>
+          <p:cNvSpPr txBox="1"/>
+          <p:nvPr/>
+        </p:nvSpPr>
+        <p:spPr>
+          <a:xfrm>
+            <a:off x="3705859" y="3340939"/>
+            <a:ext cx="1412240" cy="457200"/>
+          </a:xfrm>
+          <a:prstGeom prst="rect">
+            <a:avLst/>
+          </a:prstGeom>
+          <a:noFill/>
+        </p:spPr>
+        <p:txBody>
+          <a:bodyPr wrap="none" lIns="45720" rIns="45720" tIns="18288" bIns="18288" anchor="ctr">
             <a:spAutoFit/>
           </a:bodyPr>
           <a:lstStyle/>
           <a:p>
             <a:pPr algn="l"/>
             <a:r>
-              <a:rPr sz="3200" b="1" i="0">
-                <a:solidFill>
-                  <a:srgbClr val="9E1B32"/>
-                </a:solidFill>
-                <a:latin typeface="Century Schoolbook"/>
-              </a:rPr>
-              <a:t>Answer:</a:t>
+              <a:rPr sz="2600" b="0" i="0">
+                <a:solidFill>
+                  <a:srgbClr val="1A1A1A"/>
+                </a:solidFill>
+                <a:latin typeface="Century Schoolbook"/>
+              </a:rPr>
+              <a:t>Write  </a:t>
             </a:r>
           </a:p>
         </p:txBody>
       </p:sp>
       <p:pic>
         <p:nvPicPr>
-          <p:cNvPr id="12" name="Picture 11" descr="6103e54678c6ecd2.png"/>
+          <p:cNvPr id="14" name="Picture 13" descr="326fb02d0e36fa30.png"/>
+          <p:cNvPicPr>
+            <a:picLocks noChangeAspect="1"/>
+          </p:cNvPicPr>
+          <p:nvPr/>
+        </p:nvPicPr>
+        <p:blipFill>
+          <a:blip r:embed="rId2"/>
+          <a:stretch>
+            <a:fillRect/>
+          </a:stretch>
+        </p:blipFill>
+        <p:spPr>
+          <a:xfrm>
+            <a:off x="4980940" y="3395803"/>
+            <a:ext cx="310896" cy="347472"/>
+          </a:xfrm>
+          <a:prstGeom prst="rect">
+            <a:avLst/>
+          </a:prstGeom>
+        </p:spPr>
+      </p:pic>
+      <p:sp>
+        <p:nvSpPr>
+          <p:cNvPr id="15" name="TextBox 14"/>
+          <p:cNvSpPr txBox="1"/>
+          <p:nvPr/>
+        </p:nvSpPr>
+        <p:spPr>
+          <a:xfrm>
+            <a:off x="5291836" y="3340939"/>
+            <a:ext cx="3300984" cy="457200"/>
+          </a:xfrm>
+          <a:prstGeom prst="rect">
+            <a:avLst/>
+          </a:prstGeom>
+          <a:noFill/>
+        </p:spPr>
+        <p:txBody>
+          <a:bodyPr wrap="none" lIns="45720" rIns="45720" tIns="18288" bIns="18288" anchor="ctr">
+            <a:spAutoFit/>
+          </a:bodyPr>
+          <a:lstStyle/>
+          <a:p>
+            <a:pPr algn="l"/>
+            <a:r>
+              <a:rPr sz="2600" b="0" i="0">
+                <a:solidFill>
+                  <a:srgbClr val="1A1A1A"/>
+                </a:solidFill>
+                <a:latin typeface="Century Schoolbook"/>
+              </a:rPr>
+              <a:t>  as a power of 2.</a:t>
+            </a:r>
+          </a:p>
+        </p:txBody>
+      </p:sp>
+      <p:sp>
+        <p:nvSpPr>
+          <p:cNvPr id="16" name="TextBox 15"/>
+          <p:cNvSpPr txBox="1"/>
+          <p:nvPr/>
+        </p:nvSpPr>
+        <p:spPr>
+          <a:xfrm>
+            <a:off x="1828800" y="4095319"/>
+            <a:ext cx="8503920" cy="548640"/>
+          </a:xfrm>
+          <a:prstGeom prst="rect">
+            <a:avLst/>
+          </a:prstGeom>
+          <a:noFill/>
+        </p:spPr>
+        <p:txBody>
+          <a:bodyPr wrap="square" lIns="45720" rIns="45720" tIns="18288" bIns="18288" anchor="t">
+            <a:spAutoFit/>
+          </a:bodyPr>
+          <a:lstStyle/>
+          <a:p>
+            <a:pPr algn="ctr"/>
+            <a:r>
+              <a:rPr sz="2400" b="0" i="0">
+                <a:solidFill>
+                  <a:srgbClr val="6B6B6B"/>
+                </a:solidFill>
+                <a:latin typeface="Century Schoolbook"/>
+              </a:rPr>
+              <a:t>8 = 2</a:t>
+            </a:r>
+            <a:r>
+              <a:rPr sz="2400" b="0" i="0" baseline="30000">
+                <a:solidFill>
+                  <a:srgbClr val="6B6B6B"/>
+                </a:solidFill>
+                <a:latin typeface="Century Schoolbook"/>
+              </a:rPr>
+              <a:t>3</a:t>
+            </a:r>
+            <a:r>
+              <a:rPr sz="2400" b="0" i="0">
+                <a:solidFill>
+                  <a:srgbClr val="6B6B6B"/>
+                </a:solidFill>
+                <a:latin typeface="Century Schoolbook"/>
+              </a:rPr>
+              <a:t>, so (2</a:t>
+            </a:r>
+            <a:r>
+              <a:rPr sz="2400" b="0" i="0" baseline="30000">
+                <a:solidFill>
+                  <a:srgbClr val="6B6B6B"/>
+                </a:solidFill>
+                <a:latin typeface="Century Schoolbook"/>
+              </a:rPr>
+              <a:t>3</a:t>
+            </a:r>
+            <a:r>
+              <a:rPr sz="2400" b="0" i="0">
+                <a:solidFill>
+                  <a:srgbClr val="6B6B6B"/>
+                </a:solidFill>
+                <a:latin typeface="Century Schoolbook"/>
+              </a:rPr>
+              <a:t>)</a:t>
+            </a:r>
+            <a:r>
+              <a:rPr sz="2400" b="0" i="0" baseline="30000">
+                <a:solidFill>
+                  <a:srgbClr val="6B6B6B"/>
+                </a:solidFill>
+                <a:latin typeface="Century Schoolbook"/>
+              </a:rPr>
+              <a:t>5</a:t>
+            </a:r>
+          </a:p>
+        </p:txBody>
+      </p:sp>
+      <p:sp>
+        <p:nvSpPr>
+          <p:cNvPr id="17" name="TextBox 16"/>
+          <p:cNvSpPr txBox="1"/>
+          <p:nvPr/>
+        </p:nvSpPr>
+        <p:spPr>
+          <a:xfrm>
+            <a:off x="4829556" y="4764355"/>
+            <a:ext cx="1920240" cy="548640"/>
+          </a:xfrm>
+          <a:prstGeom prst="rect">
+            <a:avLst/>
+          </a:prstGeom>
+          <a:noFill/>
+        </p:spPr>
+        <p:txBody>
+          <a:bodyPr wrap="square" lIns="45720" rIns="45720" tIns="18288" bIns="18288" anchor="ctr">
+            <a:spAutoFit/>
+          </a:bodyPr>
+          <a:lstStyle/>
+          <a:p>
+            <a:pPr algn="l"/>
+            <a:r>
+              <a:rPr sz="3200" b="1" i="0">
+                <a:solidFill>
+                  <a:srgbClr val="9E1B32"/>
+                </a:solidFill>
+                <a:latin typeface="Century Schoolbook"/>
+              </a:rPr>
+              <a:t>Answer:</a:t>
+            </a:r>
+          </a:p>
+        </p:txBody>
+      </p:sp>
+      <p:pic>
+        <p:nvPicPr>
+          <p:cNvPr id="18" name="Picture 17" descr="6103e54678c6ecd2.png"/>
           <p:cNvPicPr>
             <a:picLocks noChangeAspect="1"/>
           </p:cNvPicPr>
@@ -9722,7 +10121,7 @@
         </p:blipFill>
         <p:spPr>
           <a:xfrm>
-            <a:off x="6749795" y="4663440"/>
+            <a:off x="6749795" y="4826839"/>
             <a:ext cx="582168" cy="423672"/>
           </a:xfrm>
           <a:prstGeom prst="rect">
@@ -15581,7 +15980,7 @@
                 </a:solidFill>
                 <a:latin typeface="Century Schoolbook"/>
               </a:rPr>
-              <a:t>IXL</a:t>
+              <a:t>Independent Set</a:t>
             </a:r>
           </a:p>
         </p:txBody>
@@ -15686,7 +16085,7 @@
                 </a:solidFill>
                 <a:latin typeface="Century Schoolbook"/>
               </a:rPr>
-              <a:t>Last five minutes.</a:t>
+              <a:t>Six questions. On your own, in silence.</a:t>
             </a:r>
           </a:p>
         </p:txBody>
@@ -15804,6 +16203,479 @@
         </p:nvSpPr>
         <p:spPr>
           <a:xfrm>
+            <a:off x="960120" y="2011680"/>
+            <a:ext cx="548640" cy="356616"/>
+          </a:xfrm>
+          <a:prstGeom prst="rect">
+            <a:avLst/>
+          </a:prstGeom>
+          <a:noFill/>
+        </p:spPr>
+        <p:txBody>
+          <a:bodyPr wrap="square" lIns="45720" rIns="45720" tIns="18288" bIns="18288" anchor="t">
+            <a:spAutoFit/>
+          </a:bodyPr>
+          <a:lstStyle/>
+          <a:p>
+            <a:pPr algn="l"/>
+            <a:r>
+              <a:rPr sz="2100" b="1" i="0">
+                <a:solidFill>
+                  <a:srgbClr val="0B5394"/>
+                </a:solidFill>
+                <a:latin typeface="Century Schoolbook"/>
+              </a:rPr>
+              <a:t>1.</a:t>
+            </a:r>
+          </a:p>
+        </p:txBody>
+      </p:sp>
+      <p:sp>
+        <p:nvSpPr>
+          <p:cNvPr id="10" name="TextBox 9"/>
+          <p:cNvSpPr txBox="1"/>
+          <p:nvPr/>
+        </p:nvSpPr>
+        <p:spPr>
+          <a:xfrm>
+            <a:off x="1554480" y="2011680"/>
+            <a:ext cx="9829800" cy="411480"/>
+          </a:xfrm>
+          <a:prstGeom prst="rect">
+            <a:avLst/>
+          </a:prstGeom>
+          <a:noFill/>
+        </p:spPr>
+        <p:txBody>
+          <a:bodyPr wrap="square" lIns="45720" rIns="45720" tIns="18288" bIns="18288" anchor="t">
+            <a:spAutoFit/>
+          </a:bodyPr>
+          <a:lstStyle/>
+          <a:p>
+            <a:pPr algn="l"/>
+            <a:r>
+              <a:rPr sz="2100" b="0" i="0">
+                <a:solidFill>
+                  <a:srgbClr val="1A1A1A"/>
+                </a:solidFill>
+                <a:latin typeface="Century Schoolbook"/>
+              </a:rPr>
+              <a:t>Six questions. Work down the page.</a:t>
+            </a:r>
+          </a:p>
+        </p:txBody>
+      </p:sp>
+      <p:sp>
+        <p:nvSpPr>
+          <p:cNvPr id="11" name="TextBox 10"/>
+          <p:cNvSpPr txBox="1"/>
+          <p:nvPr/>
+        </p:nvSpPr>
+        <p:spPr>
+          <a:xfrm>
+            <a:off x="960120" y="2551176"/>
+            <a:ext cx="548640" cy="356616"/>
+          </a:xfrm>
+          <a:prstGeom prst="rect">
+            <a:avLst/>
+          </a:prstGeom>
+          <a:noFill/>
+        </p:spPr>
+        <p:txBody>
+          <a:bodyPr wrap="square" lIns="45720" rIns="45720" tIns="18288" bIns="18288" anchor="t">
+            <a:spAutoFit/>
+          </a:bodyPr>
+          <a:lstStyle/>
+          <a:p>
+            <a:pPr algn="l"/>
+            <a:r>
+              <a:rPr sz="2100" b="1" i="0">
+                <a:solidFill>
+                  <a:srgbClr val="0B5394"/>
+                </a:solidFill>
+                <a:latin typeface="Century Schoolbook"/>
+              </a:rPr>
+              <a:t>2.</a:t>
+            </a:r>
+          </a:p>
+        </p:txBody>
+      </p:sp>
+      <p:sp>
+        <p:nvSpPr>
+          <p:cNvPr id="12" name="TextBox 11"/>
+          <p:cNvSpPr txBox="1"/>
+          <p:nvPr/>
+        </p:nvSpPr>
+        <p:spPr>
+          <a:xfrm>
+            <a:off x="1554480" y="2551176"/>
+            <a:ext cx="9829800" cy="411480"/>
+          </a:xfrm>
+          <a:prstGeom prst="rect">
+            <a:avLst/>
+          </a:prstGeom>
+          <a:noFill/>
+        </p:spPr>
+        <p:txBody>
+          <a:bodyPr wrap="square" lIns="45720" rIns="45720" tIns="18288" bIns="18288" anchor="t">
+            <a:spAutoFit/>
+          </a:bodyPr>
+          <a:lstStyle/>
+          <a:p>
+            <a:pPr algn="l"/>
+            <a:r>
+              <a:rPr sz="2100" b="0" i="0">
+                <a:solidFill>
+                  <a:srgbClr val="1A1A1A"/>
+                </a:solidFill>
+                <a:latin typeface="Century Schoolbook"/>
+              </a:rPr>
+              <a:t>Show the step that does the work, not just the answer.</a:t>
+            </a:r>
+          </a:p>
+        </p:txBody>
+      </p:sp>
+      <p:sp>
+        <p:nvSpPr>
+          <p:cNvPr id="13" name="TextBox 12"/>
+          <p:cNvSpPr txBox="1"/>
+          <p:nvPr/>
+        </p:nvSpPr>
+        <p:spPr>
+          <a:xfrm>
+            <a:off x="960120" y="3090672"/>
+            <a:ext cx="548640" cy="356616"/>
+          </a:xfrm>
+          <a:prstGeom prst="rect">
+            <a:avLst/>
+          </a:prstGeom>
+          <a:noFill/>
+        </p:spPr>
+        <p:txBody>
+          <a:bodyPr wrap="square" lIns="45720" rIns="45720" tIns="18288" bIns="18288" anchor="t">
+            <a:spAutoFit/>
+          </a:bodyPr>
+          <a:lstStyle/>
+          <a:p>
+            <a:pPr algn="l"/>
+            <a:r>
+              <a:rPr sz="2100" b="1" i="0">
+                <a:solidFill>
+                  <a:srgbClr val="0B5394"/>
+                </a:solidFill>
+                <a:latin typeface="Century Schoolbook"/>
+              </a:rPr>
+              <a:t>3.</a:t>
+            </a:r>
+          </a:p>
+        </p:txBody>
+      </p:sp>
+      <p:sp>
+        <p:nvSpPr>
+          <p:cNvPr id="14" name="TextBox 13"/>
+          <p:cNvSpPr txBox="1"/>
+          <p:nvPr/>
+        </p:nvSpPr>
+        <p:spPr>
+          <a:xfrm>
+            <a:off x="1554480" y="3090672"/>
+            <a:ext cx="9829800" cy="411480"/>
+          </a:xfrm>
+          <a:prstGeom prst="rect">
+            <a:avLst/>
+          </a:prstGeom>
+          <a:noFill/>
+        </p:spPr>
+        <p:txBody>
+          <a:bodyPr wrap="square" lIns="45720" rIns="45720" tIns="18288" bIns="18288" anchor="t">
+            <a:spAutoFit/>
+          </a:bodyPr>
+          <a:lstStyle/>
+          <a:p>
+            <a:pPr algn="l"/>
+            <a:r>
+              <a:rPr sz="2100" b="0" i="0">
+                <a:solidFill>
+                  <a:srgbClr val="1A1A1A"/>
+                </a:solidFill>
+                <a:latin typeface="Century Schoolbook"/>
+              </a:rPr>
+              <a:t>Silence until the six minutes are up.</a:t>
+            </a:r>
+          </a:p>
+        </p:txBody>
+      </p:sp>
+    </p:spTree>
+  </p:cSld>
+  <p:clrMapOvr>
+    <a:masterClrMapping/>
+  </p:clrMapOvr>
+</p:sld>
+</file>
+
+<file path=ppt/slides/slide35.xml><?xml version="1.0" encoding="utf-8"?>
+<p:sld xmlns:a="http://schemas.openxmlformats.org/drawingml/2006/main" xmlns:p="http://schemas.openxmlformats.org/presentationml/2006/main" xmlns:r="http://schemas.openxmlformats.org/officeDocument/2006/relationships">
+  <p:cSld>
+    <p:spTree>
+      <p:nvGrpSpPr>
+        <p:cNvPr id="1" name=""/>
+        <p:cNvGrpSpPr/>
+        <p:nvPr/>
+      </p:nvGrpSpPr>
+      <p:grpSpPr/>
+      <p:sp>
+        <p:nvSpPr>
+          <p:cNvPr id="2" name="TextBox 1"/>
+          <p:cNvSpPr txBox="1"/>
+          <p:nvPr/>
+        </p:nvSpPr>
+        <p:spPr>
+          <a:xfrm>
+            <a:off x="777240" y="365760"/>
+            <a:ext cx="10607040" cy="640080"/>
+          </a:xfrm>
+          <a:prstGeom prst="rect">
+            <a:avLst/>
+          </a:prstGeom>
+          <a:noFill/>
+        </p:spPr>
+        <p:txBody>
+          <a:bodyPr wrap="square" lIns="45720" rIns="45720" tIns="18288" bIns="18288" anchor="t">
+            <a:spAutoFit/>
+          </a:bodyPr>
+          <a:lstStyle/>
+          <a:p>
+            <a:pPr algn="l"/>
+            <a:r>
+              <a:rPr sz="3600" b="1" i="0">
+                <a:solidFill>
+                  <a:srgbClr val="1A1A1A"/>
+                </a:solidFill>
+                <a:latin typeface="Century Schoolbook"/>
+              </a:rPr>
+              <a:t>IXL</a:t>
+            </a:r>
+          </a:p>
+        </p:txBody>
+      </p:sp>
+      <p:cxnSp>
+        <p:nvCxnSpPr>
+          <p:cNvPr id="3" name="Connector 2"/>
+          <p:cNvCxnSpPr/>
+          <p:nvPr/>
+        </p:nvCxnSpPr>
+        <p:spPr>
+          <a:xfrm>
+            <a:off x="777240" y="1097280"/>
+            <a:ext cx="10607040" cy="0"/>
+          </a:xfrm>
+          <a:prstGeom prst="line">
+            <a:avLst/>
+          </a:prstGeom>
+          <a:ln w="19050">
+            <a:solidFill>
+              <a:srgbClr val="1A1A1A"/>
+            </a:solidFill>
+          </a:ln>
+        </p:spPr>
+        <p:style>
+          <a:lnRef idx="2">
+            <a:schemeClr val="accent1"/>
+          </a:lnRef>
+          <a:fillRef idx="0">
+            <a:schemeClr val="accent1"/>
+          </a:fillRef>
+          <a:effectRef idx="1">
+            <a:schemeClr val="accent1"/>
+          </a:effectRef>
+          <a:fontRef idx="minor">
+            <a:schemeClr val="tx1"/>
+          </a:fontRef>
+        </p:style>
+      </p:cxnSp>
+      <p:cxnSp>
+        <p:nvCxnSpPr>
+          <p:cNvPr id="4" name="Connector 3"/>
+          <p:cNvCxnSpPr/>
+          <p:nvPr/>
+        </p:nvCxnSpPr>
+        <p:spPr>
+          <a:xfrm>
+            <a:off x="777240" y="1179576"/>
+            <a:ext cx="10607040" cy="0"/>
+          </a:xfrm>
+          <a:prstGeom prst="line">
+            <a:avLst/>
+          </a:prstGeom>
+          <a:ln w="9525">
+            <a:solidFill>
+              <a:srgbClr val="1A1A1A"/>
+            </a:solidFill>
+          </a:ln>
+        </p:spPr>
+        <p:style>
+          <a:lnRef idx="2">
+            <a:schemeClr val="accent1"/>
+          </a:lnRef>
+          <a:fillRef idx="0">
+            <a:schemeClr val="accent1"/>
+          </a:fillRef>
+          <a:effectRef idx="1">
+            <a:schemeClr val="accent1"/>
+          </a:effectRef>
+          <a:fontRef idx="minor">
+            <a:schemeClr val="tx1"/>
+          </a:fontRef>
+        </p:style>
+      </p:cxnSp>
+      <p:sp>
+        <p:nvSpPr>
+          <p:cNvPr id="5" name="TextBox 4"/>
+          <p:cNvSpPr txBox="1"/>
+          <p:nvPr/>
+        </p:nvSpPr>
+        <p:spPr>
+          <a:xfrm>
+            <a:off x="777240" y="1261872"/>
+            <a:ext cx="10607040" cy="310896"/>
+          </a:xfrm>
+          <a:prstGeom prst="rect">
+            <a:avLst/>
+          </a:prstGeom>
+          <a:noFill/>
+        </p:spPr>
+        <p:txBody>
+          <a:bodyPr wrap="square" lIns="45720" rIns="45720" tIns="18288" bIns="18288" anchor="t">
+            <a:spAutoFit/>
+          </a:bodyPr>
+          <a:lstStyle/>
+          <a:p>
+            <a:pPr algn="l"/>
+            <a:r>
+              <a:rPr sz="1700" b="0" i="1">
+                <a:solidFill>
+                  <a:srgbClr val="6B6B6B"/>
+                </a:solidFill>
+                <a:latin typeface="Century Schoolbook"/>
+              </a:rPr>
+              <a:t>Last five minutes.</a:t>
+            </a:r>
+          </a:p>
+        </p:txBody>
+      </p:sp>
+      <p:cxnSp>
+        <p:nvCxnSpPr>
+          <p:cNvPr id="6" name="Connector 5"/>
+          <p:cNvCxnSpPr/>
+          <p:nvPr/>
+        </p:nvCxnSpPr>
+        <p:spPr>
+          <a:xfrm>
+            <a:off x="777240" y="6199632"/>
+            <a:ext cx="10607040" cy="0"/>
+          </a:xfrm>
+          <a:prstGeom prst="line">
+            <a:avLst/>
+          </a:prstGeom>
+          <a:ln w="9525">
+            <a:solidFill>
+              <a:srgbClr val="6B6B6B"/>
+            </a:solidFill>
+          </a:ln>
+        </p:spPr>
+        <p:style>
+          <a:lnRef idx="2">
+            <a:schemeClr val="accent1"/>
+          </a:lnRef>
+          <a:fillRef idx="0">
+            <a:schemeClr val="accent1"/>
+          </a:fillRef>
+          <a:effectRef idx="1">
+            <a:schemeClr val="accent1"/>
+          </a:effectRef>
+          <a:fontRef idx="minor">
+            <a:schemeClr val="tx1"/>
+          </a:fontRef>
+        </p:style>
+      </p:cxnSp>
+      <p:sp>
+        <p:nvSpPr>
+          <p:cNvPr id="7" name="TextBox 6"/>
+          <p:cNvSpPr txBox="1"/>
+          <p:nvPr/>
+        </p:nvSpPr>
+        <p:spPr>
+          <a:xfrm>
+            <a:off x="777240" y="6272784"/>
+            <a:ext cx="9692640" cy="274320"/>
+          </a:xfrm>
+          <a:prstGeom prst="rect">
+            <a:avLst/>
+          </a:prstGeom>
+          <a:noFill/>
+        </p:spPr>
+        <p:txBody>
+          <a:bodyPr wrap="square" lIns="45720" rIns="45720" tIns="18288" bIns="18288" anchor="t">
+            <a:spAutoFit/>
+          </a:bodyPr>
+          <a:lstStyle/>
+          <a:p>
+            <a:pPr algn="l"/>
+            <a:r>
+              <a:rPr sz="1100" b="0" i="1">
+                <a:solidFill>
+                  <a:srgbClr val="6B6B6B"/>
+                </a:solidFill>
+                <a:latin typeface="Century Schoolbook"/>
+              </a:rPr>
+              <a:t>Grade 7 Accelerated · Unit 3 · Lesson 6–7 — Evaluating and Equivalent Expressions</a:t>
+            </a:r>
+          </a:p>
+        </p:txBody>
+      </p:sp>
+      <p:sp>
+        <p:nvSpPr>
+          <p:cNvPr id="8" name="TextBox 7"/>
+          <p:cNvSpPr txBox="1"/>
+          <p:nvPr/>
+        </p:nvSpPr>
+        <p:spPr>
+          <a:xfrm>
+            <a:off x="10744200" y="6272784"/>
+            <a:ext cx="640080" cy="274320"/>
+          </a:xfrm>
+          <a:prstGeom prst="rect">
+            <a:avLst/>
+          </a:prstGeom>
+          <a:noFill/>
+        </p:spPr>
+        <p:txBody>
+          <a:bodyPr wrap="square" lIns="45720" rIns="45720" tIns="18288" bIns="18288" anchor="t">
+            <a:spAutoFit/>
+          </a:bodyPr>
+          <a:lstStyle/>
+          <a:p>
+            <a:pPr algn="r"/>
+            <a:r>
+              <a:rPr sz="1100" b="0" i="0">
+                <a:solidFill>
+                  <a:srgbClr val="6B6B6B"/>
+                </a:solidFill>
+                <a:latin typeface="Century Schoolbook"/>
+              </a:rPr>
+              <a:t>35</a:t>
+            </a:r>
+          </a:p>
+        </p:txBody>
+      </p:sp>
+      <p:sp>
+        <p:nvSpPr>
+          <p:cNvPr id="9" name="TextBox 8"/>
+          <p:cNvSpPr txBox="1"/>
+          <p:nvPr/>
+        </p:nvSpPr>
+        <p:spPr>
+          <a:xfrm>
             <a:off x="960120" y="1828800"/>
             <a:ext cx="548640" cy="356616"/>
           </a:xfrm>
@@ -16001,7 +16873,7 @@
                 </a:solidFill>
                 <a:latin typeface="Century Schoolbook"/>
               </a:rPr>
-              <a:t>Stop at a SmartScore of 67 on each skill. Whatever you do not finish is tonight's practice.</a:t>
+              <a:t>Every skill listed is required, to a SmartScore of 67. Due at the start of the next class.</a:t>
             </a:r>
           </a:p>
         </p:txBody>
@@ -16036,7 +16908,7 @@
                 </a:solidFill>
                 <a:latin typeface="Century Schoolbook"/>
               </a:rPr>
-              <a:t>Today's skills</a:t>
+              <a:t>Today's skills — all required</a:t>
             </a:r>
           </a:p>
         </p:txBody>

--- a/a7/build/out/u3/A7 3.06  Slides.pptx
+++ b/a7/build/out/u3/A7 3.06  Slides.pptx
@@ -3152,7 +3152,7 @@
                 </a:solidFill>
                 <a:latin typeface="Century Schoolbook"/>
               </a:rPr>
-              <a:t>GRADE 7 ACCELERATED  ·  UNIT 3  ·  LESSON 6–7</a:t>
+              <a:t>GRADE 7 ACCELERATED  ·  UNIT 3  ·  LESSONS 6–7</a:t>
             </a:r>
           </a:p>
         </p:txBody>
@@ -3513,7 +3513,7 @@
                 </a:solidFill>
                 <a:latin typeface="Century Schoolbook"/>
               </a:rPr>
-              <a:t>Grade 7 Accelerated · Unit 3 · Lesson 6–7 — Evaluating and Equivalent Expressions</a:t>
+              <a:t>Grade 7 Accelerated · Unit 3 · Lessons 6–7 — Evaluating and Equivalent Expressions</a:t>
             </a:r>
           </a:p>
         </p:txBody>
@@ -3776,7 +3776,7 @@
                 </a:solidFill>
                 <a:latin typeface="Century Schoolbook"/>
               </a:rPr>
-              <a:t>Grade 7 Accelerated · Unit 3 · Lesson 6–7 — Evaluating and Equivalent Expressions</a:t>
+              <a:t>Grade 7 Accelerated · Unit 3 · Lessons 6–7 — Evaluating and Equivalent Expressions</a:t>
             </a:r>
           </a:p>
         </p:txBody>
@@ -4063,7 +4063,7 @@
                 </a:solidFill>
                 <a:latin typeface="Century Schoolbook"/>
               </a:rPr>
-              <a:t>Grade 7 Accelerated · Unit 3 · Lesson 6–7 — Evaluating and Equivalent Expressions</a:t>
+              <a:t>Grade 7 Accelerated · Unit 3 · Lessons 6–7 — Evaluating and Equivalent Expressions</a:t>
             </a:r>
           </a:p>
         </p:txBody>
@@ -4462,7 +4462,7 @@
                 </a:solidFill>
                 <a:latin typeface="Century Schoolbook"/>
               </a:rPr>
-              <a:t>Grade 7 Accelerated · Unit 3 · Lesson 6–7 — Evaluating and Equivalent Expressions</a:t>
+              <a:t>Grade 7 Accelerated · Unit 3 · Lessons 6–7 — Evaluating and Equivalent Expressions</a:t>
             </a:r>
           </a:p>
         </p:txBody>
@@ -4913,7 +4913,7 @@
                 </a:solidFill>
                 <a:latin typeface="Century Schoolbook"/>
               </a:rPr>
-              <a:t>Grade 7 Accelerated · Unit 3 · Lesson 6–7 — Evaluating and Equivalent Expressions</a:t>
+              <a:t>Grade 7 Accelerated · Unit 3 · Lessons 6–7 — Evaluating and Equivalent Expressions</a:t>
             </a:r>
           </a:p>
         </p:txBody>
@@ -5424,7 +5424,7 @@
                 </a:solidFill>
                 <a:latin typeface="Century Schoolbook"/>
               </a:rPr>
-              <a:t>Grade 7 Accelerated · Unit 3 · Lesson 6–7 — Evaluating and Equivalent Expressions</a:t>
+              <a:t>Grade 7 Accelerated · Unit 3 · Lessons 6–7 — Evaluating and Equivalent Expressions</a:t>
             </a:r>
           </a:p>
         </p:txBody>
@@ -5840,7 +5840,7 @@
                 </a:solidFill>
                 <a:latin typeface="Century Schoolbook"/>
               </a:rPr>
-              <a:t>Grade 7 Accelerated · Unit 3 · Lesson 6–7 — Evaluating and Equivalent Expressions</a:t>
+              <a:t>Grade 7 Accelerated · Unit 3 · Lessons 6–7 — Evaluating and Equivalent Expressions</a:t>
             </a:r>
           </a:p>
         </p:txBody>
@@ -6389,7 +6389,7 @@
                 </a:solidFill>
                 <a:latin typeface="Century Schoolbook"/>
               </a:rPr>
-              <a:t>Grade 7 Accelerated · Unit 3 · Lesson 6–7 — Evaluating and Equivalent Expressions</a:t>
+              <a:t>Grade 7 Accelerated · Unit 3 · Lessons 6–7 — Evaluating and Equivalent Expressions</a:t>
             </a:r>
           </a:p>
         </p:txBody>
@@ -6746,7 +6746,7 @@
                 </a:solidFill>
                 <a:latin typeface="Century Schoolbook"/>
               </a:rPr>
-              <a:t>Grade 7 Accelerated · Unit 3 · Lesson 6–7 — Evaluating and Equivalent Expressions</a:t>
+              <a:t>Grade 7 Accelerated · Unit 3 · Lessons 6–7 — Evaluating and Equivalent Expressions</a:t>
             </a:r>
           </a:p>
         </p:txBody>
@@ -7148,7 +7148,7 @@
                 </a:solidFill>
                 <a:latin typeface="Century Schoolbook"/>
               </a:rPr>
-              <a:t>Grade 7 Accelerated · Unit 3 · Lesson 6–7 — Evaluating and Equivalent Expressions</a:t>
+              <a:t>Grade 7 Accelerated · Unit 3 · Lessons 6–7 — Evaluating and Equivalent Expressions</a:t>
             </a:r>
           </a:p>
         </p:txBody>
@@ -7505,7 +7505,7 @@
                 </a:solidFill>
                 <a:latin typeface="Century Schoolbook"/>
               </a:rPr>
-              <a:t>Grade 7 Accelerated · Unit 3 · Lesson 6–7 — Evaluating and Equivalent Expressions</a:t>
+              <a:t>Grade 7 Accelerated · Unit 3 · Lessons 6–7 — Evaluating and Equivalent Expressions</a:t>
             </a:r>
           </a:p>
         </p:txBody>
@@ -7895,7 +7895,7 @@
                 </a:solidFill>
                 <a:latin typeface="Century Schoolbook"/>
               </a:rPr>
-              <a:t>Grade 7 Accelerated · Unit 3 · Lesson 6–7 — Evaluating and Equivalent Expressions</a:t>
+              <a:t>Grade 7 Accelerated · Unit 3 · Lessons 6–7 — Evaluating and Equivalent Expressions</a:t>
             </a:r>
           </a:p>
         </p:txBody>
@@ -8370,7 +8370,7 @@
                 </a:solidFill>
                 <a:latin typeface="Century Schoolbook"/>
               </a:rPr>
-              <a:t>Grade 7 Accelerated · Unit 3 · Lesson 6–7 — Evaluating and Equivalent Expressions</a:t>
+              <a:t>Grade 7 Accelerated · Unit 3 · Lessons 6–7 — Evaluating and Equivalent Expressions</a:t>
             </a:r>
           </a:p>
         </p:txBody>
@@ -8727,7 +8727,7 @@
                 </a:solidFill>
                 <a:latin typeface="Century Schoolbook"/>
               </a:rPr>
-              <a:t>Grade 7 Accelerated · Unit 3 · Lesson 6–7 — Evaluating and Equivalent Expressions</a:t>
+              <a:t>Grade 7 Accelerated · Unit 3 · Lessons 6–7 — Evaluating and Equivalent Expressions</a:t>
             </a:r>
           </a:p>
         </p:txBody>
@@ -9171,7 +9171,7 @@
                 </a:solidFill>
                 <a:latin typeface="Century Schoolbook"/>
               </a:rPr>
-              <a:t>Grade 7 Accelerated · Unit 3 · Lesson 6–7 — Evaluating and Equivalent Expressions</a:t>
+              <a:t>Grade 7 Accelerated · Unit 3 · Lessons 6–7 — Evaluating and Equivalent Expressions</a:t>
             </a:r>
           </a:p>
         </p:txBody>
@@ -9727,7 +9727,7 @@
                 </a:solidFill>
                 <a:latin typeface="Century Schoolbook"/>
               </a:rPr>
-              <a:t>Grade 7 Accelerated · Unit 3 · Lesson 6–7 — Evaluating and Equivalent Expressions</a:t>
+              <a:t>Grade 7 Accelerated · Unit 3 · Lessons 6–7 — Evaluating and Equivalent Expressions</a:t>
             </a:r>
           </a:p>
         </p:txBody>
@@ -10352,7 +10352,7 @@
                 </a:solidFill>
                 <a:latin typeface="Century Schoolbook"/>
               </a:rPr>
-              <a:t>Grade 7 Accelerated · Unit 3 · Lesson 6–7 — Evaluating and Equivalent Expressions</a:t>
+              <a:t>Grade 7 Accelerated · Unit 3 · Lessons 6–7 — Evaluating and Equivalent Expressions</a:t>
             </a:r>
           </a:p>
         </p:txBody>
@@ -10921,7 +10921,7 @@
                 </a:solidFill>
                 <a:latin typeface="Century Schoolbook"/>
               </a:rPr>
-              <a:t>Grade 7 Accelerated · Unit 3 · Lesson 6–7 — Evaluating and Equivalent Expressions</a:t>
+              <a:t>Grade 7 Accelerated · Unit 3 · Lessons 6–7 — Evaluating and Equivalent Expressions</a:t>
             </a:r>
           </a:p>
         </p:txBody>
@@ -11499,7 +11499,7 @@
                 </a:solidFill>
                 <a:latin typeface="Century Schoolbook"/>
               </a:rPr>
-              <a:t>Grade 7 Accelerated · Unit 3 · Lesson 6–7 — Evaluating and Equivalent Expressions</a:t>
+              <a:t>Grade 7 Accelerated · Unit 3 · Lessons 6–7 — Evaluating and Equivalent Expressions</a:t>
             </a:r>
           </a:p>
         </p:txBody>
@@ -12068,7 +12068,7 @@
                 </a:solidFill>
                 <a:latin typeface="Century Schoolbook"/>
               </a:rPr>
-              <a:t>Grade 7 Accelerated · Unit 3 · Lesson 6–7 — Evaluating and Equivalent Expressions</a:t>
+              <a:t>Grade 7 Accelerated · Unit 3 · Lessons 6–7 — Evaluating and Equivalent Expressions</a:t>
             </a:r>
           </a:p>
         </p:txBody>
@@ -12646,7 +12646,7 @@
                 </a:solidFill>
                 <a:latin typeface="Century Schoolbook"/>
               </a:rPr>
-              <a:t>Grade 7 Accelerated · Unit 3 · Lesson 6–7 — Evaluating and Equivalent Expressions</a:t>
+              <a:t>Grade 7 Accelerated · Unit 3 · Lessons 6–7 — Evaluating and Equivalent Expressions</a:t>
             </a:r>
           </a:p>
         </p:txBody>
@@ -13003,7 +13003,7 @@
                 </a:solidFill>
                 <a:latin typeface="Century Schoolbook"/>
               </a:rPr>
-              <a:t>Grade 7 Accelerated · Unit 3 · Lesson 6–7 — Evaluating and Equivalent Expressions</a:t>
+              <a:t>Grade 7 Accelerated · Unit 3 · Lessons 6–7 — Evaluating and Equivalent Expressions</a:t>
             </a:r>
           </a:p>
         </p:txBody>
@@ -13447,7 +13447,7 @@
                 </a:solidFill>
                 <a:latin typeface="Century Schoolbook"/>
               </a:rPr>
-              <a:t>Grade 7 Accelerated · Unit 3 · Lesson 6–7 — Evaluating and Equivalent Expressions</a:t>
+              <a:t>Grade 7 Accelerated · Unit 3 · Lessons 6–7 — Evaluating and Equivalent Expressions</a:t>
             </a:r>
           </a:p>
         </p:txBody>
@@ -14158,7 +14158,7 @@
                 </a:solidFill>
                 <a:latin typeface="Century Schoolbook"/>
               </a:rPr>
-              <a:t>Grade 7 Accelerated · Unit 3 · Lesson 6–7 — Evaluating and Equivalent Expressions</a:t>
+              <a:t>Grade 7 Accelerated · Unit 3 · Lessons 6–7 — Evaluating and Equivalent Expressions</a:t>
             </a:r>
           </a:p>
         </p:txBody>
@@ -14515,7 +14515,7 @@
                 </a:solidFill>
                 <a:latin typeface="Century Schoolbook"/>
               </a:rPr>
-              <a:t>Grade 7 Accelerated · Unit 3 · Lesson 6–7 — Evaluating and Equivalent Expressions</a:t>
+              <a:t>Grade 7 Accelerated · Unit 3 · Lessons 6–7 — Evaluating and Equivalent Expressions</a:t>
             </a:r>
           </a:p>
         </p:txBody>
@@ -14941,7 +14941,7 @@
                 </a:solidFill>
                 <a:latin typeface="Century Schoolbook"/>
               </a:rPr>
-              <a:t>Grade 7 Accelerated · Unit 3 · Lesson 6–7 — Evaluating and Equivalent Expressions</a:t>
+              <a:t>Grade 7 Accelerated · Unit 3 · Lessons 6–7 — Evaluating and Equivalent Expressions</a:t>
             </a:r>
           </a:p>
         </p:txBody>
@@ -15521,7 +15521,7 @@
                 </a:solidFill>
                 <a:latin typeface="Century Schoolbook"/>
               </a:rPr>
-              <a:t>Grade 7 Accelerated · Unit 3 · Lesson 6–7 — Evaluating and Equivalent Expressions</a:t>
+              <a:t>Grade 7 Accelerated · Unit 3 · Lessons 6–7 — Evaluating and Equivalent Expressions</a:t>
             </a:r>
           </a:p>
         </p:txBody>
@@ -16155,7 +16155,7 @@
                 </a:solidFill>
                 <a:latin typeface="Century Schoolbook"/>
               </a:rPr>
-              <a:t>Grade 7 Accelerated · Unit 3 · Lesson 6–7 — Evaluating and Equivalent Expressions</a:t>
+              <a:t>Grade 7 Accelerated · Unit 3 · Lessons 6–7 — Evaluating and Equivalent Expressions</a:t>
             </a:r>
           </a:p>
         </p:txBody>
@@ -16628,7 +16628,7 @@
                 </a:solidFill>
                 <a:latin typeface="Century Schoolbook"/>
               </a:rPr>
-              <a:t>Grade 7 Accelerated · Unit 3 · Lesson 6–7 — Evaluating and Equivalent Expressions</a:t>
+              <a:t>Grade 7 Accelerated · Unit 3 · Lessons 6–7 — Evaluating and Equivalent Expressions</a:t>
             </a:r>
           </a:p>
         </p:txBody>
@@ -17171,7 +17171,7 @@
                 </a:solidFill>
                 <a:latin typeface="Century Schoolbook"/>
               </a:rPr>
-              <a:t>Grade 7 Accelerated · Unit 3 · Lesson 6–7 — Evaluating and Equivalent Expressions</a:t>
+              <a:t>Grade 7 Accelerated · Unit 3 · Lessons 6–7 — Evaluating and Equivalent Expressions</a:t>
             </a:r>
           </a:p>
         </p:txBody>
@@ -17657,7 +17657,7 @@
                 </a:solidFill>
                 <a:latin typeface="Century Schoolbook"/>
               </a:rPr>
-              <a:t>Grade 7 Accelerated · Unit 3 · Lesson 6–7 — Evaluating and Equivalent Expressions</a:t>
+              <a:t>Grade 7 Accelerated · Unit 3 · Lessons 6–7 — Evaluating and Equivalent Expressions</a:t>
             </a:r>
           </a:p>
         </p:txBody>
@@ -18180,7 +18180,7 @@
                 </a:solidFill>
                 <a:latin typeface="Century Schoolbook"/>
               </a:rPr>
-              <a:t>Grade 7 Accelerated · Unit 3 · Lesson 6–7 — Evaluating and Equivalent Expressions</a:t>
+              <a:t>Grade 7 Accelerated · Unit 3 · Lessons 6–7 — Evaluating and Equivalent Expressions</a:t>
             </a:r>
           </a:p>
         </p:txBody>
@@ -19535,7 +19535,7 @@
                 </a:solidFill>
                 <a:latin typeface="Century Schoolbook"/>
               </a:rPr>
-              <a:t>Grade 7 Accelerated · Unit 3 · Lesson 6–7 — Evaluating and Equivalent Expressions</a:t>
+              <a:t>Grade 7 Accelerated · Unit 3 · Lessons 6–7 — Evaluating and Equivalent Expressions</a:t>
             </a:r>
           </a:p>
         </p:txBody>
@@ -20045,7 +20045,7 @@
                 </a:solidFill>
                 <a:latin typeface="Century Schoolbook"/>
               </a:rPr>
-              <a:t>Grade 7 Accelerated · Unit 3 · Lesson 6–7 — Evaluating and Equivalent Expressions</a:t>
+              <a:t>Grade 7 Accelerated · Unit 3 · Lessons 6–7 — Evaluating and Equivalent Expressions</a:t>
             </a:r>
           </a:p>
         </p:txBody>
@@ -20367,7 +20367,7 @@
                 </a:solidFill>
                 <a:latin typeface="Century Schoolbook"/>
               </a:rPr>
-              <a:t>Grade 7 Accelerated · Unit 3 · Lesson 6–7 — Evaluating and Equivalent Expressions</a:t>
+              <a:t>Grade 7 Accelerated · Unit 3 · Lessons 6–7 — Evaluating and Equivalent Expressions</a:t>
             </a:r>
           </a:p>
         </p:txBody>

--- a/a7/build/out/u3/A7 3.06  Slides.pptx
+++ b/a7/build/out/u3/A7 3.06  Slides.pptx
@@ -3818,7 +3818,7 @@
       </p:sp>
       <p:pic>
         <p:nvPicPr>
-          <p:cNvPr id="9" name="Picture 8" descr="5bcc8034c74e5aa3.png"/>
+          <p:cNvPr id="9" name="Picture 8" descr="b5586861463d6b87.png"/>
           <p:cNvPicPr>
             <a:picLocks noChangeAspect="1"/>
           </p:cNvPicPr>
@@ -3832,8 +3832,8 @@
         </p:blipFill>
         <p:spPr>
           <a:xfrm>
-            <a:off x="5257799" y="2194560"/>
-            <a:ext cx="1645920" cy="655320"/>
+            <a:off x="5184648" y="2194560"/>
+            <a:ext cx="1792224" cy="862584"/>
           </a:xfrm>
           <a:prstGeom prst="rect">
             <a:avLst/>
@@ -4105,7 +4105,7 @@
       </p:sp>
       <p:pic>
         <p:nvPicPr>
-          <p:cNvPr id="9" name="Picture 8" descr="5bcc8034c74e5aa3.png"/>
+          <p:cNvPr id="9" name="Picture 8" descr="b5586861463d6b87.png"/>
           <p:cNvPicPr>
             <a:picLocks noChangeAspect="1"/>
           </p:cNvPicPr>
@@ -4119,8 +4119,8 @@
         </p:blipFill>
         <p:spPr>
           <a:xfrm>
-            <a:off x="5257799" y="2194560"/>
-            <a:ext cx="1645920" cy="655320"/>
+            <a:off x="5184648" y="2194560"/>
+            <a:ext cx="1792224" cy="862584"/>
           </a:xfrm>
           <a:prstGeom prst="rect">
             <a:avLst/>
@@ -4135,7 +4135,7 @@
         </p:nvSpPr>
         <p:spPr>
           <a:xfrm>
-            <a:off x="777240" y="3169920"/>
+            <a:off x="777240" y="3377184"/>
             <a:ext cx="10607040" cy="429370"/>
           </a:xfrm>
           <a:prstGeom prst="rect">
@@ -4188,7 +4188,7 @@
         </p:nvSpPr>
         <p:spPr>
           <a:xfrm>
-            <a:off x="4940808" y="4529328"/>
+            <a:off x="4864607" y="4637532"/>
             <a:ext cx="1920240" cy="548640"/>
           </a:xfrm>
           <a:prstGeom prst="rect">
@@ -4217,7 +4217,7 @@
       </p:sp>
       <p:pic>
         <p:nvPicPr>
-          <p:cNvPr id="12" name="Picture 11" descr="f709f98c6266bd49.png"/>
+          <p:cNvPr id="12" name="Picture 11" descr="3a56cc9ab8e3bbe2.png"/>
           <p:cNvPicPr>
             <a:picLocks noChangeAspect="1"/>
           </p:cNvPicPr>
@@ -4231,8 +4231,8 @@
         </p:blipFill>
         <p:spPr>
           <a:xfrm>
-            <a:off x="6861048" y="4480560"/>
-            <a:ext cx="359664" cy="646176"/>
+            <a:off x="6784848" y="4480560"/>
+            <a:ext cx="512064" cy="862584"/>
           </a:xfrm>
           <a:prstGeom prst="rect">
             <a:avLst/>
@@ -4510,8 +4510,8 @@
         </p:nvSpPr>
         <p:spPr>
           <a:xfrm>
-            <a:off x="2985008" y="2202180"/>
-            <a:ext cx="1068832" cy="457200"/>
+            <a:off x="3056109" y="2313432"/>
+            <a:ext cx="988005" cy="457200"/>
           </a:xfrm>
           <a:prstGeom prst="rect">
             <a:avLst/>
@@ -4520,7 +4520,7 @@
         </p:spPr>
         <p:txBody>
           <a:bodyPr wrap="none" lIns="45720" rIns="45720" tIns="18288" bIns="18288" anchor="ctr">
-            <a:spAutoFit/>
+            <a:noAutofit/>
           </a:bodyPr>
           <a:lstStyle/>
           <a:p>
@@ -4553,7 +4553,7 @@
         </p:blipFill>
         <p:spPr>
           <a:xfrm>
-            <a:off x="3916680" y="2258568"/>
+            <a:off x="3906954" y="2369819"/>
             <a:ext cx="920495" cy="344424"/>
           </a:xfrm>
           <a:prstGeom prst="rect">
@@ -4569,8 +4569,8 @@
         </p:nvSpPr>
         <p:spPr>
           <a:xfrm>
-            <a:off x="4837176" y="2202180"/>
-            <a:ext cx="1412240" cy="457200"/>
+            <a:off x="4827450" y="2313432"/>
+            <a:ext cx="1208866" cy="457200"/>
           </a:xfrm>
           <a:prstGeom prst="rect">
             <a:avLst/>
@@ -4579,7 +4579,7 @@
         </p:spPr>
         <p:txBody>
           <a:bodyPr wrap="none" lIns="45720" rIns="45720" tIns="18288" bIns="18288" anchor="ctr">
-            <a:spAutoFit/>
+            <a:noAutofit/>
           </a:bodyPr>
           <a:lstStyle/>
           <a:p>
@@ -4598,7 +4598,7 @@
       </p:sp>
       <p:pic>
         <p:nvPicPr>
-          <p:cNvPr id="12" name="Picture 11" descr="edc5d9a379d4ae55.png"/>
+          <p:cNvPr id="12" name="Picture 11" descr="69969edd9de46883.png"/>
           <p:cNvPicPr>
             <a:picLocks noChangeAspect="1"/>
           </p:cNvPicPr>
@@ -4612,8 +4612,8 @@
         </p:blipFill>
         <p:spPr>
           <a:xfrm>
-            <a:off x="6112256" y="2103120"/>
-            <a:ext cx="758952" cy="655320"/>
+            <a:off x="5899156" y="2103120"/>
+            <a:ext cx="1082040" cy="877824"/>
           </a:xfrm>
           <a:prstGeom prst="rect">
             <a:avLst/>
@@ -4628,8 +4628,8 @@
         </p:nvSpPr>
         <p:spPr>
           <a:xfrm>
-            <a:off x="6871208" y="2202180"/>
-            <a:ext cx="2442464" cy="457200"/>
+            <a:off x="6981196" y="2313432"/>
+            <a:ext cx="2261373" cy="457200"/>
           </a:xfrm>
           <a:prstGeom prst="rect">
             <a:avLst/>
@@ -4638,7 +4638,7 @@
         </p:spPr>
         <p:txBody>
           <a:bodyPr wrap="none" lIns="45720" rIns="45720" tIns="18288" bIns="18288" anchor="ctr">
-            <a:spAutoFit/>
+            <a:noAutofit/>
           </a:bodyPr>
           <a:lstStyle/>
           <a:p>
@@ -4663,7 +4663,7 @@
         </p:nvSpPr>
         <p:spPr>
           <a:xfrm>
-            <a:off x="777240" y="3261360"/>
+            <a:off x="777240" y="3483864"/>
             <a:ext cx="10607040" cy="429370"/>
           </a:xfrm>
           <a:prstGeom prst="rect">
@@ -5014,7 +5014,7 @@
       </p:sp>
       <p:pic>
         <p:nvPicPr>
-          <p:cNvPr id="11" name="Picture 10" descr="c767b624aaf30a5a.png"/>
+          <p:cNvPr id="11" name="Picture 10" descr="e94dc10860a25cd3.png"/>
           <p:cNvPicPr>
             <a:picLocks noChangeAspect="1"/>
           </p:cNvPicPr>
@@ -5029,7 +5029,7 @@
         <p:spPr>
           <a:xfrm>
             <a:off x="1828800" y="2542032"/>
-            <a:ext cx="3264408" cy="655320"/>
+            <a:ext cx="3880104" cy="877824"/>
           </a:xfrm>
           <a:prstGeom prst="rect">
             <a:avLst/>
@@ -5044,8 +5044,8 @@
         </p:nvSpPr>
         <p:spPr>
           <a:xfrm>
-            <a:off x="5550408" y="2641092"/>
-            <a:ext cx="5833871" cy="502920"/>
+            <a:off x="6166104" y="2752344"/>
+            <a:ext cx="5218175" cy="502920"/>
           </a:xfrm>
           <a:prstGeom prst="rect">
             <a:avLst/>
@@ -5087,7 +5087,7 @@
         </p:blipFill>
         <p:spPr>
           <a:xfrm>
-            <a:off x="1828800" y="3471672"/>
+            <a:off x="1828800" y="3694176"/>
             <a:ext cx="2289048" cy="347472"/>
           </a:xfrm>
           <a:prstGeom prst="rect">
@@ -5103,7 +5103,7 @@
         </p:nvSpPr>
         <p:spPr>
           <a:xfrm>
-            <a:off x="4575048" y="3416807"/>
+            <a:off x="4575048" y="3639312"/>
             <a:ext cx="6400800" cy="502920"/>
           </a:xfrm>
           <a:prstGeom prst="rect">
@@ -5472,8 +5472,8 @@
         </p:nvSpPr>
         <p:spPr>
           <a:xfrm>
-            <a:off x="2645155" y="2378964"/>
-            <a:ext cx="1068832" cy="457200"/>
+            <a:off x="2676633" y="2516124"/>
+            <a:ext cx="988005" cy="457200"/>
           </a:xfrm>
           <a:prstGeom prst="rect">
             <a:avLst/>
@@ -5482,7 +5482,7 @@
         </p:spPr>
         <p:txBody>
           <a:bodyPr wrap="none" lIns="45720" rIns="45720" tIns="18288" bIns="18288" anchor="ctr">
-            <a:spAutoFit/>
+            <a:noAutofit/>
           </a:bodyPr>
           <a:lstStyle/>
           <a:p>
@@ -5515,7 +5515,7 @@
         </p:blipFill>
         <p:spPr>
           <a:xfrm>
-            <a:off x="3576827" y="2391156"/>
+            <a:off x="3527478" y="2528315"/>
             <a:ext cx="1411224" cy="432816"/>
           </a:xfrm>
           <a:prstGeom prst="rect">
@@ -5531,8 +5531,8 @@
         </p:nvSpPr>
         <p:spPr>
           <a:xfrm>
-            <a:off x="4988051" y="2378964"/>
-            <a:ext cx="1412240" cy="457200"/>
+            <a:off x="4938702" y="2516124"/>
+            <a:ext cx="1208866" cy="457200"/>
           </a:xfrm>
           <a:prstGeom prst="rect">
             <a:avLst/>
@@ -5541,7 +5541,7 @@
         </p:spPr>
         <p:txBody>
           <a:bodyPr wrap="none" lIns="45720" rIns="45720" tIns="18288" bIns="18288" anchor="ctr">
-            <a:spAutoFit/>
+            <a:noAutofit/>
           </a:bodyPr>
           <a:lstStyle/>
           <a:p>
@@ -5560,7 +5560,7 @@
       </p:sp>
       <p:pic>
         <p:nvPicPr>
-          <p:cNvPr id="12" name="Picture 11" descr="9a3dd872b9b3ae59.png"/>
+          <p:cNvPr id="12" name="Picture 11" descr="e566d1e7830f898c.png"/>
           <p:cNvPicPr>
             <a:picLocks noChangeAspect="1"/>
           </p:cNvPicPr>
@@ -5574,8 +5574,8 @@
         </p:blipFill>
         <p:spPr>
           <a:xfrm>
-            <a:off x="6263132" y="2194560"/>
-            <a:ext cx="947928" cy="826008"/>
+            <a:off x="6010408" y="2194560"/>
+            <a:ext cx="1350264" cy="1100328"/>
           </a:xfrm>
           <a:prstGeom prst="rect">
             <a:avLst/>
@@ -5590,8 +5590,8 @@
         </p:nvSpPr>
         <p:spPr>
           <a:xfrm>
-            <a:off x="7211060" y="2378964"/>
-            <a:ext cx="2442464" cy="457200"/>
+            <a:off x="7360672" y="2516124"/>
+            <a:ext cx="2261373" cy="457200"/>
           </a:xfrm>
           <a:prstGeom prst="rect">
             <a:avLst/>
@@ -5600,7 +5600,7 @@
         </p:spPr>
         <p:txBody>
           <a:bodyPr wrap="none" lIns="45720" rIns="45720" tIns="18288" bIns="18288" anchor="ctr">
-            <a:spAutoFit/>
+            <a:noAutofit/>
           </a:bodyPr>
           <a:lstStyle/>
           <a:p>
@@ -5888,8 +5888,8 @@
         </p:nvSpPr>
         <p:spPr>
           <a:xfrm>
-            <a:off x="2645155" y="2378964"/>
-            <a:ext cx="1068832" cy="457200"/>
+            <a:off x="2676633" y="2516124"/>
+            <a:ext cx="988005" cy="457200"/>
           </a:xfrm>
           <a:prstGeom prst="rect">
             <a:avLst/>
@@ -5898,7 +5898,7 @@
         </p:spPr>
         <p:txBody>
           <a:bodyPr wrap="none" lIns="45720" rIns="45720" tIns="18288" bIns="18288" anchor="ctr">
-            <a:spAutoFit/>
+            <a:noAutofit/>
           </a:bodyPr>
           <a:lstStyle/>
           <a:p>
@@ -5931,7 +5931,7 @@
         </p:blipFill>
         <p:spPr>
           <a:xfrm>
-            <a:off x="3576827" y="2391156"/>
+            <a:off x="3527478" y="2528315"/>
             <a:ext cx="1411224" cy="432816"/>
           </a:xfrm>
           <a:prstGeom prst="rect">
@@ -5947,8 +5947,8 @@
         </p:nvSpPr>
         <p:spPr>
           <a:xfrm>
-            <a:off x="4988051" y="2378964"/>
-            <a:ext cx="1412240" cy="457200"/>
+            <a:off x="4938702" y="2516124"/>
+            <a:ext cx="1208866" cy="457200"/>
           </a:xfrm>
           <a:prstGeom prst="rect">
             <a:avLst/>
@@ -5957,7 +5957,7 @@
         </p:spPr>
         <p:txBody>
           <a:bodyPr wrap="none" lIns="45720" rIns="45720" tIns="18288" bIns="18288" anchor="ctr">
-            <a:spAutoFit/>
+            <a:noAutofit/>
           </a:bodyPr>
           <a:lstStyle/>
           <a:p>
@@ -5976,7 +5976,7 @@
       </p:sp>
       <p:pic>
         <p:nvPicPr>
-          <p:cNvPr id="12" name="Picture 11" descr="9a3dd872b9b3ae59.png"/>
+          <p:cNvPr id="12" name="Picture 11" descr="e566d1e7830f898c.png"/>
           <p:cNvPicPr>
             <a:picLocks noChangeAspect="1"/>
           </p:cNvPicPr>
@@ -5990,8 +5990,8 @@
         </p:blipFill>
         <p:spPr>
           <a:xfrm>
-            <a:off x="6263132" y="2194560"/>
-            <a:ext cx="947928" cy="826008"/>
+            <a:off x="6010408" y="2194560"/>
+            <a:ext cx="1350264" cy="1100328"/>
           </a:xfrm>
           <a:prstGeom prst="rect">
             <a:avLst/>
@@ -6006,8 +6006,8 @@
         </p:nvSpPr>
         <p:spPr>
           <a:xfrm>
-            <a:off x="7211060" y="2378964"/>
-            <a:ext cx="2442464" cy="457200"/>
+            <a:off x="7360672" y="2516124"/>
+            <a:ext cx="2261373" cy="457200"/>
           </a:xfrm>
           <a:prstGeom prst="rect">
             <a:avLst/>
@@ -6016,7 +6016,7 @@
         </p:spPr>
         <p:txBody>
           <a:bodyPr wrap="none" lIns="45720" rIns="45720" tIns="18288" bIns="18288" anchor="ctr">
-            <a:spAutoFit/>
+            <a:noAutofit/>
           </a:bodyPr>
           <a:lstStyle/>
           <a:p>
@@ -6041,7 +6041,7 @@
         </p:nvSpPr>
         <p:spPr>
           <a:xfrm>
-            <a:off x="777240" y="3340608"/>
+            <a:off x="777240" y="3614928"/>
             <a:ext cx="10607040" cy="429370"/>
           </a:xfrm>
           <a:prstGeom prst="rect">
@@ -6431,7 +6431,7 @@
       </p:sp>
       <p:pic>
         <p:nvPicPr>
-          <p:cNvPr id="9" name="Picture 8" descr="d7f9f8bf5433db5f.png"/>
+          <p:cNvPr id="9" name="Picture 8" descr="61e8ec21e00a8963.png"/>
           <p:cNvPicPr>
             <a:picLocks noChangeAspect="1"/>
           </p:cNvPicPr>
@@ -6445,8 +6445,8 @@
         </p:blipFill>
         <p:spPr>
           <a:xfrm>
-            <a:off x="5172456" y="2194560"/>
-            <a:ext cx="1816608" cy="883920"/>
+            <a:off x="4783836" y="2194560"/>
+            <a:ext cx="2593848" cy="1188720"/>
           </a:xfrm>
           <a:prstGeom prst="rect">
             <a:avLst/>
@@ -6788,7 +6788,7 @@
       </p:sp>
       <p:pic>
         <p:nvPicPr>
-          <p:cNvPr id="9" name="Picture 8" descr="d7f9f8bf5433db5f.png"/>
+          <p:cNvPr id="9" name="Picture 8" descr="61e8ec21e00a8963.png"/>
           <p:cNvPicPr>
             <a:picLocks noChangeAspect="1"/>
           </p:cNvPicPr>
@@ -6802,8 +6802,8 @@
         </p:blipFill>
         <p:spPr>
           <a:xfrm>
-            <a:off x="5172456" y="2103120"/>
-            <a:ext cx="1816608" cy="883920"/>
+            <a:off x="4783836" y="2103120"/>
+            <a:ext cx="2593848" cy="1188720"/>
           </a:xfrm>
           <a:prstGeom prst="rect">
             <a:avLst/>
@@ -6818,7 +6818,7 @@
         </p:nvSpPr>
         <p:spPr>
           <a:xfrm>
-            <a:off x="1828800" y="3261360"/>
+            <a:off x="1828800" y="3566159"/>
             <a:ext cx="8503920" cy="548640"/>
           </a:xfrm>
           <a:prstGeom prst="rect">
@@ -7190,7 +7190,7 @@
       </p:sp>
       <p:pic>
         <p:nvPicPr>
-          <p:cNvPr id="9" name="Picture 8" descr="520bfb8b8a5dd056.png"/>
+          <p:cNvPr id="9" name="Picture 8" descr="5a81991eb38a0b9a.png"/>
           <p:cNvPicPr>
             <a:picLocks noChangeAspect="1"/>
           </p:cNvPicPr>
@@ -7204,8 +7204,8 @@
         </p:blipFill>
         <p:spPr>
           <a:xfrm>
-            <a:off x="5236464" y="2194560"/>
-            <a:ext cx="1688592" cy="1063752"/>
+            <a:off x="4733543" y="2194560"/>
+            <a:ext cx="2694432" cy="1865376"/>
           </a:xfrm>
           <a:prstGeom prst="rect">
             <a:avLst/>
@@ -7220,7 +7220,7 @@
         </p:nvSpPr>
         <p:spPr>
           <a:xfrm>
-            <a:off x="777240" y="4343400"/>
+            <a:off x="777240" y="4425696"/>
             <a:ext cx="10607040" cy="457200"/>
           </a:xfrm>
           <a:prstGeom prst="rect">
@@ -7255,7 +7255,7 @@
         </p:nvSpPr>
         <p:spPr>
           <a:xfrm>
-            <a:off x="777240" y="4828032"/>
+            <a:off x="777240" y="4910328"/>
             <a:ext cx="10607040" cy="365760"/>
           </a:xfrm>
           <a:prstGeom prst="rect">
@@ -7547,7 +7547,7 @@
       </p:sp>
       <p:pic>
         <p:nvPicPr>
-          <p:cNvPr id="9" name="Picture 8" descr="520bfb8b8a5dd056.png"/>
+          <p:cNvPr id="9" name="Picture 8" descr="5a81991eb38a0b9a.png"/>
           <p:cNvPicPr>
             <a:picLocks noChangeAspect="1"/>
           </p:cNvPicPr>
@@ -7561,8 +7561,8 @@
         </p:blipFill>
         <p:spPr>
           <a:xfrm>
-            <a:off x="5236464" y="2103120"/>
-            <a:ext cx="1688592" cy="1063752"/>
+            <a:off x="4733543" y="2103120"/>
+            <a:ext cx="2694432" cy="1865376"/>
           </a:xfrm>
           <a:prstGeom prst="rect">
             <a:avLst/>
@@ -7577,7 +7577,7 @@
         </p:nvSpPr>
         <p:spPr>
           <a:xfrm>
-            <a:off x="1828800" y="3441191"/>
+            <a:off x="1828800" y="4242816"/>
             <a:ext cx="8503920" cy="548640"/>
           </a:xfrm>
           <a:prstGeom prst="rect">
@@ -7621,7 +7621,7 @@
         </p:nvSpPr>
         <p:spPr>
           <a:xfrm>
-            <a:off x="5029200" y="4713731"/>
+            <a:off x="4991100" y="5126736"/>
             <a:ext cx="1920240" cy="548640"/>
           </a:xfrm>
           <a:prstGeom prst="rect">
@@ -7650,7 +7650,7 @@
       </p:sp>
       <p:pic>
         <p:nvPicPr>
-          <p:cNvPr id="12" name="Picture 11" descr="b32c3b47dc4eb01e.png"/>
+          <p:cNvPr id="12" name="Picture 11" descr="6d9a31f1d02f3151.png"/>
           <p:cNvPicPr>
             <a:picLocks noChangeAspect="1"/>
           </p:cNvPicPr>
@@ -7664,8 +7664,8 @@
         </p:blipFill>
         <p:spPr>
           <a:xfrm>
-            <a:off x="6949440" y="4663440"/>
-            <a:ext cx="182880" cy="649224"/>
+            <a:off x="6911340" y="4974336"/>
+            <a:ext cx="259080" cy="853440"/>
           </a:xfrm>
           <a:prstGeom prst="rect">
             <a:avLst/>
@@ -7943,8 +7943,8 @@
         </p:nvSpPr>
         <p:spPr>
           <a:xfrm>
-            <a:off x="1874519" y="1764792"/>
-            <a:ext cx="8564372" cy="457200"/>
+            <a:off x="1874519" y="1831848"/>
+            <a:ext cx="7804089" cy="457200"/>
           </a:xfrm>
           <a:prstGeom prst="rect">
             <a:avLst/>
@@ -7953,7 +7953,7 @@
         </p:spPr>
         <p:txBody>
           <a:bodyPr wrap="none" lIns="45720" rIns="45720" tIns="18288" bIns="18288" anchor="ctr">
-            <a:spAutoFit/>
+            <a:noAutofit/>
           </a:bodyPr>
           <a:lstStyle/>
           <a:p>
@@ -7972,7 +7972,7 @@
       </p:sp>
       <p:pic>
         <p:nvPicPr>
-          <p:cNvPr id="10" name="Picture 9" descr="fb6a4badbefdb6e3.png"/>
+          <p:cNvPr id="10" name="Picture 9" descr="70fd4f7c195b27fd.png"/>
           <p:cNvPicPr>
             <a:picLocks noChangeAspect="1"/>
           </p:cNvPicPr>
@@ -7986,8 +7986,8 @@
         </p:blipFill>
         <p:spPr>
           <a:xfrm>
-            <a:off x="10301732" y="1783080"/>
-            <a:ext cx="701040" cy="420624"/>
+            <a:off x="9541449" y="1783080"/>
+            <a:ext cx="795528" cy="554736"/>
           </a:xfrm>
           <a:prstGeom prst="rect">
             <a:avLst/>
@@ -8002,8 +8002,8 @@
         </p:nvSpPr>
         <p:spPr>
           <a:xfrm>
-            <a:off x="1874519" y="2404872"/>
-            <a:ext cx="3551936" cy="457200"/>
+            <a:off x="1874519" y="2613660"/>
+            <a:ext cx="3064939" cy="457200"/>
           </a:xfrm>
           <a:prstGeom prst="rect">
             <a:avLst/>
@@ -8012,7 +8012,7 @@
         </p:spPr>
         <p:txBody>
           <a:bodyPr wrap="none" lIns="45720" rIns="45720" tIns="18288" bIns="18288" anchor="ctr">
-            <a:spAutoFit/>
+            <a:noAutofit/>
           </a:bodyPr>
           <a:lstStyle/>
           <a:p>
@@ -8031,7 +8031,7 @@
       </p:sp>
       <p:pic>
         <p:nvPicPr>
-          <p:cNvPr id="12" name="Picture 11" descr="f0cc633c04921b32.png"/>
+          <p:cNvPr id="12" name="Picture 11" descr="a4522c3024ca6567.png"/>
           <p:cNvPicPr>
             <a:picLocks noChangeAspect="1"/>
           </p:cNvPicPr>
@@ -8045,8 +8045,8 @@
         </p:blipFill>
         <p:spPr>
           <a:xfrm>
-            <a:off x="5289296" y="2404872"/>
-            <a:ext cx="326136" cy="457200"/>
+            <a:off x="4802299" y="2538984"/>
+            <a:ext cx="463296" cy="606552"/>
           </a:xfrm>
           <a:prstGeom prst="rect">
             <a:avLst/>
@@ -8061,8 +8061,8 @@
         </p:nvSpPr>
         <p:spPr>
           <a:xfrm>
-            <a:off x="1874519" y="3084576"/>
-            <a:ext cx="3551936" cy="457200"/>
+            <a:off x="1874519" y="3451860"/>
+            <a:ext cx="3064939" cy="457200"/>
           </a:xfrm>
           <a:prstGeom prst="rect">
             <a:avLst/>
@@ -8071,7 +8071,7 @@
         </p:spPr>
         <p:txBody>
           <a:bodyPr wrap="none" lIns="45720" rIns="45720" tIns="18288" bIns="18288" anchor="ctr">
-            <a:spAutoFit/>
+            <a:noAutofit/>
           </a:bodyPr>
           <a:lstStyle/>
           <a:p>
@@ -8090,7 +8090,7 @@
       </p:sp>
       <p:pic>
         <p:nvPicPr>
-          <p:cNvPr id="14" name="Picture 13" descr="5ef59c513095b51f.png"/>
+          <p:cNvPr id="14" name="Picture 13" descr="574a5d3a612aa104.png"/>
           <p:cNvPicPr>
             <a:picLocks noChangeAspect="1"/>
           </p:cNvPicPr>
@@ -8104,8 +8104,8 @@
         </p:blipFill>
         <p:spPr>
           <a:xfrm>
-            <a:off x="5289296" y="3063240"/>
-            <a:ext cx="329184" cy="499871"/>
+            <a:off x="4802299" y="3346704"/>
+            <a:ext cx="469392" cy="667512"/>
           </a:xfrm>
           <a:prstGeom prst="rect">
             <a:avLst/>
@@ -8120,8 +8120,8 @@
         </p:nvSpPr>
         <p:spPr>
           <a:xfrm>
-            <a:off x="1874519" y="3741420"/>
-            <a:ext cx="7197344" cy="457200"/>
+            <a:off x="1874519" y="4192524"/>
+            <a:ext cx="6243654" cy="457200"/>
           </a:xfrm>
           <a:prstGeom prst="rect">
             <a:avLst/>
@@ -8130,7 +8130,7 @@
         </p:spPr>
         <p:txBody>
           <a:bodyPr wrap="none" lIns="45720" rIns="45720" tIns="18288" bIns="18288" anchor="ctr">
-            <a:spAutoFit/>
+            <a:noAutofit/>
           </a:bodyPr>
           <a:lstStyle/>
           <a:p>
@@ -8412,7 +8412,7 @@
       </p:sp>
       <p:pic>
         <p:nvPicPr>
-          <p:cNvPr id="9" name="Picture 8" descr="5ff7261f0ab27286.png"/>
+          <p:cNvPr id="9" name="Picture 8" descr="2f8b87745f5bc5af.png"/>
           <p:cNvPicPr>
             <a:picLocks noChangeAspect="1"/>
           </p:cNvPicPr>
@@ -8426,8 +8426,8 @@
         </p:blipFill>
         <p:spPr>
           <a:xfrm>
-            <a:off x="5125212" y="2194560"/>
-            <a:ext cx="1911095" cy="905256"/>
+            <a:off x="4646675" y="2194560"/>
+            <a:ext cx="2868168" cy="1432560"/>
           </a:xfrm>
           <a:prstGeom prst="rect">
             <a:avLst/>
@@ -8769,7 +8769,7 @@
       </p:sp>
       <p:pic>
         <p:nvPicPr>
-          <p:cNvPr id="9" name="Picture 8" descr="5ff7261f0ab27286.png"/>
+          <p:cNvPr id="9" name="Picture 8" descr="2f8b87745f5bc5af.png"/>
           <p:cNvPicPr>
             <a:picLocks noChangeAspect="1"/>
           </p:cNvPicPr>
@@ -8783,8 +8783,8 @@
         </p:blipFill>
         <p:spPr>
           <a:xfrm>
-            <a:off x="5125212" y="2103120"/>
-            <a:ext cx="1911095" cy="905256"/>
+            <a:off x="4646675" y="2103120"/>
+            <a:ext cx="2868168" cy="1432560"/>
           </a:xfrm>
           <a:prstGeom prst="rect">
             <a:avLst/>
@@ -8799,7 +8799,7 @@
         </p:nvSpPr>
         <p:spPr>
           <a:xfrm>
-            <a:off x="1828800" y="3282696"/>
+            <a:off x="1828800" y="3809999"/>
             <a:ext cx="8503920" cy="548640"/>
           </a:xfrm>
           <a:prstGeom prst="rect">
@@ -8897,7 +8897,7 @@
         </p:nvSpPr>
         <p:spPr>
           <a:xfrm>
-            <a:off x="5029200" y="4710684"/>
+            <a:off x="4991100" y="4814316"/>
             <a:ext cx="1920240" cy="548640"/>
           </a:xfrm>
           <a:prstGeom prst="rect">
@@ -8926,7 +8926,7 @@
       </p:sp>
       <p:pic>
         <p:nvPicPr>
-          <p:cNvPr id="12" name="Picture 11" descr="3af52598aeb43b11.png"/>
+          <p:cNvPr id="12" name="Picture 11" descr="2bb7fdb900ba422d.png"/>
           <p:cNvPicPr>
             <a:picLocks noChangeAspect="1"/>
           </p:cNvPicPr>
@@ -8940,8 +8940,8 @@
         </p:blipFill>
         <p:spPr>
           <a:xfrm>
-            <a:off x="6949440" y="4663440"/>
-            <a:ext cx="182880" cy="643128"/>
+            <a:off x="6911340" y="4663440"/>
+            <a:ext cx="259080" cy="850392"/>
           </a:xfrm>
           <a:prstGeom prst="rect">
             <a:avLst/>
@@ -9219,8 +9219,8 @@
         </p:nvSpPr>
         <p:spPr>
           <a:xfrm>
-            <a:off x="3534156" y="2171700"/>
-            <a:ext cx="2785872" cy="457200"/>
+            <a:off x="3685934" y="2171700"/>
+            <a:ext cx="2535136" cy="457200"/>
           </a:xfrm>
           <a:prstGeom prst="rect">
             <a:avLst/>
@@ -9229,7 +9229,7 @@
         </p:spPr>
         <p:txBody>
           <a:bodyPr wrap="none" lIns="45720" rIns="45720" tIns="18288" bIns="18288" anchor="ctr">
-            <a:spAutoFit/>
+            <a:noAutofit/>
           </a:bodyPr>
           <a:lstStyle/>
           <a:p>
@@ -9262,7 +9262,7 @@
         </p:blipFill>
         <p:spPr>
           <a:xfrm>
-            <a:off x="6182868" y="2226564"/>
+            <a:off x="6083911" y="2226564"/>
             <a:ext cx="310896" cy="347472"/>
           </a:xfrm>
           <a:prstGeom prst="rect">
@@ -9278,8 +9278,8 @@
         </p:nvSpPr>
         <p:spPr>
           <a:xfrm>
-            <a:off x="6493764" y="2171700"/>
-            <a:ext cx="2270760" cy="457200"/>
+            <a:off x="6394807" y="2171700"/>
+            <a:ext cx="2217937" cy="457200"/>
           </a:xfrm>
           <a:prstGeom prst="rect">
             <a:avLst/>
@@ -9288,7 +9288,7 @@
         </p:spPr>
         <p:txBody>
           <a:bodyPr wrap="none" lIns="45720" rIns="45720" tIns="18288" bIns="18288" anchor="ctr">
-            <a:spAutoFit/>
+            <a:noAutofit/>
           </a:bodyPr>
           <a:lstStyle/>
           <a:p>
@@ -9348,8 +9348,8 @@
         </p:nvSpPr>
         <p:spPr>
           <a:xfrm>
-            <a:off x="3705859" y="3432379"/>
-            <a:ext cx="1412240" cy="457200"/>
+            <a:off x="3962878" y="3432379"/>
+            <a:ext cx="1311040" cy="457200"/>
           </a:xfrm>
           <a:prstGeom prst="rect">
             <a:avLst/>
@@ -9358,7 +9358,7 @@
         </p:spPr>
         <p:txBody>
           <a:bodyPr wrap="none" lIns="45720" rIns="45720" tIns="18288" bIns="18288" anchor="ctr">
-            <a:spAutoFit/>
+            <a:noAutofit/>
           </a:bodyPr>
           <a:lstStyle/>
           <a:p>
@@ -9391,7 +9391,7 @@
         </p:blipFill>
         <p:spPr>
           <a:xfrm>
-            <a:off x="4980940" y="3487243"/>
+            <a:off x="5136759" y="3487243"/>
             <a:ext cx="310896" cy="347472"/>
           </a:xfrm>
           <a:prstGeom prst="rect">
@@ -9407,8 +9407,8 @@
         </p:nvSpPr>
         <p:spPr>
           <a:xfrm>
-            <a:off x="5291836" y="3432379"/>
-            <a:ext cx="3300984" cy="457200"/>
+            <a:off x="5447655" y="3432379"/>
+            <a:ext cx="2888145" cy="457200"/>
           </a:xfrm>
           <a:prstGeom prst="rect">
             <a:avLst/>
@@ -9417,7 +9417,7 @@
         </p:spPr>
         <p:txBody>
           <a:bodyPr wrap="none" lIns="45720" rIns="45720" tIns="18288" bIns="18288" anchor="ctr">
-            <a:spAutoFit/>
+            <a:noAutofit/>
           </a:bodyPr>
           <a:lstStyle/>
           <a:p>
@@ -9775,8 +9775,8 @@
         </p:nvSpPr>
         <p:spPr>
           <a:xfrm>
-            <a:off x="3534156" y="2080260"/>
-            <a:ext cx="2785872" cy="457200"/>
+            <a:off x="3685934" y="2080260"/>
+            <a:ext cx="2535136" cy="457200"/>
           </a:xfrm>
           <a:prstGeom prst="rect">
             <a:avLst/>
@@ -9785,7 +9785,7 @@
         </p:spPr>
         <p:txBody>
           <a:bodyPr wrap="none" lIns="45720" rIns="45720" tIns="18288" bIns="18288" anchor="ctr">
-            <a:spAutoFit/>
+            <a:noAutofit/>
           </a:bodyPr>
           <a:lstStyle/>
           <a:p>
@@ -9818,7 +9818,7 @@
         </p:blipFill>
         <p:spPr>
           <a:xfrm>
-            <a:off x="6182868" y="2135124"/>
+            <a:off x="6083911" y="2135124"/>
             <a:ext cx="310896" cy="347472"/>
           </a:xfrm>
           <a:prstGeom prst="rect">
@@ -9834,8 +9834,8 @@
         </p:nvSpPr>
         <p:spPr>
           <a:xfrm>
-            <a:off x="6493764" y="2080260"/>
-            <a:ext cx="2270760" cy="457200"/>
+            <a:off x="6394807" y="2080260"/>
+            <a:ext cx="2217937" cy="457200"/>
           </a:xfrm>
           <a:prstGeom prst="rect">
             <a:avLst/>
@@ -9844,7 +9844,7 @@
         </p:spPr>
         <p:txBody>
           <a:bodyPr wrap="none" lIns="45720" rIns="45720" tIns="18288" bIns="18288" anchor="ctr">
-            <a:spAutoFit/>
+            <a:noAutofit/>
           </a:bodyPr>
           <a:lstStyle/>
           <a:p>
@@ -9904,8 +9904,8 @@
         </p:nvSpPr>
         <p:spPr>
           <a:xfrm>
-            <a:off x="3705859" y="3340939"/>
-            <a:ext cx="1412240" cy="457200"/>
+            <a:off x="3962878" y="3340939"/>
+            <a:ext cx="1311040" cy="457200"/>
           </a:xfrm>
           <a:prstGeom prst="rect">
             <a:avLst/>
@@ -9914,7 +9914,7 @@
         </p:spPr>
         <p:txBody>
           <a:bodyPr wrap="none" lIns="45720" rIns="45720" tIns="18288" bIns="18288" anchor="ctr">
-            <a:spAutoFit/>
+            <a:noAutofit/>
           </a:bodyPr>
           <a:lstStyle/>
           <a:p>
@@ -9947,7 +9947,7 @@
         </p:blipFill>
         <p:spPr>
           <a:xfrm>
-            <a:off x="4980940" y="3395803"/>
+            <a:off x="5136759" y="3395803"/>
             <a:ext cx="310896" cy="347472"/>
           </a:xfrm>
           <a:prstGeom prst="rect">
@@ -9963,8 +9963,8 @@
         </p:nvSpPr>
         <p:spPr>
           <a:xfrm>
-            <a:off x="5291836" y="3340939"/>
-            <a:ext cx="3300984" cy="457200"/>
+            <a:off x="5447655" y="3340939"/>
+            <a:ext cx="2888145" cy="457200"/>
           </a:xfrm>
           <a:prstGeom prst="rect">
             <a:avLst/>
@@ -9973,7 +9973,7 @@
         </p:spPr>
         <p:txBody>
           <a:bodyPr wrap="none" lIns="45720" rIns="45720" tIns="18288" bIns="18288" anchor="ctr">
-            <a:spAutoFit/>
+            <a:noAutofit/>
           </a:bodyPr>
           <a:lstStyle/>
           <a:p>
@@ -11541,7 +11541,7 @@
       </p:sp>
       <p:pic>
         <p:nvPicPr>
-          <p:cNvPr id="9" name="Picture 8" descr="0b0333b4fa7e8847.png"/>
+          <p:cNvPr id="9" name="Picture 8" descr="78733fd3b94c8799.png"/>
           <p:cNvPicPr>
             <a:picLocks noChangeAspect="1"/>
           </p:cNvPicPr>
@@ -11555,8 +11555,8 @@
         </p:blipFill>
         <p:spPr>
           <a:xfrm>
-            <a:off x="5172456" y="2194560"/>
-            <a:ext cx="1816608" cy="643128"/>
+            <a:off x="5097779" y="2194560"/>
+            <a:ext cx="1965960" cy="853440"/>
           </a:xfrm>
           <a:prstGeom prst="rect">
             <a:avLst/>
@@ -11571,7 +11571,7 @@
         </p:nvSpPr>
         <p:spPr>
           <a:xfrm>
-            <a:off x="777240" y="3066288"/>
+            <a:off x="777240" y="3276599"/>
             <a:ext cx="10607040" cy="465151"/>
           </a:xfrm>
           <a:prstGeom prst="rect">
@@ -11606,7 +11606,7 @@
         </p:nvSpPr>
         <p:spPr>
           <a:xfrm>
-            <a:off x="1874519" y="3732607"/>
+            <a:off x="1874519" y="3942919"/>
             <a:ext cx="4572000" cy="548640"/>
           </a:xfrm>
           <a:prstGeom prst="rect">
@@ -11659,7 +11659,7 @@
         </p:nvSpPr>
         <p:spPr>
           <a:xfrm>
-            <a:off x="6629400" y="3732607"/>
+            <a:off x="6629400" y="3942919"/>
             <a:ext cx="4572000" cy="548640"/>
           </a:xfrm>
           <a:prstGeom prst="rect">
@@ -11712,7 +11712,7 @@
         </p:nvSpPr>
         <p:spPr>
           <a:xfrm>
-            <a:off x="1874519" y="4418407"/>
+            <a:off x="1874519" y="4628719"/>
             <a:ext cx="4572000" cy="548640"/>
           </a:xfrm>
           <a:prstGeom prst="rect">
@@ -11765,7 +11765,7 @@
         </p:nvSpPr>
         <p:spPr>
           <a:xfrm>
-            <a:off x="6629400" y="4418407"/>
+            <a:off x="6629400" y="4628719"/>
             <a:ext cx="4572000" cy="548640"/>
           </a:xfrm>
           <a:prstGeom prst="rect">
@@ -11818,7 +11818,7 @@
         </p:nvSpPr>
         <p:spPr>
           <a:xfrm>
-            <a:off x="777240" y="5424247"/>
+            <a:off x="777240" y="5634559"/>
             <a:ext cx="10607040" cy="457200"/>
           </a:xfrm>
           <a:prstGeom prst="rect">
@@ -12110,7 +12110,7 @@
       </p:sp>
       <p:pic>
         <p:nvPicPr>
-          <p:cNvPr id="9" name="Picture 8" descr="0b0333b4fa7e8847.png"/>
+          <p:cNvPr id="9" name="Picture 8" descr="78733fd3b94c8799.png"/>
           <p:cNvPicPr>
             <a:picLocks noChangeAspect="1"/>
           </p:cNvPicPr>
@@ -12124,8 +12124,8 @@
         </p:blipFill>
         <p:spPr>
           <a:xfrm>
-            <a:off x="5172456" y="2103120"/>
-            <a:ext cx="1816608" cy="643128"/>
+            <a:off x="5097779" y="2103120"/>
+            <a:ext cx="1965960" cy="853440"/>
           </a:xfrm>
           <a:prstGeom prst="rect">
             <a:avLst/>
@@ -12140,7 +12140,7 @@
         </p:nvSpPr>
         <p:spPr>
           <a:xfrm>
-            <a:off x="777240" y="2974847"/>
+            <a:off x="777240" y="3185160"/>
             <a:ext cx="10607040" cy="465151"/>
           </a:xfrm>
           <a:prstGeom prst="rect">
@@ -12175,7 +12175,7 @@
         </p:nvSpPr>
         <p:spPr>
           <a:xfrm>
-            <a:off x="1874519" y="3641167"/>
+            <a:off x="1874519" y="3851479"/>
             <a:ext cx="4572000" cy="548640"/>
           </a:xfrm>
           <a:prstGeom prst="rect">
@@ -12228,7 +12228,7 @@
         </p:nvSpPr>
         <p:spPr>
           <a:xfrm>
-            <a:off x="6629400" y="3641167"/>
+            <a:off x="6629400" y="3851479"/>
             <a:ext cx="4572000" cy="548640"/>
           </a:xfrm>
           <a:prstGeom prst="rect">
@@ -12281,7 +12281,7 @@
         </p:nvSpPr>
         <p:spPr>
           <a:xfrm>
-            <a:off x="1874519" y="4326967"/>
+            <a:off x="1874519" y="4537279"/>
             <a:ext cx="4572000" cy="548640"/>
           </a:xfrm>
           <a:prstGeom prst="rect">
@@ -12334,7 +12334,7 @@
         </p:nvSpPr>
         <p:spPr>
           <a:xfrm>
-            <a:off x="6629400" y="4326967"/>
+            <a:off x="6629400" y="4537279"/>
             <a:ext cx="4572000" cy="548640"/>
           </a:xfrm>
           <a:prstGeom prst="rect">
@@ -12387,7 +12387,7 @@
         </p:nvSpPr>
         <p:spPr>
           <a:xfrm>
-            <a:off x="777240" y="5332807"/>
+            <a:off x="777240" y="5543119"/>
             <a:ext cx="10607040" cy="548640"/>
           </a:xfrm>
           <a:prstGeom prst="rect">
@@ -13495,8 +13495,8 @@
         </p:nvSpPr>
         <p:spPr>
           <a:xfrm>
-            <a:off x="1874519" y="1764792"/>
-            <a:ext cx="8564372" cy="457200"/>
+            <a:off x="1874519" y="1831848"/>
+            <a:ext cx="7804089" cy="457200"/>
           </a:xfrm>
           <a:prstGeom prst="rect">
             <a:avLst/>
@@ -13505,7 +13505,7 @@
         </p:spPr>
         <p:txBody>
           <a:bodyPr wrap="none" lIns="45720" rIns="45720" tIns="18288" bIns="18288" anchor="ctr">
-            <a:spAutoFit/>
+            <a:noAutofit/>
           </a:bodyPr>
           <a:lstStyle/>
           <a:p>
@@ -13524,7 +13524,7 @@
       </p:sp>
       <p:pic>
         <p:nvPicPr>
-          <p:cNvPr id="10" name="Picture 9" descr="fb6a4badbefdb6e3.png"/>
+          <p:cNvPr id="10" name="Picture 9" descr="70fd4f7c195b27fd.png"/>
           <p:cNvPicPr>
             <a:picLocks noChangeAspect="1"/>
           </p:cNvPicPr>
@@ -13538,8 +13538,8 @@
         </p:blipFill>
         <p:spPr>
           <a:xfrm>
-            <a:off x="10301732" y="1783080"/>
-            <a:ext cx="701040" cy="420624"/>
+            <a:off x="9541449" y="1783080"/>
+            <a:ext cx="795528" cy="554736"/>
           </a:xfrm>
           <a:prstGeom prst="rect">
             <a:avLst/>
@@ -13548,7 +13548,7 @@
       </p:pic>
       <p:pic>
         <p:nvPicPr>
-          <p:cNvPr id="11" name="Picture 10" descr="3b6750496d830329.png"/>
+          <p:cNvPr id="11" name="Picture 10" descr="b2f9cb953a93e9cc.png"/>
           <p:cNvPicPr>
             <a:picLocks noChangeAspect="1"/>
           </p:cNvPicPr>
@@ -13562,8 +13562,8 @@
         </p:blipFill>
         <p:spPr>
           <a:xfrm>
-            <a:off x="2606040" y="2249424"/>
-            <a:ext cx="1005840" cy="426720"/>
+            <a:off x="2606040" y="2383536"/>
+            <a:ext cx="1152144" cy="557784"/>
           </a:xfrm>
           <a:prstGeom prst="rect">
             <a:avLst/>
@@ -13578,8 +13578,8 @@
         </p:nvSpPr>
         <p:spPr>
           <a:xfrm>
-            <a:off x="1874519" y="2877312"/>
-            <a:ext cx="3551936" cy="457200"/>
+            <a:off x="1874519" y="3217164"/>
+            <a:ext cx="3064939" cy="457200"/>
           </a:xfrm>
           <a:prstGeom prst="rect">
             <a:avLst/>
@@ -13588,7 +13588,7 @@
         </p:spPr>
         <p:txBody>
           <a:bodyPr wrap="none" lIns="45720" rIns="45720" tIns="18288" bIns="18288" anchor="ctr">
-            <a:spAutoFit/>
+            <a:noAutofit/>
           </a:bodyPr>
           <a:lstStyle/>
           <a:p>
@@ -13607,7 +13607,7 @@
       </p:sp>
       <p:pic>
         <p:nvPicPr>
-          <p:cNvPr id="13" name="Picture 12" descr="f0cc633c04921b32.png"/>
+          <p:cNvPr id="13" name="Picture 12" descr="a4522c3024ca6567.png"/>
           <p:cNvPicPr>
             <a:picLocks noChangeAspect="1"/>
           </p:cNvPicPr>
@@ -13621,8 +13621,8 @@
         </p:blipFill>
         <p:spPr>
           <a:xfrm>
-            <a:off x="5289296" y="2877312"/>
-            <a:ext cx="326136" cy="457200"/>
+            <a:off x="4802299" y="3142488"/>
+            <a:ext cx="463296" cy="606552"/>
           </a:xfrm>
           <a:prstGeom prst="rect">
             <a:avLst/>
@@ -13637,8 +13637,8 @@
         </p:nvSpPr>
         <p:spPr>
           <a:xfrm>
-            <a:off x="6164072" y="2854452"/>
-            <a:ext cx="549148" cy="457200"/>
+            <a:off x="5814235" y="3119628"/>
+            <a:ext cx="565792" cy="457200"/>
           </a:xfrm>
           <a:prstGeom prst="rect">
             <a:avLst/>
@@ -13647,7 +13647,7 @@
         </p:spPr>
         <p:txBody>
           <a:bodyPr wrap="none" lIns="45720" rIns="45720" tIns="18288" bIns="18288" anchor="ctr">
-            <a:spAutoFit/>
+            <a:noAutofit/>
           </a:bodyPr>
           <a:lstStyle/>
           <a:p>
@@ -13672,8 +13672,8 @@
         </p:nvSpPr>
         <p:spPr>
           <a:xfrm>
-            <a:off x="1874519" y="3557016"/>
-            <a:ext cx="3551936" cy="457200"/>
+            <a:off x="1874519" y="4055363"/>
+            <a:ext cx="3064939" cy="457200"/>
           </a:xfrm>
           <a:prstGeom prst="rect">
             <a:avLst/>
@@ -13682,7 +13682,7 @@
         </p:spPr>
         <p:txBody>
           <a:bodyPr wrap="none" lIns="45720" rIns="45720" tIns="18288" bIns="18288" anchor="ctr">
-            <a:spAutoFit/>
+            <a:noAutofit/>
           </a:bodyPr>
           <a:lstStyle/>
           <a:p>
@@ -13701,7 +13701,7 @@
       </p:sp>
       <p:pic>
         <p:nvPicPr>
-          <p:cNvPr id="16" name="Picture 15" descr="5ef59c513095b51f.png"/>
+          <p:cNvPr id="16" name="Picture 15" descr="574a5d3a612aa104.png"/>
           <p:cNvPicPr>
             <a:picLocks noChangeAspect="1"/>
           </p:cNvPicPr>
@@ -13715,8 +13715,8 @@
         </p:blipFill>
         <p:spPr>
           <a:xfrm>
-            <a:off x="5289296" y="3535680"/>
-            <a:ext cx="329184" cy="499871"/>
+            <a:off x="4802299" y="3950207"/>
+            <a:ext cx="469392" cy="667512"/>
           </a:xfrm>
           <a:prstGeom prst="rect">
             <a:avLst/>
@@ -13731,8 +13731,8 @@
         </p:nvSpPr>
         <p:spPr>
           <a:xfrm>
-            <a:off x="6167120" y="3512820"/>
-            <a:ext cx="718566" cy="457200"/>
+            <a:off x="5820331" y="3927347"/>
+            <a:ext cx="743533" cy="457200"/>
           </a:xfrm>
           <a:prstGeom prst="rect">
             <a:avLst/>
@@ -13741,7 +13741,7 @@
         </p:spPr>
         <p:txBody>
           <a:bodyPr wrap="none" lIns="45720" rIns="45720" tIns="18288" bIns="18288" anchor="ctr">
-            <a:spAutoFit/>
+            <a:noAutofit/>
           </a:bodyPr>
           <a:lstStyle/>
           <a:p>
@@ -13766,8 +13766,8 @@
         </p:nvSpPr>
         <p:spPr>
           <a:xfrm>
-            <a:off x="1874519" y="4213860"/>
-            <a:ext cx="7197344" cy="457200"/>
+            <a:off x="1874519" y="4796027"/>
+            <a:ext cx="6243654" cy="457200"/>
           </a:xfrm>
           <a:prstGeom prst="rect">
             <a:avLst/>
@@ -13776,7 +13776,7 @@
         </p:spPr>
         <p:txBody>
           <a:bodyPr wrap="none" lIns="45720" rIns="45720" tIns="18288" bIns="18288" anchor="ctr">
-            <a:spAutoFit/>
+            <a:noAutofit/>
           </a:bodyPr>
           <a:lstStyle/>
           <a:p>
@@ -13809,7 +13809,7 @@
         </p:blipFill>
         <p:spPr>
           <a:xfrm>
-            <a:off x="2606040" y="4762500"/>
+            <a:off x="8529654" y="4887467"/>
             <a:ext cx="268224" cy="274320"/>
           </a:xfrm>
           <a:prstGeom prst="rect">
@@ -13825,8 +13825,8 @@
         </p:nvSpPr>
         <p:spPr>
           <a:xfrm>
-            <a:off x="2874264" y="4671060"/>
-            <a:ext cx="718566" cy="457200"/>
+            <a:off x="8797878" y="4796027"/>
+            <a:ext cx="474135" cy="457200"/>
           </a:xfrm>
           <a:prstGeom prst="rect">
             <a:avLst/>
@@ -13835,7 +13835,7 @@
         </p:spPr>
         <p:txBody>
           <a:bodyPr wrap="none" lIns="45720" rIns="45720" tIns="18288" bIns="18288" anchor="ctr">
-            <a:spAutoFit/>
+            <a:noAutofit/>
           </a:bodyPr>
           <a:lstStyle/>
           <a:p>
@@ -13868,7 +13868,7 @@
         </p:blipFill>
         <p:spPr>
           <a:xfrm>
-            <a:off x="3455670" y="4762500"/>
+            <a:off x="9134854" y="4887467"/>
             <a:ext cx="265176" cy="274320"/>
           </a:xfrm>
           <a:prstGeom prst="rect">
@@ -13884,8 +13884,8 @@
         </p:nvSpPr>
         <p:spPr>
           <a:xfrm>
-            <a:off x="3720846" y="4671060"/>
-            <a:ext cx="718566" cy="457200"/>
+            <a:off x="9400030" y="4796027"/>
+            <a:ext cx="474135" cy="457200"/>
           </a:xfrm>
           <a:prstGeom prst="rect">
             <a:avLst/>
@@ -13894,7 +13894,7 @@
         </p:spPr>
         <p:txBody>
           <a:bodyPr wrap="none" lIns="45720" rIns="45720" tIns="18288" bIns="18288" anchor="ctr">
-            <a:spAutoFit/>
+            <a:noAutofit/>
           </a:bodyPr>
           <a:lstStyle/>
           <a:p>
@@ -13927,7 +13927,7 @@
         </p:blipFill>
         <p:spPr>
           <a:xfrm>
-            <a:off x="4302252" y="4759452"/>
+            <a:off x="9737005" y="4884419"/>
             <a:ext cx="259080" cy="280416"/>
           </a:xfrm>
           <a:prstGeom prst="rect">
@@ -14989,8 +14989,8 @@
         </p:nvSpPr>
         <p:spPr>
           <a:xfrm>
-            <a:off x="1435607" y="2223516"/>
-            <a:ext cx="2442464" cy="457200"/>
+            <a:off x="1627294" y="2304288"/>
+            <a:ext cx="2254011" cy="457200"/>
           </a:xfrm>
           <a:prstGeom prst="rect">
             <a:avLst/>
@@ -14999,7 +14999,7 @@
         </p:spPr>
         <p:txBody>
           <a:bodyPr wrap="none" lIns="45720" rIns="45720" tIns="18288" bIns="18288" anchor="ctr">
-            <a:spAutoFit/>
+            <a:noAutofit/>
           </a:bodyPr>
           <a:lstStyle/>
           <a:p>
@@ -15018,7 +15018,7 @@
       </p:sp>
       <p:pic>
         <p:nvPicPr>
-          <p:cNvPr id="10" name="Picture 9" descr="80a2fc1abc20053f.png"/>
+          <p:cNvPr id="10" name="Picture 9" descr="928a3b4f052209d4.png"/>
           <p:cNvPicPr>
             <a:picLocks noChangeAspect="1"/>
           </p:cNvPicPr>
@@ -15032,8 +15032,8 @@
         </p:blipFill>
         <p:spPr>
           <a:xfrm>
-            <a:off x="3740912" y="2194560"/>
-            <a:ext cx="1450848" cy="515112"/>
+            <a:off x="3744146" y="2194560"/>
+            <a:ext cx="1569720" cy="676656"/>
           </a:xfrm>
           <a:prstGeom prst="rect">
             <a:avLst/>
@@ -15048,8 +15048,8 @@
         </p:nvSpPr>
         <p:spPr>
           <a:xfrm>
-            <a:off x="5191760" y="2223516"/>
-            <a:ext cx="1412240" cy="457200"/>
+            <a:off x="5313866" y="2304288"/>
+            <a:ext cx="1208866" cy="457200"/>
           </a:xfrm>
           <a:prstGeom prst="rect">
             <a:avLst/>
@@ -15058,7 +15058,7 @@
         </p:spPr>
         <p:txBody>
           <a:bodyPr wrap="none" lIns="45720" rIns="45720" tIns="18288" bIns="18288" anchor="ctr">
-            <a:spAutoFit/>
+            <a:noAutofit/>
           </a:bodyPr>
           <a:lstStyle/>
           <a:p>
@@ -15077,7 +15077,7 @@
       </p:sp>
       <p:pic>
         <p:nvPicPr>
-          <p:cNvPr id="12" name="Picture 11" descr="ba89abb5740e24f6.png"/>
+          <p:cNvPr id="12" name="Picture 11" descr="b84e4faf30935505.png"/>
           <p:cNvPicPr>
             <a:picLocks noChangeAspect="1"/>
           </p:cNvPicPr>
@@ -15091,8 +15091,8 @@
         </p:blipFill>
         <p:spPr>
           <a:xfrm>
-            <a:off x="6466840" y="2194560"/>
-            <a:ext cx="1438656" cy="515112"/>
+            <a:off x="6385572" y="2194560"/>
+            <a:ext cx="1557528" cy="676656"/>
           </a:xfrm>
           <a:prstGeom prst="rect">
             <a:avLst/>
@@ -15107,8 +15107,8 @@
         </p:nvSpPr>
         <p:spPr>
           <a:xfrm>
-            <a:off x="7905496" y="2223516"/>
-            <a:ext cx="2957576" cy="457200"/>
+            <a:off x="7943100" y="2304288"/>
+            <a:ext cx="2728284" cy="457200"/>
           </a:xfrm>
           <a:prstGeom prst="rect">
             <a:avLst/>
@@ -15117,7 +15117,7 @@
         </p:spPr>
         <p:txBody>
           <a:bodyPr wrap="none" lIns="45720" rIns="45720" tIns="18288" bIns="18288" anchor="ctr">
-            <a:spAutoFit/>
+            <a:noAutofit/>
           </a:bodyPr>
           <a:lstStyle/>
           <a:p>
@@ -15142,8 +15142,8 @@
         </p:nvSpPr>
         <p:spPr>
           <a:xfrm>
-            <a:off x="1626107" y="2961132"/>
-            <a:ext cx="5704840" cy="457200"/>
+            <a:off x="1893296" y="3122675"/>
+            <a:ext cx="5363839" cy="457200"/>
           </a:xfrm>
           <a:prstGeom prst="rect">
             <a:avLst/>
@@ -15152,7 +15152,7 @@
         </p:spPr>
         <p:txBody>
           <a:bodyPr wrap="none" lIns="45720" rIns="45720" tIns="18288" bIns="18288" anchor="ctr">
-            <a:spAutoFit/>
+            <a:noAutofit/>
           </a:bodyPr>
           <a:lstStyle/>
           <a:p>
@@ -15185,7 +15185,7 @@
         </p:blipFill>
         <p:spPr>
           <a:xfrm>
-            <a:off x="7193788" y="3023616"/>
+            <a:off x="7119975" y="3185159"/>
             <a:ext cx="521207" cy="332232"/>
           </a:xfrm>
           <a:prstGeom prst="rect">
@@ -15201,8 +15201,8 @@
         </p:nvSpPr>
         <p:spPr>
           <a:xfrm>
-            <a:off x="7714996" y="2961132"/>
-            <a:ext cx="2957576" cy="457200"/>
+            <a:off x="7641183" y="3122675"/>
+            <a:ext cx="2764200" cy="457200"/>
           </a:xfrm>
           <a:prstGeom prst="rect">
             <a:avLst/>
@@ -15211,7 +15211,7 @@
         </p:spPr>
         <p:txBody>
           <a:bodyPr wrap="none" lIns="45720" rIns="45720" tIns="18288" bIns="18288" anchor="ctr">
-            <a:spAutoFit/>
+            <a:noAutofit/>
           </a:bodyPr>
           <a:lstStyle/>
           <a:p>
@@ -15569,8 +15569,8 @@
         </p:nvSpPr>
         <p:spPr>
           <a:xfrm>
-            <a:off x="1435607" y="2132076"/>
-            <a:ext cx="2442464" cy="457200"/>
+            <a:off x="1627294" y="2212848"/>
+            <a:ext cx="2254011" cy="457200"/>
           </a:xfrm>
           <a:prstGeom prst="rect">
             <a:avLst/>
@@ -15579,7 +15579,7 @@
         </p:spPr>
         <p:txBody>
           <a:bodyPr wrap="none" lIns="45720" rIns="45720" tIns="18288" bIns="18288" anchor="ctr">
-            <a:spAutoFit/>
+            <a:noAutofit/>
           </a:bodyPr>
           <a:lstStyle/>
           <a:p>
@@ -15598,7 +15598,7 @@
       </p:sp>
       <p:pic>
         <p:nvPicPr>
-          <p:cNvPr id="10" name="Picture 9" descr="80a2fc1abc20053f.png"/>
+          <p:cNvPr id="10" name="Picture 9" descr="928a3b4f052209d4.png"/>
           <p:cNvPicPr>
             <a:picLocks noChangeAspect="1"/>
           </p:cNvPicPr>
@@ -15612,8 +15612,8 @@
         </p:blipFill>
         <p:spPr>
           <a:xfrm>
-            <a:off x="3740912" y="2103120"/>
-            <a:ext cx="1450848" cy="515112"/>
+            <a:off x="3744146" y="2103120"/>
+            <a:ext cx="1569720" cy="676656"/>
           </a:xfrm>
           <a:prstGeom prst="rect">
             <a:avLst/>
@@ -15628,8 +15628,8 @@
         </p:nvSpPr>
         <p:spPr>
           <a:xfrm>
-            <a:off x="5191760" y="2132076"/>
-            <a:ext cx="1412240" cy="457200"/>
+            <a:off x="5313866" y="2212848"/>
+            <a:ext cx="1208866" cy="457200"/>
           </a:xfrm>
           <a:prstGeom prst="rect">
             <a:avLst/>
@@ -15638,7 +15638,7 @@
         </p:spPr>
         <p:txBody>
           <a:bodyPr wrap="none" lIns="45720" rIns="45720" tIns="18288" bIns="18288" anchor="ctr">
-            <a:spAutoFit/>
+            <a:noAutofit/>
           </a:bodyPr>
           <a:lstStyle/>
           <a:p>
@@ -15657,7 +15657,7 @@
       </p:sp>
       <p:pic>
         <p:nvPicPr>
-          <p:cNvPr id="12" name="Picture 11" descr="ba89abb5740e24f6.png"/>
+          <p:cNvPr id="12" name="Picture 11" descr="b84e4faf30935505.png"/>
           <p:cNvPicPr>
             <a:picLocks noChangeAspect="1"/>
           </p:cNvPicPr>
@@ -15671,8 +15671,8 @@
         </p:blipFill>
         <p:spPr>
           <a:xfrm>
-            <a:off x="6466840" y="2103120"/>
-            <a:ext cx="1438656" cy="515112"/>
+            <a:off x="6385572" y="2103120"/>
+            <a:ext cx="1557528" cy="676656"/>
           </a:xfrm>
           <a:prstGeom prst="rect">
             <a:avLst/>
@@ -15687,8 +15687,8 @@
         </p:nvSpPr>
         <p:spPr>
           <a:xfrm>
-            <a:off x="7905496" y="2132076"/>
-            <a:ext cx="2957576" cy="457200"/>
+            <a:off x="7943100" y="2212848"/>
+            <a:ext cx="2728284" cy="457200"/>
           </a:xfrm>
           <a:prstGeom prst="rect">
             <a:avLst/>
@@ -15697,7 +15697,7 @@
         </p:spPr>
         <p:txBody>
           <a:bodyPr wrap="none" lIns="45720" rIns="45720" tIns="18288" bIns="18288" anchor="ctr">
-            <a:spAutoFit/>
+            <a:noAutofit/>
           </a:bodyPr>
           <a:lstStyle/>
           <a:p>
@@ -15722,8 +15722,8 @@
         </p:nvSpPr>
         <p:spPr>
           <a:xfrm>
-            <a:off x="1626107" y="2869692"/>
-            <a:ext cx="5704840" cy="457200"/>
+            <a:off x="1893296" y="3031236"/>
+            <a:ext cx="5363839" cy="457200"/>
           </a:xfrm>
           <a:prstGeom prst="rect">
             <a:avLst/>
@@ -15732,7 +15732,7 @@
         </p:spPr>
         <p:txBody>
           <a:bodyPr wrap="none" lIns="45720" rIns="45720" tIns="18288" bIns="18288" anchor="ctr">
-            <a:spAutoFit/>
+            <a:noAutofit/>
           </a:bodyPr>
           <a:lstStyle/>
           <a:p>
@@ -15765,7 +15765,7 @@
         </p:blipFill>
         <p:spPr>
           <a:xfrm>
-            <a:off x="7193788" y="2932176"/>
+            <a:off x="7119975" y="3093720"/>
             <a:ext cx="521207" cy="332232"/>
           </a:xfrm>
           <a:prstGeom prst="rect">
@@ -15781,8 +15781,8 @@
         </p:nvSpPr>
         <p:spPr>
           <a:xfrm>
-            <a:off x="7714996" y="2869692"/>
-            <a:ext cx="2957576" cy="457200"/>
+            <a:off x="7641183" y="3031236"/>
+            <a:ext cx="2764200" cy="457200"/>
           </a:xfrm>
           <a:prstGeom prst="rect">
             <a:avLst/>
@@ -15791,7 +15791,7 @@
         </p:spPr>
         <p:txBody>
           <a:bodyPr wrap="none" lIns="45720" rIns="45720" tIns="18288" bIns="18288" anchor="ctr">
-            <a:spAutoFit/>
+            <a:noAutofit/>
           </a:bodyPr>
           <a:lstStyle/>
           <a:p>
@@ -15816,7 +15816,7 @@
         </p:nvSpPr>
         <p:spPr>
           <a:xfrm>
-            <a:off x="1828800" y="3624071"/>
+            <a:off x="1828800" y="3785615"/>
             <a:ext cx="8503920" cy="548640"/>
           </a:xfrm>
           <a:prstGeom prst="rect">
@@ -17289,8 +17289,8 @@
         </p:nvSpPr>
         <p:spPr>
           <a:xfrm>
-            <a:off x="3626611" y="2397252"/>
-            <a:ext cx="1927352" cy="457200"/>
+            <a:off x="3454360" y="2491740"/>
+            <a:ext cx="1811606" cy="457200"/>
           </a:xfrm>
           <a:prstGeom prst="rect">
             <a:avLst/>
@@ -17299,7 +17299,7 @@
         </p:spPr>
         <p:txBody>
           <a:bodyPr wrap="none" lIns="45720" rIns="45720" tIns="18288" bIns="18288" anchor="ctr">
-            <a:spAutoFit/>
+            <a:noAutofit/>
           </a:bodyPr>
           <a:lstStyle/>
           <a:p>
@@ -17318,7 +17318,7 @@
       </p:sp>
       <p:pic>
         <p:nvPicPr>
-          <p:cNvPr id="11" name="Picture 10" descr="9774f86ed8fb46e5.png"/>
+          <p:cNvPr id="11" name="Picture 10" descr="0d20078542d535de.png"/>
           <p:cNvPicPr>
             <a:picLocks noChangeAspect="1"/>
           </p:cNvPicPr>
@@ -17332,8 +17332,8 @@
         </p:blipFill>
         <p:spPr>
           <a:xfrm>
-            <a:off x="5416804" y="2340864"/>
-            <a:ext cx="3118104" cy="569976"/>
+            <a:off x="5128807" y="2340864"/>
+            <a:ext cx="3578352" cy="758952"/>
           </a:xfrm>
           <a:prstGeom prst="rect">
             <a:avLst/>
@@ -17348,8 +17348,8 @@
         </p:nvSpPr>
         <p:spPr>
           <a:xfrm>
-            <a:off x="3218180" y="3299460"/>
-            <a:ext cx="1927352" cy="457200"/>
+            <a:off x="2790638" y="3692652"/>
+            <a:ext cx="1712587" cy="457200"/>
           </a:xfrm>
           <a:prstGeom prst="rect">
             <a:avLst/>
@@ -17358,7 +17358,7 @@
         </p:spPr>
         <p:txBody>
           <a:bodyPr wrap="none" lIns="45720" rIns="45720" tIns="18288" bIns="18288" anchor="ctr">
-            <a:spAutoFit/>
+            <a:noAutofit/>
           </a:bodyPr>
           <a:lstStyle/>
           <a:p>
@@ -17377,7 +17377,7 @@
       </p:sp>
       <p:pic>
         <p:nvPicPr>
-          <p:cNvPr id="13" name="Picture 12" descr="6615874039b71958.png"/>
+          <p:cNvPr id="13" name="Picture 12" descr="c465db9a1afbefbd.png"/>
           <p:cNvPicPr>
             <a:picLocks noChangeAspect="1"/>
           </p:cNvPicPr>
@@ -17391,8 +17391,8 @@
         </p:blipFill>
         <p:spPr>
           <a:xfrm>
-            <a:off x="5008372" y="3185160"/>
-            <a:ext cx="3934968" cy="685800"/>
+            <a:off x="4366065" y="3374136"/>
+            <a:ext cx="5004816" cy="1094232"/>
           </a:xfrm>
           <a:prstGeom prst="rect">
             <a:avLst/>
@@ -17407,7 +17407,7 @@
         </p:nvSpPr>
         <p:spPr>
           <a:xfrm>
-            <a:off x="987552" y="4209288"/>
+            <a:off x="987552" y="4806696"/>
             <a:ext cx="10131551" cy="950976"/>
           </a:xfrm>
           <a:prstGeom prst="rect">
@@ -17769,7 +17769,7 @@
       </p:cxnSp>
       <p:pic>
         <p:nvPicPr>
-          <p:cNvPr id="11" name="Picture 10" descr="a70782e51603e436.png"/>
+          <p:cNvPr id="11" name="Picture 10" descr="c45ea5ac81fe31b2.png"/>
           <p:cNvPicPr>
             <a:picLocks noChangeAspect="1"/>
           </p:cNvPicPr>
@@ -17783,8 +17783,8 @@
         </p:blipFill>
         <p:spPr>
           <a:xfrm>
-            <a:off x="3649980" y="2340864"/>
-            <a:ext cx="4861560" cy="655320"/>
+            <a:off x="3384804" y="2340864"/>
+            <a:ext cx="5391912" cy="880872"/>
           </a:xfrm>
           <a:prstGeom prst="rect">
             <a:avLst/>
@@ -17799,7 +17799,7 @@
         </p:nvSpPr>
         <p:spPr>
           <a:xfrm>
-            <a:off x="987552" y="3334512"/>
+            <a:off x="987552" y="3560064"/>
             <a:ext cx="10131551" cy="475488"/>
           </a:xfrm>
           <a:prstGeom prst="rect">
@@ -17828,7 +17828,7 @@
       </p:sp>
       <p:pic>
         <p:nvPicPr>
-          <p:cNvPr id="13" name="Picture 12" descr="7bad2695344f5876.png"/>
+          <p:cNvPr id="13" name="Picture 12" descr="a4f17c6e045bd6bf.png"/>
           <p:cNvPicPr>
             <a:picLocks noChangeAspect="1"/>
           </p:cNvPicPr>
@@ -17842,8 +17842,8 @@
         </p:blipFill>
         <p:spPr>
           <a:xfrm>
-            <a:off x="987552" y="4047744"/>
-            <a:ext cx="3188208" cy="521207"/>
+            <a:off x="987552" y="4273296"/>
+            <a:ext cx="3526536" cy="682752"/>
           </a:xfrm>
           <a:prstGeom prst="rect">
             <a:avLst/>
@@ -17858,8 +17858,8 @@
         </p:nvSpPr>
         <p:spPr>
           <a:xfrm>
-            <a:off x="4175760" y="4079748"/>
-            <a:ext cx="4925568" cy="457200"/>
+            <a:off x="4514088" y="4386071"/>
+            <a:ext cx="4614173" cy="457200"/>
           </a:xfrm>
           <a:prstGeom prst="rect">
             <a:avLst/>
@@ -17868,7 +17868,7 @@
         </p:spPr>
         <p:txBody>
           <a:bodyPr wrap="none" lIns="45720" rIns="45720" tIns="18288" bIns="18288" anchor="ctr">
-            <a:spAutoFit/>
+            <a:noAutofit/>
           </a:bodyPr>
           <a:lstStyle/>
           <a:p>
@@ -17887,7 +17887,7 @@
       </p:sp>
       <p:pic>
         <p:nvPicPr>
-          <p:cNvPr id="15" name="Picture 14" descr="f0cdaba5ba148952.png"/>
+          <p:cNvPr id="15" name="Picture 14" descr="8f1aef55fede7e13.png"/>
           <p:cNvPicPr>
             <a:picLocks noChangeAspect="1"/>
           </p:cNvPicPr>
@@ -17901,8 +17901,8 @@
         </p:blipFill>
         <p:spPr>
           <a:xfrm>
-            <a:off x="8964168" y="4047744"/>
-            <a:ext cx="670560" cy="521207"/>
+            <a:off x="8991101" y="4273296"/>
+            <a:ext cx="789432" cy="682752"/>
           </a:xfrm>
           <a:prstGeom prst="rect">
             <a:avLst/>
@@ -17911,7 +17911,7 @@
       </p:pic>
       <p:pic>
         <p:nvPicPr>
-          <p:cNvPr id="16" name="Picture 15" descr="c94e5a241f690412.png"/>
+          <p:cNvPr id="16" name="Picture 15" descr="9177811477d4a64c.png"/>
           <p:cNvPicPr>
             <a:picLocks noChangeAspect="1"/>
           </p:cNvPicPr>
@@ -17925,8 +17925,8 @@
         </p:blipFill>
         <p:spPr>
           <a:xfrm>
-            <a:off x="987552" y="4824984"/>
-            <a:ext cx="1682496" cy="600456"/>
+            <a:off x="987552" y="5212080"/>
+            <a:ext cx="1969008" cy="807720"/>
           </a:xfrm>
           <a:prstGeom prst="rect">
             <a:avLst/>
@@ -17941,8 +17941,8 @@
         </p:nvSpPr>
         <p:spPr>
           <a:xfrm>
-            <a:off x="2670048" y="4896612"/>
-            <a:ext cx="6728460" cy="457200"/>
+            <a:off x="2956560" y="5387340"/>
+            <a:ext cx="6270420" cy="457200"/>
           </a:xfrm>
           <a:prstGeom prst="rect">
             <a:avLst/>
@@ -17951,7 +17951,7 @@
         </p:spPr>
         <p:txBody>
           <a:bodyPr wrap="none" lIns="45720" rIns="45720" tIns="18288" bIns="18288" anchor="ctr">
-            <a:spAutoFit/>
+            <a:noAutofit/>
           </a:bodyPr>
           <a:lstStyle/>
           <a:p>
@@ -17970,7 +17970,7 @@
       </p:sp>
       <p:pic>
         <p:nvPicPr>
-          <p:cNvPr id="18" name="Picture 17" descr="9022df083cd62fd6.png"/>
+          <p:cNvPr id="18" name="Picture 17" descr="be9511aed8c2056e.png"/>
           <p:cNvPicPr>
             <a:picLocks noChangeAspect="1"/>
           </p:cNvPicPr>
@@ -17984,8 +17984,8 @@
         </p:blipFill>
         <p:spPr>
           <a:xfrm>
-            <a:off x="9261348" y="4867656"/>
-            <a:ext cx="655320" cy="515112"/>
+            <a:off x="9089820" y="5277612"/>
+            <a:ext cx="774192" cy="676656"/>
           </a:xfrm>
           <a:prstGeom prst="rect">
             <a:avLst/>
@@ -19256,7 +19256,7 @@
         </p:blipFill>
         <p:spPr>
           <a:xfrm>
-            <a:off x="2999740" y="4105656"/>
+            <a:off x="3297420" y="4105656"/>
             <a:ext cx="2423160" cy="414528"/>
           </a:xfrm>
           <a:prstGeom prst="rect">
@@ -19272,8 +19272,8 @@
         </p:nvSpPr>
         <p:spPr>
           <a:xfrm>
-            <a:off x="5422900" y="4084320"/>
-            <a:ext cx="1583944" cy="457200"/>
+            <a:off x="5720580" y="4084320"/>
+            <a:ext cx="988583" cy="457200"/>
           </a:xfrm>
           <a:prstGeom prst="rect">
             <a:avLst/>
@@ -19282,7 +19282,7 @@
         </p:spPr>
         <p:txBody>
           <a:bodyPr wrap="none" lIns="45720" rIns="45720" tIns="18288" bIns="18288" anchor="ctr">
-            <a:spAutoFit/>
+            <a:noAutofit/>
           </a:bodyPr>
           <a:lstStyle/>
           <a:p>
@@ -19315,7 +19315,7 @@
         </p:blipFill>
         <p:spPr>
           <a:xfrm>
-            <a:off x="6869684" y="4107180"/>
+            <a:off x="6572003" y="4107180"/>
             <a:ext cx="2292096" cy="411480"/>
           </a:xfrm>
           <a:prstGeom prst="rect">
@@ -19647,7 +19647,7 @@
       </p:cxnSp>
       <p:pic>
         <p:nvPicPr>
-          <p:cNvPr id="10" name="Picture 9" descr="67888014a8d21871.png"/>
+          <p:cNvPr id="10" name="Picture 9" descr="7440dcda2729733e.png"/>
           <p:cNvPicPr>
             <a:picLocks noChangeAspect="1"/>
           </p:cNvPicPr>
@@ -19661,8 +19661,8 @@
         </p:blipFill>
         <p:spPr>
           <a:xfrm>
-            <a:off x="1006855" y="2340864"/>
-            <a:ext cx="4175760" cy="515112"/>
+            <a:off x="1263132" y="2340864"/>
+            <a:ext cx="4291584" cy="676656"/>
           </a:xfrm>
           <a:prstGeom prst="rect">
             <a:avLst/>
@@ -19677,8 +19677,8 @@
         </p:nvSpPr>
         <p:spPr>
           <a:xfrm>
-            <a:off x="5182616" y="2369820"/>
-            <a:ext cx="1927352" cy="457200"/>
+            <a:off x="5554716" y="2450592"/>
+            <a:ext cx="1183151" cy="457200"/>
           </a:xfrm>
           <a:prstGeom prst="rect">
             <a:avLst/>
@@ -19687,7 +19687,7 @@
         </p:spPr>
         <p:txBody>
           <a:bodyPr wrap="none" lIns="45720" rIns="45720" tIns="18288" bIns="18288" anchor="ctr">
-            <a:spAutoFit/>
+            <a:noAutofit/>
           </a:bodyPr>
           <a:lstStyle/>
           <a:p>
@@ -19706,7 +19706,7 @@
       </p:sp>
       <p:pic>
         <p:nvPicPr>
-          <p:cNvPr id="12" name="Picture 11" descr="8f4222ea95a1d769.png"/>
+          <p:cNvPr id="12" name="Picture 11" descr="bb6220d5ac80be69.png"/>
           <p:cNvPicPr>
             <a:picLocks noChangeAspect="1"/>
           </p:cNvPicPr>
@@ -19720,8 +19720,8 @@
         </p:blipFill>
         <p:spPr>
           <a:xfrm>
-            <a:off x="6972808" y="2340864"/>
-            <a:ext cx="4181856" cy="515112"/>
+            <a:off x="6600707" y="2340864"/>
+            <a:ext cx="4297680" cy="676656"/>
           </a:xfrm>
           <a:prstGeom prst="rect">
             <a:avLst/>
@@ -19736,7 +19736,7 @@
         </p:nvSpPr>
         <p:spPr>
           <a:xfrm>
-            <a:off x="987552" y="3194304"/>
+            <a:off x="987552" y="3355847"/>
             <a:ext cx="10131551" cy="475488"/>
           </a:xfrm>
           <a:prstGeom prst="rect">
@@ -19779,7 +19779,7 @@
         </p:blipFill>
         <p:spPr>
           <a:xfrm>
-            <a:off x="987552" y="3910583"/>
+            <a:off x="987552" y="4072127"/>
             <a:ext cx="1487424" cy="405384"/>
           </a:xfrm>
           <a:prstGeom prst="rect">
@@ -19795,8 +19795,8 @@
         </p:nvSpPr>
         <p:spPr>
           <a:xfrm>
-            <a:off x="2474976" y="3884675"/>
-            <a:ext cx="3551936" cy="457200"/>
+            <a:off x="2474976" y="4046219"/>
+            <a:ext cx="3404171" cy="457200"/>
           </a:xfrm>
           <a:prstGeom prst="rect">
             <a:avLst/>
@@ -19805,7 +19805,7 @@
         </p:spPr>
         <p:txBody>
           <a:bodyPr wrap="none" lIns="45720" rIns="45720" tIns="18288" bIns="18288" anchor="ctr">
-            <a:spAutoFit/>
+            <a:noAutofit/>
           </a:bodyPr>
           <a:lstStyle/>
           <a:p>
@@ -20087,7 +20087,7 @@
       </p:sp>
       <p:pic>
         <p:nvPicPr>
-          <p:cNvPr id="9" name="Picture 8" descr="19284168b51ba772.png"/>
+          <p:cNvPr id="9" name="Picture 8" descr="2d16e4daaa9b6d11.png"/>
           <p:cNvPicPr>
             <a:picLocks noChangeAspect="1"/>
           </p:cNvPicPr>
@@ -20101,8 +20101,8 @@
         </p:blipFill>
         <p:spPr>
           <a:xfrm>
-            <a:off x="5433060" y="2103120"/>
-            <a:ext cx="1295400" cy="518160"/>
+            <a:off x="5373623" y="2103120"/>
+            <a:ext cx="1414272" cy="676656"/>
           </a:xfrm>
           <a:prstGeom prst="rect">
             <a:avLst/>
@@ -20117,7 +20117,7 @@
         </p:nvSpPr>
         <p:spPr>
           <a:xfrm>
-            <a:off x="777240" y="3124200"/>
+            <a:off x="777240" y="3282696"/>
             <a:ext cx="10607040" cy="429370"/>
           </a:xfrm>
           <a:prstGeom prst="rect">
@@ -20409,7 +20409,7 @@
       </p:sp>
       <p:pic>
         <p:nvPicPr>
-          <p:cNvPr id="9" name="Picture 8" descr="b7be03a49ce66e18.png"/>
+          <p:cNvPr id="9" name="Picture 8" descr="42a049a840fefcd3.png"/>
           <p:cNvPicPr>
             <a:picLocks noChangeAspect="1"/>
           </p:cNvPicPr>
@@ -20424,7 +20424,7 @@
         <p:spPr>
           <a:xfrm>
             <a:off x="1828800" y="1920240"/>
-            <a:ext cx="2880360" cy="518160"/>
+            <a:ext cx="3105912" cy="679704"/>
           </a:xfrm>
           <a:prstGeom prst="rect">
             <a:avLst/>
@@ -20439,8 +20439,8 @@
         </p:nvSpPr>
         <p:spPr>
           <a:xfrm>
-            <a:off x="5166360" y="1950720"/>
-            <a:ext cx="6217919" cy="502920"/>
+            <a:off x="5391912" y="2031492"/>
+            <a:ext cx="5992367" cy="502920"/>
           </a:xfrm>
           <a:prstGeom prst="rect">
             <a:avLst/>
@@ -20468,7 +20468,7 @@
       </p:sp>
       <p:pic>
         <p:nvPicPr>
-          <p:cNvPr id="11" name="Picture 10" descr="3a9d34925787092d.png"/>
+          <p:cNvPr id="11" name="Picture 10" descr="b6b18b3ca56125f7.png"/>
           <p:cNvPicPr>
             <a:picLocks noChangeAspect="1"/>
           </p:cNvPicPr>
@@ -20482,8 +20482,8 @@
         </p:blipFill>
         <p:spPr>
           <a:xfrm>
-            <a:off x="1828800" y="2712720"/>
-            <a:ext cx="1456944" cy="527304"/>
+            <a:off x="1828800" y="2874264"/>
+            <a:ext cx="1700784" cy="694944"/>
           </a:xfrm>
           <a:prstGeom prst="rect">
             <a:avLst/>
@@ -20498,7 +20498,7 @@
         </p:nvSpPr>
         <p:spPr>
           <a:xfrm>
-            <a:off x="3742944" y="2747772"/>
+            <a:off x="3986784" y="2993135"/>
             <a:ext cx="6400800" cy="502920"/>
           </a:xfrm>
           <a:prstGeom prst="rect">

--- a/a7/build/out/u3/A7 3.06  Slides.pptx
+++ b/a7/build/out/u3/A7 3.06  Slides.pptx
@@ -4105,7 +4105,7 @@
       </p:sp>
       <p:pic>
         <p:nvPicPr>
-          <p:cNvPr id="9" name="Picture 8" descr="b5586861463d6b87.png"/>
+          <p:cNvPr id="9" name="Picture 8" descr="c91e3e2a0926f9e8.png"/>
           <p:cNvPicPr>
             <a:picLocks noChangeAspect="1"/>
           </p:cNvPicPr>
@@ -4119,8 +4119,8 @@
         </p:blipFill>
         <p:spPr>
           <a:xfrm>
-            <a:off x="5184648" y="2194560"/>
-            <a:ext cx="1792224" cy="862584"/>
+            <a:off x="5183124" y="2194560"/>
+            <a:ext cx="1795272" cy="862584"/>
           </a:xfrm>
           <a:prstGeom prst="rect">
             <a:avLst/>
@@ -4955,7 +4955,7 @@
       </p:sp>
       <p:pic>
         <p:nvPicPr>
-          <p:cNvPr id="9" name="Picture 8" descr="352db5fe1644c824.png"/>
+          <p:cNvPr id="9" name="Picture 8" descr="313653eca9fb1e94.png"/>
           <p:cNvPicPr>
             <a:picLocks noChangeAspect="1"/>
           </p:cNvPicPr>
@@ -5014,7 +5014,7 @@
       </p:sp>
       <p:pic>
         <p:nvPicPr>
-          <p:cNvPr id="11" name="Picture 10" descr="e94dc10860a25cd3.png"/>
+          <p:cNvPr id="11" name="Picture 10" descr="72b47a90434b13b6.png"/>
           <p:cNvPicPr>
             <a:picLocks noChangeAspect="1"/>
           </p:cNvPicPr>
@@ -5029,7 +5029,7 @@
         <p:spPr>
           <a:xfrm>
             <a:off x="1828800" y="2542032"/>
-            <a:ext cx="3880104" cy="877824"/>
+            <a:ext cx="3892296" cy="874776"/>
           </a:xfrm>
           <a:prstGeom prst="rect">
             <a:avLst/>
@@ -5044,8 +5044,8 @@
         </p:nvSpPr>
         <p:spPr>
           <a:xfrm>
-            <a:off x="6166104" y="2752344"/>
-            <a:ext cx="5218175" cy="502920"/>
+            <a:off x="6178296" y="2750820"/>
+            <a:ext cx="5205983" cy="502920"/>
           </a:xfrm>
           <a:prstGeom prst="rect">
             <a:avLst/>
@@ -5073,7 +5073,7 @@
       </p:sp>
       <p:pic>
         <p:nvPicPr>
-          <p:cNvPr id="13" name="Picture 12" descr="72a96a3676b38c3c.png"/>
+          <p:cNvPr id="13" name="Picture 12" descr="4ce2189c51a32d89.png"/>
           <p:cNvPicPr>
             <a:picLocks noChangeAspect="1"/>
           </p:cNvPicPr>
@@ -5087,8 +5087,8 @@
         </p:blipFill>
         <p:spPr>
           <a:xfrm>
-            <a:off x="1828800" y="3694176"/>
-            <a:ext cx="2289048" cy="347472"/>
+            <a:off x="1828800" y="3691127"/>
+            <a:ext cx="2292096" cy="347472"/>
           </a:xfrm>
           <a:prstGeom prst="rect">
             <a:avLst/>
@@ -5103,7 +5103,7 @@
         </p:nvSpPr>
         <p:spPr>
           <a:xfrm>
-            <a:off x="4575048" y="3639312"/>
+            <a:off x="4578096" y="3636263"/>
             <a:ext cx="6400800" cy="502920"/>
           </a:xfrm>
           <a:prstGeom prst="rect">
@@ -5888,7 +5888,7 @@
         </p:nvSpPr>
         <p:spPr>
           <a:xfrm>
-            <a:off x="2676633" y="2516124"/>
+            <a:off x="2667489" y="2514600"/>
             <a:ext cx="988005" cy="457200"/>
           </a:xfrm>
           <a:prstGeom prst="rect">
@@ -5917,7 +5917,7 @@
       </p:sp>
       <p:pic>
         <p:nvPicPr>
-          <p:cNvPr id="10" name="Picture 9" descr="9b99919743149311.png"/>
+          <p:cNvPr id="10" name="Picture 9" descr="036a62ebcdd5b0b1.png"/>
           <p:cNvPicPr>
             <a:picLocks noChangeAspect="1"/>
           </p:cNvPicPr>
@@ -5931,8 +5931,8 @@
         </p:blipFill>
         <p:spPr>
           <a:xfrm>
-            <a:off x="3527478" y="2528315"/>
-            <a:ext cx="1411224" cy="432816"/>
+            <a:off x="3518334" y="2528315"/>
+            <a:ext cx="1414272" cy="429768"/>
           </a:xfrm>
           <a:prstGeom prst="rect">
             <a:avLst/>
@@ -5947,7 +5947,7 @@
         </p:nvSpPr>
         <p:spPr>
           <a:xfrm>
-            <a:off x="4938702" y="2516124"/>
+            <a:off x="4932606" y="2514600"/>
             <a:ext cx="1208866" cy="457200"/>
           </a:xfrm>
           <a:prstGeom prst="rect">
@@ -5976,7 +5976,7 @@
       </p:sp>
       <p:pic>
         <p:nvPicPr>
-          <p:cNvPr id="12" name="Picture 11" descr="e566d1e7830f898c.png"/>
+          <p:cNvPr id="12" name="Picture 11" descr="6cbd77409f62d10a.png"/>
           <p:cNvPicPr>
             <a:picLocks noChangeAspect="1"/>
           </p:cNvPicPr>
@@ -5990,8 +5990,8 @@
         </p:blipFill>
         <p:spPr>
           <a:xfrm>
-            <a:off x="6010408" y="2194560"/>
-            <a:ext cx="1350264" cy="1100328"/>
+            <a:off x="6004312" y="2194560"/>
+            <a:ext cx="1365504" cy="1097280"/>
           </a:xfrm>
           <a:prstGeom prst="rect">
             <a:avLst/>
@@ -6006,7 +6006,7 @@
         </p:nvSpPr>
         <p:spPr>
           <a:xfrm>
-            <a:off x="7360672" y="2516124"/>
+            <a:off x="7369816" y="2514600"/>
             <a:ext cx="2261373" cy="457200"/>
           </a:xfrm>
           <a:prstGeom prst="rect">
@@ -6041,7 +6041,7 @@
         </p:nvSpPr>
         <p:spPr>
           <a:xfrm>
-            <a:off x="777240" y="3614928"/>
+            <a:off x="777240" y="3611879"/>
             <a:ext cx="10607040" cy="429370"/>
           </a:xfrm>
           <a:prstGeom prst="rect">
@@ -6788,7 +6788,7 @@
       </p:sp>
       <p:pic>
         <p:nvPicPr>
-          <p:cNvPr id="9" name="Picture 8" descr="61e8ec21e00a8963.png"/>
+          <p:cNvPr id="9" name="Picture 8" descr="e9c3d2e1bc23afe6.png"/>
           <p:cNvPicPr>
             <a:picLocks noChangeAspect="1"/>
           </p:cNvPicPr>
@@ -6802,8 +6802,8 @@
         </p:blipFill>
         <p:spPr>
           <a:xfrm>
-            <a:off x="4783836" y="2103120"/>
-            <a:ext cx="2593848" cy="1188720"/>
+            <a:off x="4776215" y="2103120"/>
+            <a:ext cx="2609088" cy="1185672"/>
           </a:xfrm>
           <a:prstGeom prst="rect">
             <a:avLst/>
@@ -6818,7 +6818,7 @@
         </p:nvSpPr>
         <p:spPr>
           <a:xfrm>
-            <a:off x="1828800" y="3566159"/>
+            <a:off x="1828800" y="3563112"/>
             <a:ext cx="8503920" cy="548640"/>
           </a:xfrm>
           <a:prstGeom prst="rect">
@@ -7547,7 +7547,7 @@
       </p:sp>
       <p:pic>
         <p:nvPicPr>
-          <p:cNvPr id="9" name="Picture 8" descr="5a81991eb38a0b9a.png"/>
+          <p:cNvPr id="9" name="Picture 8" descr="29d8d4f07fac382c.png"/>
           <p:cNvPicPr>
             <a:picLocks noChangeAspect="1"/>
           </p:cNvPicPr>
@@ -7561,8 +7561,8 @@
         </p:blipFill>
         <p:spPr>
           <a:xfrm>
-            <a:off x="4733543" y="2103120"/>
-            <a:ext cx="2694432" cy="1865376"/>
+            <a:off x="4724399" y="2103120"/>
+            <a:ext cx="2712720" cy="1868424"/>
           </a:xfrm>
           <a:prstGeom prst="rect">
             <a:avLst/>
@@ -7577,7 +7577,7 @@
         </p:nvSpPr>
         <p:spPr>
           <a:xfrm>
-            <a:off x="1828800" y="4242816"/>
+            <a:off x="1828800" y="4245864"/>
             <a:ext cx="8503920" cy="548640"/>
           </a:xfrm>
           <a:prstGeom prst="rect">
@@ -7621,7 +7621,7 @@
         </p:nvSpPr>
         <p:spPr>
           <a:xfrm>
-            <a:off x="4991100" y="5126736"/>
+            <a:off x="4991100" y="5129784"/>
             <a:ext cx="1920240" cy="548640"/>
           </a:xfrm>
           <a:prstGeom prst="rect">
@@ -7664,7 +7664,7 @@
         </p:blipFill>
         <p:spPr>
           <a:xfrm>
-            <a:off x="6911340" y="4974336"/>
+            <a:off x="6911340" y="4977384"/>
             <a:ext cx="259080" cy="853440"/>
           </a:xfrm>
           <a:prstGeom prst="rect">
@@ -8769,7 +8769,7 @@
       </p:sp>
       <p:pic>
         <p:nvPicPr>
-          <p:cNvPr id="9" name="Picture 8" descr="2f8b87745f5bc5af.png"/>
+          <p:cNvPr id="9" name="Picture 8" descr="5e01597dd0b68729.png"/>
           <p:cNvPicPr>
             <a:picLocks noChangeAspect="1"/>
           </p:cNvPicPr>
@@ -8783,8 +8783,8 @@
         </p:blipFill>
         <p:spPr>
           <a:xfrm>
-            <a:off x="4646675" y="2103120"/>
-            <a:ext cx="2868168" cy="1432560"/>
+            <a:off x="4640579" y="2103120"/>
+            <a:ext cx="2880360" cy="1429512"/>
           </a:xfrm>
           <a:prstGeom prst="rect">
             <a:avLst/>
@@ -8799,7 +8799,7 @@
         </p:nvSpPr>
         <p:spPr>
           <a:xfrm>
-            <a:off x="1828800" y="3809999"/>
+            <a:off x="1828800" y="3806952"/>
             <a:ext cx="8503920" cy="548640"/>
           </a:xfrm>
           <a:prstGeom prst="rect">
@@ -9775,7 +9775,7 @@
         </p:nvSpPr>
         <p:spPr>
           <a:xfrm>
-            <a:off x="3685934" y="2080260"/>
+            <a:off x="3684410" y="2080260"/>
             <a:ext cx="2535136" cy="457200"/>
           </a:xfrm>
           <a:prstGeom prst="rect">
@@ -9804,7 +9804,7 @@
       </p:sp>
       <p:pic>
         <p:nvPicPr>
-          <p:cNvPr id="10" name="Picture 9" descr="326fb02d0e36fa30.png"/>
+          <p:cNvPr id="10" name="Picture 9" descr="bf9b1dd85a85733f.png"/>
           <p:cNvPicPr>
             <a:picLocks noChangeAspect="1"/>
           </p:cNvPicPr>
@@ -9818,8 +9818,8 @@
         </p:blipFill>
         <p:spPr>
           <a:xfrm>
-            <a:off x="6083911" y="2135124"/>
-            <a:ext cx="310896" cy="347472"/>
+            <a:off x="6082387" y="2135124"/>
+            <a:ext cx="313944" cy="347472"/>
           </a:xfrm>
           <a:prstGeom prst="rect">
             <a:avLst/>
@@ -9834,7 +9834,7 @@
         </p:nvSpPr>
         <p:spPr>
           <a:xfrm>
-            <a:off x="6394807" y="2080260"/>
+            <a:off x="6396331" y="2080260"/>
             <a:ext cx="2217937" cy="457200"/>
           </a:xfrm>
           <a:prstGeom prst="rect">
@@ -9904,7 +9904,7 @@
         </p:nvSpPr>
         <p:spPr>
           <a:xfrm>
-            <a:off x="3962878" y="3340939"/>
+            <a:off x="3961354" y="3340939"/>
             <a:ext cx="1311040" cy="457200"/>
           </a:xfrm>
           <a:prstGeom prst="rect">
@@ -9933,7 +9933,7 @@
       </p:sp>
       <p:pic>
         <p:nvPicPr>
-          <p:cNvPr id="14" name="Picture 13" descr="326fb02d0e36fa30.png"/>
+          <p:cNvPr id="14" name="Picture 13" descr="bf9b1dd85a85733f.png"/>
           <p:cNvPicPr>
             <a:picLocks noChangeAspect="1"/>
           </p:cNvPicPr>
@@ -9947,8 +9947,8 @@
         </p:blipFill>
         <p:spPr>
           <a:xfrm>
-            <a:off x="5136759" y="3395803"/>
-            <a:ext cx="310896" cy="347472"/>
+            <a:off x="5135235" y="3395803"/>
+            <a:ext cx="313944" cy="347472"/>
           </a:xfrm>
           <a:prstGeom prst="rect">
             <a:avLst/>
@@ -9963,7 +9963,7 @@
         </p:nvSpPr>
         <p:spPr>
           <a:xfrm>
-            <a:off x="5447655" y="3340939"/>
+            <a:off x="5449179" y="3340939"/>
             <a:ext cx="2888145" cy="457200"/>
           </a:xfrm>
           <a:prstGeom prst="rect">
@@ -10963,7 +10963,7 @@
       </p:sp>
       <p:pic>
         <p:nvPicPr>
-          <p:cNvPr id="9" name="Picture 8" descr="39fbeb40e62d1228.png"/>
+          <p:cNvPr id="9" name="Picture 8" descr="de0a72d7d8775cda.png"/>
           <p:cNvPicPr>
             <a:picLocks noChangeAspect="1"/>
           </p:cNvPicPr>
@@ -10977,8 +10977,8 @@
         </p:blipFill>
         <p:spPr>
           <a:xfrm>
-            <a:off x="5873496" y="2103120"/>
-            <a:ext cx="414528" cy="438912"/>
+            <a:off x="5870447" y="2103120"/>
+            <a:ext cx="420624" cy="432816"/>
           </a:xfrm>
           <a:prstGeom prst="rect">
             <a:avLst/>
@@ -10993,7 +10993,7 @@
         </p:nvSpPr>
         <p:spPr>
           <a:xfrm>
-            <a:off x="777240" y="2770632"/>
+            <a:off x="777240" y="2764535"/>
             <a:ext cx="10607040" cy="465151"/>
           </a:xfrm>
           <a:prstGeom prst="rect">
@@ -11028,7 +11028,7 @@
         </p:nvSpPr>
         <p:spPr>
           <a:xfrm>
-            <a:off x="1874519" y="3436951"/>
+            <a:off x="1874519" y="3430855"/>
             <a:ext cx="4572000" cy="548640"/>
           </a:xfrm>
           <a:prstGeom prst="rect">
@@ -11081,7 +11081,7 @@
         </p:nvSpPr>
         <p:spPr>
           <a:xfrm>
-            <a:off x="6629400" y="3436951"/>
+            <a:off x="6629400" y="3430855"/>
             <a:ext cx="4572000" cy="548640"/>
           </a:xfrm>
           <a:prstGeom prst="rect">
@@ -11134,7 +11134,7 @@
         </p:nvSpPr>
         <p:spPr>
           <a:xfrm>
-            <a:off x="1874519" y="4122751"/>
+            <a:off x="1874519" y="4116655"/>
             <a:ext cx="4572000" cy="548640"/>
           </a:xfrm>
           <a:prstGeom prst="rect">
@@ -11187,7 +11187,7 @@
         </p:nvSpPr>
         <p:spPr>
           <a:xfrm>
-            <a:off x="6629400" y="4122751"/>
+            <a:off x="6629400" y="4116655"/>
             <a:ext cx="4572000" cy="548640"/>
           </a:xfrm>
           <a:prstGeom prst="rect">
@@ -11240,7 +11240,7 @@
         </p:nvSpPr>
         <p:spPr>
           <a:xfrm>
-            <a:off x="777240" y="5128591"/>
+            <a:off x="777240" y="5122495"/>
             <a:ext cx="10607040" cy="548640"/>
           </a:xfrm>
           <a:prstGeom prst="rect">
@@ -12110,7 +12110,7 @@
       </p:sp>
       <p:pic>
         <p:nvPicPr>
-          <p:cNvPr id="9" name="Picture 8" descr="78733fd3b94c8799.png"/>
+          <p:cNvPr id="9" name="Picture 8" descr="273aa6b172e5136e.png"/>
           <p:cNvPicPr>
             <a:picLocks noChangeAspect="1"/>
           </p:cNvPicPr>
@@ -12125,7 +12125,7 @@
         <p:spPr>
           <a:xfrm>
             <a:off x="5097779" y="2103120"/>
-            <a:ext cx="1965960" cy="853440"/>
+            <a:ext cx="1965960" cy="850392"/>
           </a:xfrm>
           <a:prstGeom prst="rect">
             <a:avLst/>
@@ -12140,7 +12140,7 @@
         </p:nvSpPr>
         <p:spPr>
           <a:xfrm>
-            <a:off x="777240" y="3185160"/>
+            <a:off x="777240" y="3182112"/>
             <a:ext cx="10607040" cy="465151"/>
           </a:xfrm>
           <a:prstGeom prst="rect">
@@ -12175,7 +12175,7 @@
         </p:nvSpPr>
         <p:spPr>
           <a:xfrm>
-            <a:off x="1874519" y="3851479"/>
+            <a:off x="1874519" y="3848431"/>
             <a:ext cx="4572000" cy="548640"/>
           </a:xfrm>
           <a:prstGeom prst="rect">
@@ -12228,7 +12228,7 @@
         </p:nvSpPr>
         <p:spPr>
           <a:xfrm>
-            <a:off x="6629400" y="3851479"/>
+            <a:off x="6629400" y="3848431"/>
             <a:ext cx="4572000" cy="548640"/>
           </a:xfrm>
           <a:prstGeom prst="rect">
@@ -12281,7 +12281,7 @@
         </p:nvSpPr>
         <p:spPr>
           <a:xfrm>
-            <a:off x="1874519" y="4537279"/>
+            <a:off x="1874519" y="4534231"/>
             <a:ext cx="4572000" cy="548640"/>
           </a:xfrm>
           <a:prstGeom prst="rect">
@@ -12334,7 +12334,7 @@
         </p:nvSpPr>
         <p:spPr>
           <a:xfrm>
-            <a:off x="6629400" y="4537279"/>
+            <a:off x="6629400" y="4534231"/>
             <a:ext cx="4572000" cy="548640"/>
           </a:xfrm>
           <a:prstGeom prst="rect">
@@ -12387,7 +12387,7 @@
         </p:nvSpPr>
         <p:spPr>
           <a:xfrm>
-            <a:off x="777240" y="5543119"/>
+            <a:off x="777240" y="5540071"/>
             <a:ext cx="10607040" cy="548640"/>
           </a:xfrm>
           <a:prstGeom prst="rect">
@@ -13045,7 +13045,7 @@
       </p:sp>
       <p:pic>
         <p:nvPicPr>
-          <p:cNvPr id="9" name="Picture 8" descr="11b1cae12f4ad7a2.png"/>
+          <p:cNvPr id="9" name="Picture 8" descr="50afff642b200f74.png"/>
           <p:cNvPicPr>
             <a:picLocks noChangeAspect="1"/>
           </p:cNvPicPr>
@@ -14557,7 +14557,7 @@
       </p:sp>
       <p:pic>
         <p:nvPicPr>
-          <p:cNvPr id="9" name="Picture 8" descr="cd86dc37fd0c05fc.png"/>
+          <p:cNvPr id="9" name="Picture 8" descr="39aee9e245f0081e.png"/>
           <p:cNvPicPr>
             <a:picLocks noChangeAspect="1"/>
           </p:cNvPicPr>
@@ -14571,8 +14571,8 @@
         </p:blipFill>
         <p:spPr>
           <a:xfrm>
-            <a:off x="5369051" y="2103120"/>
-            <a:ext cx="1423416" cy="426720"/>
+            <a:off x="5367527" y="2103120"/>
+            <a:ext cx="1426464" cy="423672"/>
           </a:xfrm>
           <a:prstGeom prst="rect">
             <a:avLst/>
@@ -14587,7 +14587,7 @@
         </p:nvSpPr>
         <p:spPr>
           <a:xfrm>
-            <a:off x="1828800" y="2804160"/>
+            <a:off x="1828800" y="2801111"/>
             <a:ext cx="8503920" cy="548640"/>
           </a:xfrm>
           <a:prstGeom prst="rect">
@@ -15569,7 +15569,7 @@
         </p:nvSpPr>
         <p:spPr>
           <a:xfrm>
-            <a:off x="1627294" y="2212848"/>
+            <a:off x="1624246" y="2214372"/>
             <a:ext cx="2254011" cy="457200"/>
           </a:xfrm>
           <a:prstGeom prst="rect">
@@ -15598,7 +15598,7 @@
       </p:sp>
       <p:pic>
         <p:nvPicPr>
-          <p:cNvPr id="10" name="Picture 9" descr="928a3b4f052209d4.png"/>
+          <p:cNvPr id="10" name="Picture 9" descr="aa544492b6a6fbd3.png"/>
           <p:cNvPicPr>
             <a:picLocks noChangeAspect="1"/>
           </p:cNvPicPr>
@@ -15612,8 +15612,8 @@
         </p:blipFill>
         <p:spPr>
           <a:xfrm>
-            <a:off x="3744146" y="2103120"/>
-            <a:ext cx="1569720" cy="676656"/>
+            <a:off x="3741098" y="2103120"/>
+            <a:ext cx="1572768" cy="679704"/>
           </a:xfrm>
           <a:prstGeom prst="rect">
             <a:avLst/>
@@ -15628,7 +15628,7 @@
         </p:nvSpPr>
         <p:spPr>
           <a:xfrm>
-            <a:off x="5313866" y="2212848"/>
+            <a:off x="5313866" y="2214372"/>
             <a:ext cx="1208866" cy="457200"/>
           </a:xfrm>
           <a:prstGeom prst="rect">
@@ -15657,7 +15657,7 @@
       </p:sp>
       <p:pic>
         <p:nvPicPr>
-          <p:cNvPr id="12" name="Picture 11" descr="b84e4faf30935505.png"/>
+          <p:cNvPr id="12" name="Picture 11" descr="7a59a1b29e4c5bef.png"/>
           <p:cNvPicPr>
             <a:picLocks noChangeAspect="1"/>
           </p:cNvPicPr>
@@ -15672,7 +15672,7 @@
         <p:spPr>
           <a:xfrm>
             <a:off x="6385572" y="2103120"/>
-            <a:ext cx="1557528" cy="676656"/>
+            <a:ext cx="1560576" cy="679704"/>
           </a:xfrm>
           <a:prstGeom prst="rect">
             <a:avLst/>
@@ -15687,7 +15687,7 @@
         </p:nvSpPr>
         <p:spPr>
           <a:xfrm>
-            <a:off x="7943100" y="2212848"/>
+            <a:off x="7946148" y="2214372"/>
             <a:ext cx="2728284" cy="457200"/>
           </a:xfrm>
           <a:prstGeom prst="rect">
@@ -15722,7 +15722,7 @@
         </p:nvSpPr>
         <p:spPr>
           <a:xfrm>
-            <a:off x="1893296" y="3031236"/>
+            <a:off x="1891772" y="3034283"/>
             <a:ext cx="5363839" cy="457200"/>
           </a:xfrm>
           <a:prstGeom prst="rect">
@@ -15751,7 +15751,7 @@
       </p:sp>
       <p:pic>
         <p:nvPicPr>
-          <p:cNvPr id="15" name="Picture 14" descr="c9adefc290aa5b44.png"/>
+          <p:cNvPr id="15" name="Picture 14" descr="8f4fc9fafaaefa38.png"/>
           <p:cNvPicPr>
             <a:picLocks noChangeAspect="1"/>
           </p:cNvPicPr>
@@ -15765,8 +15765,8 @@
         </p:blipFill>
         <p:spPr>
           <a:xfrm>
-            <a:off x="7119975" y="3093720"/>
-            <a:ext cx="521207" cy="332232"/>
+            <a:off x="7118451" y="3098291"/>
+            <a:ext cx="524256" cy="329184"/>
           </a:xfrm>
           <a:prstGeom prst="rect">
             <a:avLst/>
@@ -15781,7 +15781,7 @@
         </p:nvSpPr>
         <p:spPr>
           <a:xfrm>
-            <a:off x="7641183" y="3031236"/>
+            <a:off x="7642707" y="3034283"/>
             <a:ext cx="2764200" cy="457200"/>
           </a:xfrm>
           <a:prstGeom prst="rect">
@@ -15816,7 +15816,7 @@
         </p:nvSpPr>
         <p:spPr>
           <a:xfrm>
-            <a:off x="1828800" y="3785615"/>
+            <a:off x="1828800" y="3788663"/>
             <a:ext cx="8503920" cy="548640"/>
           </a:xfrm>
           <a:prstGeom prst="rect">
@@ -17289,7 +17289,7 @@
         </p:nvSpPr>
         <p:spPr>
           <a:xfrm>
-            <a:off x="3454360" y="2491740"/>
+            <a:off x="3448264" y="2491740"/>
             <a:ext cx="1811606" cy="457200"/>
           </a:xfrm>
           <a:prstGeom prst="rect">
@@ -17318,7 +17318,7 @@
       </p:sp>
       <p:pic>
         <p:nvPicPr>
-          <p:cNvPr id="11" name="Picture 10" descr="0d20078542d535de.png"/>
+          <p:cNvPr id="11" name="Picture 10" descr="3891eb1a33669068.png"/>
           <p:cNvPicPr>
             <a:picLocks noChangeAspect="1"/>
           </p:cNvPicPr>
@@ -17332,8 +17332,8 @@
         </p:blipFill>
         <p:spPr>
           <a:xfrm>
-            <a:off x="5128807" y="2340864"/>
-            <a:ext cx="3578352" cy="758952"/>
+            <a:off x="5122711" y="2340864"/>
+            <a:ext cx="3590544" cy="758952"/>
           </a:xfrm>
           <a:prstGeom prst="rect">
             <a:avLst/>
@@ -17348,7 +17348,7 @@
         </p:nvSpPr>
         <p:spPr>
           <a:xfrm>
-            <a:off x="2790638" y="3692652"/>
+            <a:off x="2786066" y="3695700"/>
             <a:ext cx="1712587" cy="457200"/>
           </a:xfrm>
           <a:prstGeom prst="rect">
@@ -17377,7 +17377,7 @@
       </p:sp>
       <p:pic>
         <p:nvPicPr>
-          <p:cNvPr id="13" name="Picture 12" descr="c465db9a1afbefbd.png"/>
+          <p:cNvPr id="13" name="Picture 12" descr="4c0501578695aad1.png"/>
           <p:cNvPicPr>
             <a:picLocks noChangeAspect="1"/>
           </p:cNvPicPr>
@@ -17391,8 +17391,8 @@
         </p:blipFill>
         <p:spPr>
           <a:xfrm>
-            <a:off x="4366065" y="3374136"/>
-            <a:ext cx="5004816" cy="1094232"/>
+            <a:off x="4361493" y="3374136"/>
+            <a:ext cx="5013960" cy="1100328"/>
           </a:xfrm>
           <a:prstGeom prst="rect">
             <a:avLst/>
@@ -17407,7 +17407,7 @@
         </p:nvSpPr>
         <p:spPr>
           <a:xfrm>
-            <a:off x="987552" y="4806696"/>
+            <a:off x="987552" y="4812792"/>
             <a:ext cx="10131551" cy="950976"/>
           </a:xfrm>
           <a:prstGeom prst="rect">
@@ -17769,7 +17769,7 @@
       </p:cxnSp>
       <p:pic>
         <p:nvPicPr>
-          <p:cNvPr id="11" name="Picture 10" descr="c45ea5ac81fe31b2.png"/>
+          <p:cNvPr id="11" name="Picture 10" descr="7b8991725e0c7128.png"/>
           <p:cNvPicPr>
             <a:picLocks noChangeAspect="1"/>
           </p:cNvPicPr>
@@ -17783,8 +17783,8 @@
         </p:blipFill>
         <p:spPr>
           <a:xfrm>
-            <a:off x="3384804" y="2340864"/>
-            <a:ext cx="5391912" cy="880872"/>
+            <a:off x="3377184" y="2340864"/>
+            <a:ext cx="5407152" cy="880872"/>
           </a:xfrm>
           <a:prstGeom prst="rect">
             <a:avLst/>
@@ -17828,7 +17828,7 @@
       </p:sp>
       <p:pic>
         <p:nvPicPr>
-          <p:cNvPr id="13" name="Picture 12" descr="a4f17c6e045bd6bf.png"/>
+          <p:cNvPr id="13" name="Picture 12" descr="c58e91a86a3bfa35.png"/>
           <p:cNvPicPr>
             <a:picLocks noChangeAspect="1"/>
           </p:cNvPicPr>
@@ -17843,7 +17843,7 @@
         <p:spPr>
           <a:xfrm>
             <a:off x="987552" y="4273296"/>
-            <a:ext cx="3526536" cy="682752"/>
+            <a:ext cx="3538728" cy="688848"/>
           </a:xfrm>
           <a:prstGeom prst="rect">
             <a:avLst/>
@@ -17858,7 +17858,7 @@
         </p:nvSpPr>
         <p:spPr>
           <a:xfrm>
-            <a:off x="4514088" y="4386071"/>
+            <a:off x="4526280" y="4389120"/>
             <a:ext cx="4614173" cy="457200"/>
           </a:xfrm>
           <a:prstGeom prst="rect">
@@ -17887,7 +17887,7 @@
       </p:sp>
       <p:pic>
         <p:nvPicPr>
-          <p:cNvPr id="15" name="Picture 14" descr="8f1aef55fede7e13.png"/>
+          <p:cNvPr id="15" name="Picture 14" descr="3f2abb4590435eb0.png"/>
           <p:cNvPicPr>
             <a:picLocks noChangeAspect="1"/>
           </p:cNvPicPr>
@@ -17901,8 +17901,8 @@
         </p:blipFill>
         <p:spPr>
           <a:xfrm>
-            <a:off x="8991101" y="4273296"/>
-            <a:ext cx="789432" cy="682752"/>
+            <a:off x="9003293" y="4273296"/>
+            <a:ext cx="795528" cy="688848"/>
           </a:xfrm>
           <a:prstGeom prst="rect">
             <a:avLst/>
@@ -17911,7 +17911,7 @@
       </p:pic>
       <p:pic>
         <p:nvPicPr>
-          <p:cNvPr id="16" name="Picture 15" descr="9177811477d4a64c.png"/>
+          <p:cNvPr id="16" name="Picture 15" descr="4e506f1fd0873670.png"/>
           <p:cNvPicPr>
             <a:picLocks noChangeAspect="1"/>
           </p:cNvPicPr>
@@ -17925,8 +17925,8 @@
         </p:blipFill>
         <p:spPr>
           <a:xfrm>
-            <a:off x="987552" y="5212080"/>
-            <a:ext cx="1969008" cy="807720"/>
+            <a:off x="987552" y="5218175"/>
+            <a:ext cx="1978152" cy="804672"/>
           </a:xfrm>
           <a:prstGeom prst="rect">
             <a:avLst/>
@@ -17941,7 +17941,7 @@
         </p:nvSpPr>
         <p:spPr>
           <a:xfrm>
-            <a:off x="2956560" y="5387340"/>
+            <a:off x="2965704" y="5391912"/>
             <a:ext cx="6270420" cy="457200"/>
           </a:xfrm>
           <a:prstGeom prst="rect">
@@ -17970,7 +17970,7 @@
       </p:sp>
       <p:pic>
         <p:nvPicPr>
-          <p:cNvPr id="18" name="Picture 17" descr="be9511aed8c2056e.png"/>
+          <p:cNvPr id="18" name="Picture 17" descr="87009eafc84fbf18.png"/>
           <p:cNvPicPr>
             <a:picLocks noChangeAspect="1"/>
           </p:cNvPicPr>
@@ -17984,8 +17984,8 @@
         </p:blipFill>
         <p:spPr>
           <a:xfrm>
-            <a:off x="9089820" y="5277612"/>
-            <a:ext cx="774192" cy="676656"/>
+            <a:off x="9098964" y="5277612"/>
+            <a:ext cx="780288" cy="685800"/>
           </a:xfrm>
           <a:prstGeom prst="rect">
             <a:avLst/>
@@ -19242,7 +19242,7 @@
       </p:graphicFrame>
       <p:pic>
         <p:nvPicPr>
-          <p:cNvPr id="11" name="Picture 10" descr="fcc456d7f9f5286a.png"/>
+          <p:cNvPr id="11" name="Picture 10" descr="b8889051fdc71e70.png"/>
           <p:cNvPicPr>
             <a:picLocks noChangeAspect="1"/>
           </p:cNvPicPr>
@@ -19256,8 +19256,8 @@
         </p:blipFill>
         <p:spPr>
           <a:xfrm>
-            <a:off x="3297420" y="4105656"/>
-            <a:ext cx="2423160" cy="414528"/>
+            <a:off x="3295896" y="4105656"/>
+            <a:ext cx="2423160" cy="411480"/>
           </a:xfrm>
           <a:prstGeom prst="rect">
             <a:avLst/>
@@ -19272,7 +19272,7 @@
         </p:nvSpPr>
         <p:spPr>
           <a:xfrm>
-            <a:off x="5720580" y="4084320"/>
+            <a:off x="5719056" y="4082796"/>
             <a:ext cx="988583" cy="457200"/>
           </a:xfrm>
           <a:prstGeom prst="rect">
@@ -19301,7 +19301,7 @@
       </p:sp>
       <p:pic>
         <p:nvPicPr>
-          <p:cNvPr id="13" name="Picture 12" descr="ddf63c5a3e090318.png"/>
+          <p:cNvPr id="13" name="Picture 12" descr="a8908f3619c71bc6.png"/>
           <p:cNvPicPr>
             <a:picLocks noChangeAspect="1"/>
           </p:cNvPicPr>
@@ -19315,8 +19315,8 @@
         </p:blipFill>
         <p:spPr>
           <a:xfrm>
-            <a:off x="6572003" y="4107180"/>
-            <a:ext cx="2292096" cy="411480"/>
+            <a:off x="6570479" y="4105656"/>
+            <a:ext cx="2295144" cy="411480"/>
           </a:xfrm>
           <a:prstGeom prst="rect">
             <a:avLst/>
@@ -19325,7 +19325,7 @@
       </p:pic>
       <p:pic>
         <p:nvPicPr>
-          <p:cNvPr id="14" name="Picture 13" descr="5659a59a4bcb862f.png"/>
+          <p:cNvPr id="14" name="Picture 13" descr="4049ac29e8d0e898.png"/>
           <p:cNvPicPr>
             <a:picLocks noChangeAspect="1"/>
           </p:cNvPicPr>
@@ -19339,7 +19339,7 @@
         </p:blipFill>
         <p:spPr>
           <a:xfrm>
-            <a:off x="3643884" y="4794504"/>
+            <a:off x="3643884" y="4791456"/>
             <a:ext cx="4873752" cy="414528"/>
           </a:xfrm>
           <a:prstGeom prst="rect">
@@ -19647,7 +19647,7 @@
       </p:cxnSp>
       <p:pic>
         <p:nvPicPr>
-          <p:cNvPr id="10" name="Picture 9" descr="7440dcda2729733e.png"/>
+          <p:cNvPr id="10" name="Picture 9" descr="bf588710a599e4ab.png"/>
           <p:cNvPicPr>
             <a:picLocks noChangeAspect="1"/>
           </p:cNvPicPr>
@@ -19661,8 +19661,8 @@
         </p:blipFill>
         <p:spPr>
           <a:xfrm>
-            <a:off x="1263132" y="2340864"/>
-            <a:ext cx="4291584" cy="676656"/>
+            <a:off x="1260084" y="2340864"/>
+            <a:ext cx="4294632" cy="679704"/>
           </a:xfrm>
           <a:prstGeom prst="rect">
             <a:avLst/>
@@ -19677,7 +19677,7 @@
         </p:nvSpPr>
         <p:spPr>
           <a:xfrm>
-            <a:off x="5554716" y="2450592"/>
+            <a:off x="5554716" y="2452116"/>
             <a:ext cx="1183151" cy="457200"/>
           </a:xfrm>
           <a:prstGeom prst="rect">
@@ -19706,7 +19706,7 @@
       </p:sp>
       <p:pic>
         <p:nvPicPr>
-          <p:cNvPr id="12" name="Picture 11" descr="bb6220d5ac80be69.png"/>
+          <p:cNvPr id="12" name="Picture 11" descr="6d96812b24000e89.png"/>
           <p:cNvPicPr>
             <a:picLocks noChangeAspect="1"/>
           </p:cNvPicPr>
@@ -19721,7 +19721,7 @@
         <p:spPr>
           <a:xfrm>
             <a:off x="6600707" y="2340864"/>
-            <a:ext cx="4297680" cy="676656"/>
+            <a:ext cx="4300728" cy="679704"/>
           </a:xfrm>
           <a:prstGeom prst="rect">
             <a:avLst/>
@@ -19736,7 +19736,7 @@
         </p:nvSpPr>
         <p:spPr>
           <a:xfrm>
-            <a:off x="987552" y="3355847"/>
+            <a:off x="987552" y="3358895"/>
             <a:ext cx="10131551" cy="475488"/>
           </a:xfrm>
           <a:prstGeom prst="rect">
@@ -19765,7 +19765,7 @@
       </p:sp>
       <p:pic>
         <p:nvPicPr>
-          <p:cNvPr id="14" name="Picture 13" descr="552910b7ab3954b6.png"/>
+          <p:cNvPr id="14" name="Picture 13" descr="e7a72fc9722f2271.png"/>
           <p:cNvPicPr>
             <a:picLocks noChangeAspect="1"/>
           </p:cNvPicPr>
@@ -19779,7 +19779,7 @@
         </p:blipFill>
         <p:spPr>
           <a:xfrm>
-            <a:off x="987552" y="4072127"/>
+            <a:off x="987552" y="4075175"/>
             <a:ext cx="1487424" cy="405384"/>
           </a:xfrm>
           <a:prstGeom prst="rect">
@@ -19795,7 +19795,7 @@
         </p:nvSpPr>
         <p:spPr>
           <a:xfrm>
-            <a:off x="2474976" y="4046219"/>
+            <a:off x="2474976" y="4049267"/>
             <a:ext cx="3404171" cy="457200"/>
           </a:xfrm>
           <a:prstGeom prst="rect">
@@ -20409,7 +20409,7 @@
       </p:sp>
       <p:pic>
         <p:nvPicPr>
-          <p:cNvPr id="9" name="Picture 8" descr="42a049a840fefcd3.png"/>
+          <p:cNvPr id="9" name="Picture 8" descr="ace94c96bda40746.png"/>
           <p:cNvPicPr>
             <a:picLocks noChangeAspect="1"/>
           </p:cNvPicPr>
@@ -20424,7 +20424,7 @@
         <p:spPr>
           <a:xfrm>
             <a:off x="1828800" y="1920240"/>
-            <a:ext cx="3105912" cy="679704"/>
+            <a:ext cx="3115056" cy="688848"/>
           </a:xfrm>
           <a:prstGeom prst="rect">
             <a:avLst/>
@@ -20439,8 +20439,8 @@
         </p:nvSpPr>
         <p:spPr>
           <a:xfrm>
-            <a:off x="5391912" y="2031492"/>
-            <a:ext cx="5992367" cy="502920"/>
+            <a:off x="5401056" y="2036064"/>
+            <a:ext cx="5983224" cy="502920"/>
           </a:xfrm>
           <a:prstGeom prst="rect">
             <a:avLst/>
@@ -20468,7 +20468,7 @@
       </p:sp>
       <p:pic>
         <p:nvPicPr>
-          <p:cNvPr id="11" name="Picture 10" descr="b6b18b3ca56125f7.png"/>
+          <p:cNvPr id="11" name="Picture 10" descr="c2271698628ebedd.png"/>
           <p:cNvPicPr>
             <a:picLocks noChangeAspect="1"/>
           </p:cNvPicPr>
@@ -20482,8 +20482,8 @@
         </p:blipFill>
         <p:spPr>
           <a:xfrm>
-            <a:off x="1828800" y="2874264"/>
-            <a:ext cx="1700784" cy="694944"/>
+            <a:off x="1828800" y="2883408"/>
+            <a:ext cx="1716024" cy="701040"/>
           </a:xfrm>
           <a:prstGeom prst="rect">
             <a:avLst/>
@@ -20498,7 +20498,7 @@
         </p:nvSpPr>
         <p:spPr>
           <a:xfrm>
-            <a:off x="3986784" y="2993135"/>
+            <a:off x="4002024" y="3005328"/>
             <a:ext cx="6400800" cy="502920"/>
           </a:xfrm>
           <a:prstGeom prst="rect">

--- a/a7/build/out/u3/A7 3.06  Slides.pptx
+++ b/a7/build/out/u3/A7 3.06  Slides.pptx
@@ -4105,7 +4105,7 @@
       </p:sp>
       <p:pic>
         <p:nvPicPr>
-          <p:cNvPr id="9" name="Picture 8" descr="c91e3e2a0926f9e8.png"/>
+          <p:cNvPr id="9" name="Picture 8" descr="4ba5d3554b7f430d.png"/>
           <p:cNvPicPr>
             <a:picLocks noChangeAspect="1"/>
           </p:cNvPicPr>
@@ -4119,8 +4119,8 @@
         </p:blipFill>
         <p:spPr>
           <a:xfrm>
-            <a:off x="5183124" y="2194560"/>
-            <a:ext cx="1795272" cy="862584"/>
+            <a:off x="5181599" y="2194560"/>
+            <a:ext cx="1798320" cy="862584"/>
           </a:xfrm>
           <a:prstGeom prst="rect">
             <a:avLst/>
@@ -4955,7 +4955,7 @@
       </p:sp>
       <p:pic>
         <p:nvPicPr>
-          <p:cNvPr id="9" name="Picture 8" descr="313653eca9fb1e94.png"/>
+          <p:cNvPr id="9" name="Picture 8" descr="9dc7ad07cd91fb8a.png"/>
           <p:cNvPicPr>
             <a:picLocks noChangeAspect="1"/>
           </p:cNvPicPr>
@@ -4970,7 +4970,7 @@
         <p:spPr>
           <a:xfrm>
             <a:off x="1828800" y="1920240"/>
-            <a:ext cx="4264152" cy="347472"/>
+            <a:ext cx="4267200" cy="347472"/>
           </a:xfrm>
           <a:prstGeom prst="rect">
             <a:avLst/>
@@ -4985,8 +4985,8 @@
         </p:nvSpPr>
         <p:spPr>
           <a:xfrm>
-            <a:off x="6550152" y="1865376"/>
-            <a:ext cx="4834128" cy="502920"/>
+            <a:off x="6553200" y="1865376"/>
+            <a:ext cx="4831079" cy="502920"/>
           </a:xfrm>
           <a:prstGeom prst="rect">
             <a:avLst/>
@@ -5014,7 +5014,7 @@
       </p:sp>
       <p:pic>
         <p:nvPicPr>
-          <p:cNvPr id="11" name="Picture 10" descr="72b47a90434b13b6.png"/>
+          <p:cNvPr id="11" name="Picture 10" descr="77d3b6258368a7ab.png"/>
           <p:cNvPicPr>
             <a:picLocks noChangeAspect="1"/>
           </p:cNvPicPr>
@@ -5029,7 +5029,7 @@
         <p:spPr>
           <a:xfrm>
             <a:off x="1828800" y="2542032"/>
-            <a:ext cx="3892296" cy="874776"/>
+            <a:ext cx="3883152" cy="874776"/>
           </a:xfrm>
           <a:prstGeom prst="rect">
             <a:avLst/>
@@ -5044,8 +5044,8 @@
         </p:nvSpPr>
         <p:spPr>
           <a:xfrm>
-            <a:off x="6178296" y="2750820"/>
-            <a:ext cx="5205983" cy="502920"/>
+            <a:off x="6169152" y="2750820"/>
+            <a:ext cx="5215127" cy="502920"/>
           </a:xfrm>
           <a:prstGeom prst="rect">
             <a:avLst/>
@@ -5073,7 +5073,7 @@
       </p:sp>
       <p:pic>
         <p:nvPicPr>
-          <p:cNvPr id="13" name="Picture 12" descr="4ce2189c51a32d89.png"/>
+          <p:cNvPr id="13" name="Picture 12" descr="4af5e130ae69dded.png"/>
           <p:cNvPicPr>
             <a:picLocks noChangeAspect="1"/>
           </p:cNvPicPr>
@@ -5088,7 +5088,7 @@
         <p:spPr>
           <a:xfrm>
             <a:off x="1828800" y="3691127"/>
-            <a:ext cx="2292096" cy="347472"/>
+            <a:ext cx="2295144" cy="347472"/>
           </a:xfrm>
           <a:prstGeom prst="rect">
             <a:avLst/>
@@ -5103,7 +5103,7 @@
         </p:nvSpPr>
         <p:spPr>
           <a:xfrm>
-            <a:off x="4578096" y="3636263"/>
+            <a:off x="4581144" y="3636263"/>
             <a:ext cx="6400800" cy="502920"/>
           </a:xfrm>
           <a:prstGeom prst="rect">
@@ -5888,7 +5888,7 @@
         </p:nvSpPr>
         <p:spPr>
           <a:xfrm>
-            <a:off x="2667489" y="2514600"/>
+            <a:off x="2678157" y="2516124"/>
             <a:ext cx="988005" cy="457200"/>
           </a:xfrm>
           <a:prstGeom prst="rect">
@@ -5917,7 +5917,7 @@
       </p:sp>
       <p:pic>
         <p:nvPicPr>
-          <p:cNvPr id="10" name="Picture 9" descr="036a62ebcdd5b0b1.png"/>
+          <p:cNvPr id="10" name="Picture 9" descr="7788e03876974ccc.png"/>
           <p:cNvPicPr>
             <a:picLocks noChangeAspect="1"/>
           </p:cNvPicPr>
@@ -5931,8 +5931,8 @@
         </p:blipFill>
         <p:spPr>
           <a:xfrm>
-            <a:off x="3518334" y="2528315"/>
-            <a:ext cx="1414272" cy="429768"/>
+            <a:off x="3529002" y="2529840"/>
+            <a:ext cx="1411224" cy="429768"/>
           </a:xfrm>
           <a:prstGeom prst="rect">
             <a:avLst/>
@@ -5947,7 +5947,7 @@
         </p:nvSpPr>
         <p:spPr>
           <a:xfrm>
-            <a:off x="4932606" y="2514600"/>
+            <a:off x="4940226" y="2516124"/>
             <a:ext cx="1208866" cy="457200"/>
           </a:xfrm>
           <a:prstGeom prst="rect">
@@ -5976,7 +5976,7 @@
       </p:sp>
       <p:pic>
         <p:nvPicPr>
-          <p:cNvPr id="12" name="Picture 11" descr="6cbd77409f62d10a.png"/>
+          <p:cNvPr id="12" name="Picture 11" descr="b7201d2b15f8c86f.png"/>
           <p:cNvPicPr>
             <a:picLocks noChangeAspect="1"/>
           </p:cNvPicPr>
@@ -5990,8 +5990,8 @@
         </p:blipFill>
         <p:spPr>
           <a:xfrm>
-            <a:off x="6004312" y="2194560"/>
-            <a:ext cx="1365504" cy="1097280"/>
+            <a:off x="6011932" y="2194560"/>
+            <a:ext cx="1347216" cy="1100328"/>
           </a:xfrm>
           <a:prstGeom prst="rect">
             <a:avLst/>
@@ -6006,7 +6006,7 @@
         </p:nvSpPr>
         <p:spPr>
           <a:xfrm>
-            <a:off x="7369816" y="2514600"/>
+            <a:off x="7359148" y="2516124"/>
             <a:ext cx="2261373" cy="457200"/>
           </a:xfrm>
           <a:prstGeom prst="rect">
@@ -6041,7 +6041,7 @@
         </p:nvSpPr>
         <p:spPr>
           <a:xfrm>
-            <a:off x="777240" y="3611879"/>
+            <a:off x="777240" y="3614928"/>
             <a:ext cx="10607040" cy="429370"/>
           </a:xfrm>
           <a:prstGeom prst="rect">
@@ -6788,7 +6788,7 @@
       </p:sp>
       <p:pic>
         <p:nvPicPr>
-          <p:cNvPr id="9" name="Picture 8" descr="e9c3d2e1bc23afe6.png"/>
+          <p:cNvPr id="9" name="Picture 8" descr="956b769eca71d99b.png"/>
           <p:cNvPicPr>
             <a:picLocks noChangeAspect="1"/>
           </p:cNvPicPr>
@@ -6802,8 +6802,8 @@
         </p:blipFill>
         <p:spPr>
           <a:xfrm>
-            <a:off x="4776215" y="2103120"/>
-            <a:ext cx="2609088" cy="1185672"/>
+            <a:off x="4786883" y="2103120"/>
+            <a:ext cx="2587752" cy="1188720"/>
           </a:xfrm>
           <a:prstGeom prst="rect">
             <a:avLst/>
@@ -6818,7 +6818,7 @@
         </p:nvSpPr>
         <p:spPr>
           <a:xfrm>
-            <a:off x="1828800" y="3563112"/>
+            <a:off x="1828800" y="3566159"/>
             <a:ext cx="8503920" cy="548640"/>
           </a:xfrm>
           <a:prstGeom prst="rect">
@@ -7547,7 +7547,7 @@
       </p:sp>
       <p:pic>
         <p:nvPicPr>
-          <p:cNvPr id="9" name="Picture 8" descr="29d8d4f07fac382c.png"/>
+          <p:cNvPr id="9" name="Picture 8" descr="b34bc56ecccd0f00.png"/>
           <p:cNvPicPr>
             <a:picLocks noChangeAspect="1"/>
           </p:cNvPicPr>
@@ -7561,8 +7561,8 @@
         </p:blipFill>
         <p:spPr>
           <a:xfrm>
-            <a:off x="4724399" y="2103120"/>
-            <a:ext cx="2712720" cy="1868424"/>
+            <a:off x="4735067" y="2103120"/>
+            <a:ext cx="2691384" cy="1871472"/>
           </a:xfrm>
           <a:prstGeom prst="rect">
             <a:avLst/>
@@ -7577,7 +7577,7 @@
         </p:nvSpPr>
         <p:spPr>
           <a:xfrm>
-            <a:off x="1828800" y="4245864"/>
+            <a:off x="1828800" y="4248912"/>
             <a:ext cx="8503920" cy="548640"/>
           </a:xfrm>
           <a:prstGeom prst="rect">
@@ -7621,7 +7621,7 @@
         </p:nvSpPr>
         <p:spPr>
           <a:xfrm>
-            <a:off x="4991100" y="5129784"/>
+            <a:off x="4991100" y="5132832"/>
             <a:ext cx="1920240" cy="548640"/>
           </a:xfrm>
           <a:prstGeom prst="rect">
@@ -7664,7 +7664,7 @@
         </p:blipFill>
         <p:spPr>
           <a:xfrm>
-            <a:off x="6911340" y="4977384"/>
+            <a:off x="6911340" y="4980432"/>
             <a:ext cx="259080" cy="853440"/>
           </a:xfrm>
           <a:prstGeom prst="rect">
@@ -8769,7 +8769,7 @@
       </p:sp>
       <p:pic>
         <p:nvPicPr>
-          <p:cNvPr id="9" name="Picture 8" descr="5e01597dd0b68729.png"/>
+          <p:cNvPr id="9" name="Picture 8" descr="48df33e2a7e48cfd.png"/>
           <p:cNvPicPr>
             <a:picLocks noChangeAspect="1"/>
           </p:cNvPicPr>
@@ -8783,8 +8783,8 @@
         </p:blipFill>
         <p:spPr>
           <a:xfrm>
-            <a:off x="4640579" y="2103120"/>
-            <a:ext cx="2880360" cy="1429512"/>
+            <a:off x="4649723" y="2103120"/>
+            <a:ext cx="2862072" cy="1429512"/>
           </a:xfrm>
           <a:prstGeom prst="rect">
             <a:avLst/>
@@ -9804,7 +9804,7 @@
       </p:sp>
       <p:pic>
         <p:nvPicPr>
-          <p:cNvPr id="10" name="Picture 9" descr="bf9b1dd85a85733f.png"/>
+          <p:cNvPr id="10" name="Picture 9" descr="a6ec4c130c4a796b.png"/>
           <p:cNvPicPr>
             <a:picLocks noChangeAspect="1"/>
           </p:cNvPicPr>
@@ -9933,7 +9933,7 @@
       </p:sp>
       <p:pic>
         <p:nvPicPr>
-          <p:cNvPr id="14" name="Picture 13" descr="bf9b1dd85a85733f.png"/>
+          <p:cNvPr id="14" name="Picture 13" descr="a6ec4c130c4a796b.png"/>
           <p:cNvPicPr>
             <a:picLocks noChangeAspect="1"/>
           </p:cNvPicPr>
@@ -10963,7 +10963,7 @@
       </p:sp>
       <p:pic>
         <p:nvPicPr>
-          <p:cNvPr id="9" name="Picture 8" descr="de0a72d7d8775cda.png"/>
+          <p:cNvPr id="9" name="Picture 8" descr="2a82b5b2f64aa285.png"/>
           <p:cNvPicPr>
             <a:picLocks noChangeAspect="1"/>
           </p:cNvPicPr>
@@ -10977,8 +10977,8 @@
         </p:blipFill>
         <p:spPr>
           <a:xfrm>
-            <a:off x="5870447" y="2103120"/>
-            <a:ext cx="420624" cy="432816"/>
+            <a:off x="5871971" y="2103120"/>
+            <a:ext cx="417576" cy="429768"/>
           </a:xfrm>
           <a:prstGeom prst="rect">
             <a:avLst/>
@@ -10993,7 +10993,7 @@
         </p:nvSpPr>
         <p:spPr>
           <a:xfrm>
-            <a:off x="777240" y="2764535"/>
+            <a:off x="777240" y="2761487"/>
             <a:ext cx="10607040" cy="465151"/>
           </a:xfrm>
           <a:prstGeom prst="rect">
@@ -11028,7 +11028,7 @@
         </p:nvSpPr>
         <p:spPr>
           <a:xfrm>
-            <a:off x="1874519" y="3430855"/>
+            <a:off x="1874519" y="3427807"/>
             <a:ext cx="4572000" cy="548640"/>
           </a:xfrm>
           <a:prstGeom prst="rect">
@@ -11081,7 +11081,7 @@
         </p:nvSpPr>
         <p:spPr>
           <a:xfrm>
-            <a:off x="6629400" y="3430855"/>
+            <a:off x="6629400" y="3427807"/>
             <a:ext cx="4572000" cy="548640"/>
           </a:xfrm>
           <a:prstGeom prst="rect">
@@ -11134,7 +11134,7 @@
         </p:nvSpPr>
         <p:spPr>
           <a:xfrm>
-            <a:off x="1874519" y="4116655"/>
+            <a:off x="1874519" y="4113607"/>
             <a:ext cx="4572000" cy="548640"/>
           </a:xfrm>
           <a:prstGeom prst="rect">
@@ -11187,7 +11187,7 @@
         </p:nvSpPr>
         <p:spPr>
           <a:xfrm>
-            <a:off x="6629400" y="4116655"/>
+            <a:off x="6629400" y="4113607"/>
             <a:ext cx="4572000" cy="548640"/>
           </a:xfrm>
           <a:prstGeom prst="rect">
@@ -11240,7 +11240,7 @@
         </p:nvSpPr>
         <p:spPr>
           <a:xfrm>
-            <a:off x="777240" y="5122495"/>
+            <a:off x="777240" y="5119447"/>
             <a:ext cx="10607040" cy="548640"/>
           </a:xfrm>
           <a:prstGeom prst="rect">
@@ -12110,7 +12110,7 @@
       </p:sp>
       <p:pic>
         <p:nvPicPr>
-          <p:cNvPr id="9" name="Picture 8" descr="273aa6b172e5136e.png"/>
+          <p:cNvPr id="9" name="Picture 8" descr="4ef405027ff61918.png"/>
           <p:cNvPicPr>
             <a:picLocks noChangeAspect="1"/>
           </p:cNvPicPr>
@@ -13045,7 +13045,7 @@
       </p:sp>
       <p:pic>
         <p:nvPicPr>
-          <p:cNvPr id="9" name="Picture 8" descr="50afff642b200f74.png"/>
+          <p:cNvPr id="9" name="Picture 8" descr="9a83df8a23e93975.png"/>
           <p:cNvPicPr>
             <a:picLocks noChangeAspect="1"/>
           </p:cNvPicPr>
@@ -14557,7 +14557,7 @@
       </p:sp>
       <p:pic>
         <p:nvPicPr>
-          <p:cNvPr id="9" name="Picture 8" descr="39aee9e245f0081e.png"/>
+          <p:cNvPr id="9" name="Picture 8" descr="a58ef65a72479a64.png"/>
           <p:cNvPicPr>
             <a:picLocks noChangeAspect="1"/>
           </p:cNvPicPr>
@@ -15569,7 +15569,7 @@
         </p:nvSpPr>
         <p:spPr>
           <a:xfrm>
-            <a:off x="1624246" y="2214372"/>
+            <a:off x="1624246" y="2212848"/>
             <a:ext cx="2254011" cy="457200"/>
           </a:xfrm>
           <a:prstGeom prst="rect">
@@ -15598,7 +15598,7 @@
       </p:sp>
       <p:pic>
         <p:nvPicPr>
-          <p:cNvPr id="10" name="Picture 9" descr="aa544492b6a6fbd3.png"/>
+          <p:cNvPr id="10" name="Picture 9" descr="5cc8e379c9f0fb79.png"/>
           <p:cNvPicPr>
             <a:picLocks noChangeAspect="1"/>
           </p:cNvPicPr>
@@ -15613,7 +15613,7 @@
         <p:spPr>
           <a:xfrm>
             <a:off x="3741098" y="2103120"/>
-            <a:ext cx="1572768" cy="679704"/>
+            <a:ext cx="1572768" cy="676656"/>
           </a:xfrm>
           <a:prstGeom prst="rect">
             <a:avLst/>
@@ -15628,7 +15628,7 @@
         </p:nvSpPr>
         <p:spPr>
           <a:xfrm>
-            <a:off x="5313866" y="2214372"/>
+            <a:off x="5313866" y="2212848"/>
             <a:ext cx="1208866" cy="457200"/>
           </a:xfrm>
           <a:prstGeom prst="rect">
@@ -15657,7 +15657,7 @@
       </p:sp>
       <p:pic>
         <p:nvPicPr>
-          <p:cNvPr id="12" name="Picture 11" descr="7a59a1b29e4c5bef.png"/>
+          <p:cNvPr id="12" name="Picture 11" descr="3544f9e4eb8bbbf6.png"/>
           <p:cNvPicPr>
             <a:picLocks noChangeAspect="1"/>
           </p:cNvPicPr>
@@ -15672,7 +15672,7 @@
         <p:spPr>
           <a:xfrm>
             <a:off x="6385572" y="2103120"/>
-            <a:ext cx="1560576" cy="679704"/>
+            <a:ext cx="1560576" cy="676656"/>
           </a:xfrm>
           <a:prstGeom prst="rect">
             <a:avLst/>
@@ -15687,7 +15687,7 @@
         </p:nvSpPr>
         <p:spPr>
           <a:xfrm>
-            <a:off x="7946148" y="2214372"/>
+            <a:off x="7946148" y="2212848"/>
             <a:ext cx="2728284" cy="457200"/>
           </a:xfrm>
           <a:prstGeom prst="rect">
@@ -15722,7 +15722,7 @@
         </p:nvSpPr>
         <p:spPr>
           <a:xfrm>
-            <a:off x="1891772" y="3034283"/>
+            <a:off x="1891772" y="3031236"/>
             <a:ext cx="5363839" cy="457200"/>
           </a:xfrm>
           <a:prstGeom prst="rect">
@@ -15751,7 +15751,7 @@
       </p:sp>
       <p:pic>
         <p:nvPicPr>
-          <p:cNvPr id="15" name="Picture 14" descr="8f4fc9fafaaefa38.png"/>
+          <p:cNvPr id="15" name="Picture 14" descr="afdbc5b48ef250ed.png"/>
           <p:cNvPicPr>
             <a:picLocks noChangeAspect="1"/>
           </p:cNvPicPr>
@@ -15765,8 +15765,8 @@
         </p:blipFill>
         <p:spPr>
           <a:xfrm>
-            <a:off x="7118451" y="3098291"/>
-            <a:ext cx="524256" cy="329184"/>
+            <a:off x="7118451" y="3093720"/>
+            <a:ext cx="524256" cy="332232"/>
           </a:xfrm>
           <a:prstGeom prst="rect">
             <a:avLst/>
@@ -15781,7 +15781,7 @@
         </p:nvSpPr>
         <p:spPr>
           <a:xfrm>
-            <a:off x="7642707" y="3034283"/>
+            <a:off x="7642707" y="3031236"/>
             <a:ext cx="2764200" cy="457200"/>
           </a:xfrm>
           <a:prstGeom prst="rect">
@@ -15816,7 +15816,7 @@
         </p:nvSpPr>
         <p:spPr>
           <a:xfrm>
-            <a:off x="1828800" y="3788663"/>
+            <a:off x="1828800" y="3785615"/>
             <a:ext cx="8503920" cy="548640"/>
           </a:xfrm>
           <a:prstGeom prst="rect">
@@ -17289,7 +17289,7 @@
         </p:nvSpPr>
         <p:spPr>
           <a:xfrm>
-            <a:off x="3448264" y="2491740"/>
+            <a:off x="3452836" y="2491740"/>
             <a:ext cx="1811606" cy="457200"/>
           </a:xfrm>
           <a:prstGeom prst="rect">
@@ -17318,7 +17318,7 @@
       </p:sp>
       <p:pic>
         <p:nvPicPr>
-          <p:cNvPr id="11" name="Picture 10" descr="3891eb1a33669068.png"/>
+          <p:cNvPr id="11" name="Picture 10" descr="071da3cb12a3a9b3.png"/>
           <p:cNvPicPr>
             <a:picLocks noChangeAspect="1"/>
           </p:cNvPicPr>
@@ -17332,8 +17332,8 @@
         </p:blipFill>
         <p:spPr>
           <a:xfrm>
-            <a:off x="5122711" y="2340864"/>
-            <a:ext cx="3590544" cy="758952"/>
+            <a:off x="5127283" y="2340864"/>
+            <a:ext cx="3581400" cy="758952"/>
           </a:xfrm>
           <a:prstGeom prst="rect">
             <a:avLst/>
@@ -17348,7 +17348,7 @@
         </p:nvSpPr>
         <p:spPr>
           <a:xfrm>
-            <a:off x="2786066" y="3695700"/>
+            <a:off x="2790638" y="3694176"/>
             <a:ext cx="1712587" cy="457200"/>
           </a:xfrm>
           <a:prstGeom prst="rect">
@@ -17377,7 +17377,7 @@
       </p:sp>
       <p:pic>
         <p:nvPicPr>
-          <p:cNvPr id="13" name="Picture 12" descr="4c0501578695aad1.png"/>
+          <p:cNvPr id="13" name="Picture 12" descr="76734bcd012bfd6f.png"/>
           <p:cNvPicPr>
             <a:picLocks noChangeAspect="1"/>
           </p:cNvPicPr>
@@ -17391,8 +17391,8 @@
         </p:blipFill>
         <p:spPr>
           <a:xfrm>
-            <a:off x="4361493" y="3374136"/>
-            <a:ext cx="5013960" cy="1100328"/>
+            <a:off x="4366065" y="3374136"/>
+            <a:ext cx="5004816" cy="1097280"/>
           </a:xfrm>
           <a:prstGeom prst="rect">
             <a:avLst/>
@@ -17407,7 +17407,7 @@
         </p:nvSpPr>
         <p:spPr>
           <a:xfrm>
-            <a:off x="987552" y="4812792"/>
+            <a:off x="987552" y="4809744"/>
             <a:ext cx="10131551" cy="950976"/>
           </a:xfrm>
           <a:prstGeom prst="rect">
@@ -17769,7 +17769,7 @@
       </p:cxnSp>
       <p:pic>
         <p:nvPicPr>
-          <p:cNvPr id="11" name="Picture 10" descr="7b8991725e0c7128.png"/>
+          <p:cNvPr id="11" name="Picture 10" descr="059ee1a209667ed2.png"/>
           <p:cNvPicPr>
             <a:picLocks noChangeAspect="1"/>
           </p:cNvPicPr>
@@ -17783,8 +17783,8 @@
         </p:blipFill>
         <p:spPr>
           <a:xfrm>
-            <a:off x="3377184" y="2340864"/>
-            <a:ext cx="5407152" cy="880872"/>
+            <a:off x="3386328" y="2340864"/>
+            <a:ext cx="5388864" cy="880872"/>
           </a:xfrm>
           <a:prstGeom prst="rect">
             <a:avLst/>
@@ -17828,7 +17828,7 @@
       </p:sp>
       <p:pic>
         <p:nvPicPr>
-          <p:cNvPr id="13" name="Picture 12" descr="c58e91a86a3bfa35.png"/>
+          <p:cNvPr id="13" name="Picture 12" descr="6c3d06b279be60fc.png"/>
           <p:cNvPicPr>
             <a:picLocks noChangeAspect="1"/>
           </p:cNvPicPr>
@@ -17843,7 +17843,7 @@
         <p:spPr>
           <a:xfrm>
             <a:off x="987552" y="4273296"/>
-            <a:ext cx="3538728" cy="688848"/>
+            <a:ext cx="3535680" cy="685800"/>
           </a:xfrm>
           <a:prstGeom prst="rect">
             <a:avLst/>
@@ -17858,7 +17858,7 @@
         </p:nvSpPr>
         <p:spPr>
           <a:xfrm>
-            <a:off x="4526280" y="4389120"/>
+            <a:off x="4523232" y="4387596"/>
             <a:ext cx="4614173" cy="457200"/>
           </a:xfrm>
           <a:prstGeom prst="rect">
@@ -17887,7 +17887,7 @@
       </p:sp>
       <p:pic>
         <p:nvPicPr>
-          <p:cNvPr id="15" name="Picture 14" descr="3f2abb4590435eb0.png"/>
+          <p:cNvPr id="15" name="Picture 14" descr="e9e6240f6a5ac6c4.png"/>
           <p:cNvPicPr>
             <a:picLocks noChangeAspect="1"/>
           </p:cNvPicPr>
@@ -17901,8 +17901,8 @@
         </p:blipFill>
         <p:spPr>
           <a:xfrm>
-            <a:off x="9003293" y="4273296"/>
-            <a:ext cx="795528" cy="688848"/>
+            <a:off x="9000245" y="4273296"/>
+            <a:ext cx="792480" cy="685800"/>
           </a:xfrm>
           <a:prstGeom prst="rect">
             <a:avLst/>
@@ -17911,7 +17911,7 @@
       </p:pic>
       <p:pic>
         <p:nvPicPr>
-          <p:cNvPr id="16" name="Picture 15" descr="4e506f1fd0873670.png"/>
+          <p:cNvPr id="16" name="Picture 15" descr="b45588bb7e9f0712.png"/>
           <p:cNvPicPr>
             <a:picLocks noChangeAspect="1"/>
           </p:cNvPicPr>
@@ -17925,8 +17925,8 @@
         </p:blipFill>
         <p:spPr>
           <a:xfrm>
-            <a:off x="987552" y="5218175"/>
-            <a:ext cx="1978152" cy="804672"/>
+            <a:off x="987552" y="5215128"/>
+            <a:ext cx="1965960" cy="804672"/>
           </a:xfrm>
           <a:prstGeom prst="rect">
             <a:avLst/>
@@ -17941,7 +17941,7 @@
         </p:nvSpPr>
         <p:spPr>
           <a:xfrm>
-            <a:off x="2965704" y="5391912"/>
+            <a:off x="2953512" y="5388864"/>
             <a:ext cx="6270420" cy="457200"/>
           </a:xfrm>
           <a:prstGeom prst="rect">
@@ -17970,7 +17970,7 @@
       </p:sp>
       <p:pic>
         <p:nvPicPr>
-          <p:cNvPr id="18" name="Picture 17" descr="87009eafc84fbf18.png"/>
+          <p:cNvPr id="18" name="Picture 17" descr="d631bf12f968ff99.png"/>
           <p:cNvPicPr>
             <a:picLocks noChangeAspect="1"/>
           </p:cNvPicPr>
@@ -17984,8 +17984,8 @@
         </p:blipFill>
         <p:spPr>
           <a:xfrm>
-            <a:off x="9098964" y="5277612"/>
-            <a:ext cx="780288" cy="685800"/>
+            <a:off x="9086772" y="5276088"/>
+            <a:ext cx="777240" cy="682752"/>
           </a:xfrm>
           <a:prstGeom prst="rect">
             <a:avLst/>
@@ -19242,7 +19242,7 @@
       </p:graphicFrame>
       <p:pic>
         <p:nvPicPr>
-          <p:cNvPr id="11" name="Picture 10" descr="b8889051fdc71e70.png"/>
+          <p:cNvPr id="11" name="Picture 10" descr="8c34f90c6fc7d47a.png"/>
           <p:cNvPicPr>
             <a:picLocks noChangeAspect="1"/>
           </p:cNvPicPr>
@@ -19301,7 +19301,7 @@
       </p:sp>
       <p:pic>
         <p:nvPicPr>
-          <p:cNvPr id="13" name="Picture 12" descr="a8908f3619c71bc6.png"/>
+          <p:cNvPr id="13" name="Picture 12" descr="9053d689824c5cdb.png"/>
           <p:cNvPicPr>
             <a:picLocks noChangeAspect="1"/>
           </p:cNvPicPr>
@@ -19325,7 +19325,7 @@
       </p:pic>
       <p:pic>
         <p:nvPicPr>
-          <p:cNvPr id="14" name="Picture 13" descr="4049ac29e8d0e898.png"/>
+          <p:cNvPr id="14" name="Picture 13" descr="a561d3e29393bcc1.png"/>
           <p:cNvPicPr>
             <a:picLocks noChangeAspect="1"/>
           </p:cNvPicPr>
@@ -19340,7 +19340,7 @@
         <p:spPr>
           <a:xfrm>
             <a:off x="3643884" y="4791456"/>
-            <a:ext cx="4873752" cy="414528"/>
+            <a:ext cx="4873752" cy="411480"/>
           </a:xfrm>
           <a:prstGeom prst="rect">
             <a:avLst/>
@@ -19647,7 +19647,7 @@
       </p:cxnSp>
       <p:pic>
         <p:nvPicPr>
-          <p:cNvPr id="10" name="Picture 9" descr="bf588710a599e4ab.png"/>
+          <p:cNvPr id="10" name="Picture 9" descr="8fba7ecf87f384ec.png"/>
           <p:cNvPicPr>
             <a:picLocks noChangeAspect="1"/>
           </p:cNvPicPr>
@@ -19662,7 +19662,7 @@
         <p:spPr>
           <a:xfrm>
             <a:off x="1260084" y="2340864"/>
-            <a:ext cx="4294632" cy="679704"/>
+            <a:ext cx="4294632" cy="676656"/>
           </a:xfrm>
           <a:prstGeom prst="rect">
             <a:avLst/>
@@ -19677,7 +19677,7 @@
         </p:nvSpPr>
         <p:spPr>
           <a:xfrm>
-            <a:off x="5554716" y="2452116"/>
+            <a:off x="5554716" y="2450592"/>
             <a:ext cx="1183151" cy="457200"/>
           </a:xfrm>
           <a:prstGeom prst="rect">
@@ -19706,7 +19706,7 @@
       </p:sp>
       <p:pic>
         <p:nvPicPr>
-          <p:cNvPr id="12" name="Picture 11" descr="6d96812b24000e89.png"/>
+          <p:cNvPr id="12" name="Picture 11" descr="505da5ea0c261bcf.png"/>
           <p:cNvPicPr>
             <a:picLocks noChangeAspect="1"/>
           </p:cNvPicPr>
@@ -19721,7 +19721,7 @@
         <p:spPr>
           <a:xfrm>
             <a:off x="6600707" y="2340864"/>
-            <a:ext cx="4300728" cy="679704"/>
+            <a:ext cx="4300728" cy="676656"/>
           </a:xfrm>
           <a:prstGeom prst="rect">
             <a:avLst/>
@@ -19736,7 +19736,7 @@
         </p:nvSpPr>
         <p:spPr>
           <a:xfrm>
-            <a:off x="987552" y="3358895"/>
+            <a:off x="987552" y="3355847"/>
             <a:ext cx="10131551" cy="475488"/>
           </a:xfrm>
           <a:prstGeom prst="rect">
@@ -19765,7 +19765,7 @@
       </p:sp>
       <p:pic>
         <p:nvPicPr>
-          <p:cNvPr id="14" name="Picture 13" descr="e7a72fc9722f2271.png"/>
+          <p:cNvPr id="14" name="Picture 13" descr="5954d94571e7ef73.png"/>
           <p:cNvPicPr>
             <a:picLocks noChangeAspect="1"/>
           </p:cNvPicPr>
@@ -19779,8 +19779,8 @@
         </p:blipFill>
         <p:spPr>
           <a:xfrm>
-            <a:off x="987552" y="4075175"/>
-            <a:ext cx="1487424" cy="405384"/>
+            <a:off x="987552" y="4073651"/>
+            <a:ext cx="1487424" cy="402336"/>
           </a:xfrm>
           <a:prstGeom prst="rect">
             <a:avLst/>
@@ -19795,7 +19795,7 @@
         </p:nvSpPr>
         <p:spPr>
           <a:xfrm>
-            <a:off x="2474976" y="4049267"/>
+            <a:off x="2474976" y="4046219"/>
             <a:ext cx="3404171" cy="457200"/>
           </a:xfrm>
           <a:prstGeom prst="rect">
@@ -20409,7 +20409,7 @@
       </p:sp>
       <p:pic>
         <p:nvPicPr>
-          <p:cNvPr id="9" name="Picture 8" descr="ace94c96bda40746.png"/>
+          <p:cNvPr id="9" name="Picture 8" descr="1ca1397ffa03d47c.png"/>
           <p:cNvPicPr>
             <a:picLocks noChangeAspect="1"/>
           </p:cNvPicPr>
@@ -20424,7 +20424,7 @@
         <p:spPr>
           <a:xfrm>
             <a:off x="1828800" y="1920240"/>
-            <a:ext cx="3115056" cy="688848"/>
+            <a:ext cx="3112008" cy="688848"/>
           </a:xfrm>
           <a:prstGeom prst="rect">
             <a:avLst/>
@@ -20439,8 +20439,8 @@
         </p:nvSpPr>
         <p:spPr>
           <a:xfrm>
-            <a:off x="5401056" y="2036064"/>
-            <a:ext cx="5983224" cy="502920"/>
+            <a:off x="5398008" y="2036064"/>
+            <a:ext cx="5986271" cy="502920"/>
           </a:xfrm>
           <a:prstGeom prst="rect">
             <a:avLst/>
@@ -20468,7 +20468,7 @@
       </p:sp>
       <p:pic>
         <p:nvPicPr>
-          <p:cNvPr id="11" name="Picture 10" descr="c2271698628ebedd.png"/>
+          <p:cNvPr id="11" name="Picture 10" descr="f25419565ed35dc9.png"/>
           <p:cNvPicPr>
             <a:picLocks noChangeAspect="1"/>
           </p:cNvPicPr>
@@ -20483,7 +20483,7 @@
         <p:spPr>
           <a:xfrm>
             <a:off x="1828800" y="2883408"/>
-            <a:ext cx="1716024" cy="701040"/>
+            <a:ext cx="1697736" cy="697992"/>
           </a:xfrm>
           <a:prstGeom prst="rect">
             <a:avLst/>
@@ -20498,7 +20498,7 @@
         </p:nvSpPr>
         <p:spPr>
           <a:xfrm>
-            <a:off x="4002024" y="3005328"/>
+            <a:off x="3983736" y="3003804"/>
             <a:ext cx="6400800" cy="502920"/>
           </a:xfrm>
           <a:prstGeom prst="rect">

--- a/a7/build/out/u3/A7 3.06  Slides.pptx
+++ b/a7/build/out/u3/A7 3.06  Slides.pptx
@@ -10499,7 +10499,7 @@
                 </a:solidFill>
                 <a:latin typeface="Century Schoolbook"/>
               </a:rPr>
-              <a:t>8</a:t>
+              <a:t>16</a:t>
             </a:r>
           </a:p>
         </p:txBody>
@@ -10552,7 +10552,7 @@
                 </a:solidFill>
                 <a:latin typeface="Century Schoolbook"/>
               </a:rPr>
-              <a:t>6</a:t>
+              <a:t>4</a:t>
             </a:r>
           </a:p>
         </p:txBody>
@@ -10605,7 +10605,7 @@
                 </a:solidFill>
                 <a:latin typeface="Century Schoolbook"/>
               </a:rPr>
-              <a:t>4</a:t>
+              <a:t>8</a:t>
             </a:r>
           </a:p>
         </p:txBody>
@@ -10658,7 +10658,7 @@
                 </a:solidFill>
                 <a:latin typeface="Century Schoolbook"/>
               </a:rPr>
-              <a:t>16</a:t>
+              <a:t>6</a:t>
             </a:r>
           </a:p>
         </p:txBody>
@@ -11046,29 +11046,29 @@
             <a:r>
               <a:rPr sz="2400" b="1" i="0">
                 <a:solidFill>
-                  <a:srgbClr val="9E1B32"/>
+                  <a:srgbClr val="1A1A1A"/>
                 </a:solidFill>
                 <a:latin typeface="Century Schoolbook"/>
               </a:rPr>
               <a:t>A.   </a:t>
             </a:r>
             <a:r>
-              <a:rPr sz="2400" b="1" i="0">
-                <a:solidFill>
-                  <a:srgbClr val="9E1B32"/>
+              <a:rPr sz="2400" b="0" i="0">
+                <a:solidFill>
+                  <a:srgbClr val="1A1A1A"/>
                 </a:solidFill>
                 <a:latin typeface="Century Schoolbook"/>
               </a:rPr>
               <a:t>3</a:t>
             </a:r>
             <a:r>
-              <a:rPr sz="2400" b="1" i="0" baseline="30000">
-                <a:solidFill>
-                  <a:srgbClr val="9E1B32"/>
-                </a:solidFill>
-                <a:latin typeface="Century Schoolbook"/>
-              </a:rPr>
-              <a:t>8</a:t>
+              <a:rPr sz="2400" b="0" i="0" baseline="30000">
+                <a:solidFill>
+                  <a:srgbClr val="1A1A1A"/>
+                </a:solidFill>
+                <a:latin typeface="Century Schoolbook"/>
+              </a:rPr>
+              <a:t>16</a:t>
             </a:r>
           </a:p>
         </p:txBody>
@@ -11121,7 +11121,7 @@
                 </a:solidFill>
                 <a:latin typeface="Century Schoolbook"/>
               </a:rPr>
-              <a:t>6</a:t>
+              <a:t>4</a:t>
             </a:r>
           </a:p>
         </p:txBody>
@@ -11152,29 +11152,29 @@
             <a:r>
               <a:rPr sz="2400" b="1" i="0">
                 <a:solidFill>
-                  <a:srgbClr val="1A1A1A"/>
+                  <a:srgbClr val="9E1B32"/>
                 </a:solidFill>
                 <a:latin typeface="Century Schoolbook"/>
               </a:rPr>
               <a:t>C.   </a:t>
             </a:r>
             <a:r>
-              <a:rPr sz="2400" b="0" i="0">
-                <a:solidFill>
-                  <a:srgbClr val="1A1A1A"/>
+              <a:rPr sz="2400" b="1" i="0">
+                <a:solidFill>
+                  <a:srgbClr val="9E1B32"/>
                 </a:solidFill>
                 <a:latin typeface="Century Schoolbook"/>
               </a:rPr>
               <a:t>3</a:t>
             </a:r>
             <a:r>
-              <a:rPr sz="2400" b="0" i="0" baseline="30000">
-                <a:solidFill>
-                  <a:srgbClr val="1A1A1A"/>
-                </a:solidFill>
-                <a:latin typeface="Century Schoolbook"/>
-              </a:rPr>
-              <a:t>4</a:t>
+              <a:rPr sz="2400" b="1" i="0" baseline="30000">
+                <a:solidFill>
+                  <a:srgbClr val="9E1B32"/>
+                </a:solidFill>
+                <a:latin typeface="Century Schoolbook"/>
+              </a:rPr>
+              <a:t>8</a:t>
             </a:r>
           </a:p>
         </p:txBody>
@@ -11227,7 +11227,7 @@
                 </a:solidFill>
                 <a:latin typeface="Century Schoolbook"/>
               </a:rPr>
-              <a:t>16</a:t>
+              <a:t>6</a:t>
             </a:r>
           </a:p>
         </p:txBody>
@@ -11262,7 +11262,7 @@
                 </a:solidFill>
                 <a:latin typeface="Century Schoolbook"/>
               </a:rPr>
-              <a:t>Answer:   A — 3</a:t>
+              <a:t>Answer:   C — 3</a:t>
             </a:r>
             <a:r>
               <a:rPr sz="3200" b="1" i="0" baseline="30000">
@@ -11699,7 +11699,7 @@
                 </a:solidFill>
                 <a:latin typeface="Century Schoolbook"/>
               </a:rPr>
-              <a:t>-5</a:t>
+              <a:t>7</a:t>
             </a:r>
           </a:p>
         </p:txBody>
@@ -11752,7 +11752,7 @@
                 </a:solidFill>
                 <a:latin typeface="Century Schoolbook"/>
               </a:rPr>
-              <a:t>7</a:t>
+              <a:t>-5</a:t>
             </a:r>
           </a:p>
         </p:txBody>
@@ -12268,7 +12268,7 @@
                 </a:solidFill>
                 <a:latin typeface="Century Schoolbook"/>
               </a:rPr>
-              <a:t>-5</a:t>
+              <a:t>7</a:t>
             </a:r>
           </a:p>
         </p:txBody>
@@ -12321,7 +12321,7 @@
                 </a:solidFill>
                 <a:latin typeface="Century Schoolbook"/>
               </a:rPr>
-              <a:t>7</a:t>
+              <a:t>-5</a:t>
             </a:r>
           </a:p>
         </p:txBody>

--- a/a7/build/out/u3/A7 3.06  Slides.pptx
+++ b/a7/build/out/u3/A7 3.06  Slides.pptx
@@ -9219,8 +9219,8 @@
         </p:nvSpPr>
         <p:spPr>
           <a:xfrm>
-            <a:off x="3685934" y="2171700"/>
-            <a:ext cx="2535136" cy="457200"/>
+            <a:off x="1234440" y="1851660"/>
+            <a:ext cx="3170111" cy="457200"/>
           </a:xfrm>
           <a:prstGeom prst="rect">
             <a:avLst/>
@@ -9235,20 +9235,20 @@
           <a:p>
             <a:pPr algn="l"/>
             <a:r>
-              <a:rPr sz="2600" b="0" i="0">
+              <a:rPr sz="2400" b="0" i="0">
                 <a:solidFill>
                   <a:srgbClr val="1A1A1A"/>
                 </a:solidFill>
                 <a:latin typeface="Century Schoolbook"/>
               </a:rPr>
-              <a:t>A drive holds  </a:t>
+              <a:t>A flash drive holds  </a:t>
             </a:r>
           </a:p>
         </p:txBody>
       </p:sp>
       <p:pic>
         <p:nvPicPr>
-          <p:cNvPr id="10" name="Picture 9" descr="326fb02d0e36fa30.png"/>
+          <p:cNvPr id="10" name="Picture 9" descr="1d8988fc9968dd14.png"/>
           <p:cNvPicPr>
             <a:picLocks noChangeAspect="1"/>
           </p:cNvPicPr>
@@ -9262,8 +9262,8 @@
         </p:blipFill>
         <p:spPr>
           <a:xfrm>
-            <a:off x="6083911" y="2226564"/>
-            <a:ext cx="310896" cy="347472"/>
+            <a:off x="4267391" y="1940052"/>
+            <a:ext cx="252984" cy="280416"/>
           </a:xfrm>
           <a:prstGeom prst="rect">
             <a:avLst/>
@@ -9278,8 +9278,8 @@
         </p:nvSpPr>
         <p:spPr>
           <a:xfrm>
-            <a:off x="6394807" y="2171700"/>
-            <a:ext cx="2217937" cy="457200"/>
+            <a:off x="4520375" y="1851660"/>
+            <a:ext cx="2063493" cy="457200"/>
           </a:xfrm>
           <a:prstGeom prst="rect">
             <a:avLst/>
@@ -9294,7 +9294,7 @@
           <a:p>
             <a:pPr algn="l"/>
             <a:r>
-              <a:rPr sz="2600" b="0" i="0">
+              <a:rPr sz="2400" b="0" i="0">
                 <a:solidFill>
                   <a:srgbClr val="1A1A1A"/>
                 </a:solidFill>
@@ -9313,23 +9313,23 @@
         </p:nvSpPr>
         <p:spPr>
           <a:xfrm>
-            <a:off x="777240" y="2880360"/>
-            <a:ext cx="10607040" cy="465151"/>
-          </a:xfrm>
-          <a:prstGeom prst="rect">
-            <a:avLst/>
-          </a:prstGeom>
-          <a:noFill/>
-        </p:spPr>
-        <p:txBody>
-          <a:bodyPr wrap="square" lIns="45720" rIns="45720" tIns="18288" bIns="18288" anchor="t">
-            <a:spAutoFit/>
-          </a:bodyPr>
-          <a:lstStyle/>
-          <a:p>
-            <a:pPr algn="ctr"/>
-            <a:r>
-              <a:rPr sz="2600" b="0" i="0">
+            <a:off x="1234440" y="2487168"/>
+            <a:ext cx="10058400" cy="429370"/>
+          </a:xfrm>
+          <a:prstGeom prst="rect">
+            <a:avLst/>
+          </a:prstGeom>
+          <a:noFill/>
+        </p:spPr>
+        <p:txBody>
+          <a:bodyPr wrap="square" lIns="45720" rIns="45720" tIns="18288" bIns="18288" anchor="t">
+            <a:spAutoFit/>
+          </a:bodyPr>
+          <a:lstStyle/>
+          <a:p>
+            <a:pPr algn="l"/>
+            <a:r>
+              <a:rPr sz="2400" b="0" i="0">
                 <a:solidFill>
                   <a:srgbClr val="1A1A1A"/>
                 </a:solidFill>
@@ -9348,8 +9348,8 @@
         </p:nvSpPr>
         <p:spPr>
           <a:xfrm>
-            <a:off x="3962878" y="3432379"/>
-            <a:ext cx="1311040" cy="457200"/>
+            <a:off x="1234440" y="3003406"/>
+            <a:ext cx="1316509" cy="457200"/>
           </a:xfrm>
           <a:prstGeom prst="rect">
             <a:avLst/>
@@ -9364,7 +9364,7 @@
           <a:p>
             <a:pPr algn="l"/>
             <a:r>
-              <a:rPr sz="2600" b="0" i="0">
+              <a:rPr sz="2400" b="1" i="0">
                 <a:solidFill>
                   <a:srgbClr val="1A1A1A"/>
                 </a:solidFill>
@@ -9377,7 +9377,7 @@
       </p:sp>
       <p:pic>
         <p:nvPicPr>
-          <p:cNvPr id="14" name="Picture 13" descr="326fb02d0e36fa30.png"/>
+          <p:cNvPr id="14" name="Picture 13" descr="1d8988fc9968dd14.png"/>
           <p:cNvPicPr>
             <a:picLocks noChangeAspect="1"/>
           </p:cNvPicPr>
@@ -9391,8 +9391,8 @@
         </p:blipFill>
         <p:spPr>
           <a:xfrm>
-            <a:off x="5136759" y="3487243"/>
-            <a:ext cx="310896" cy="347472"/>
+            <a:off x="2413789" y="3091798"/>
+            <a:ext cx="252984" cy="280416"/>
           </a:xfrm>
           <a:prstGeom prst="rect">
             <a:avLst/>
@@ -9407,8 +9407,8 @@
         </p:nvSpPr>
         <p:spPr>
           <a:xfrm>
-            <a:off x="5447655" y="3432379"/>
-            <a:ext cx="2888145" cy="457200"/>
+            <a:off x="2666773" y="3003406"/>
+            <a:ext cx="2958453" cy="457200"/>
           </a:xfrm>
           <a:prstGeom prst="rect">
             <a:avLst/>
@@ -9423,7 +9423,7 @@
           <a:p>
             <a:pPr algn="l"/>
             <a:r>
-              <a:rPr sz="2600" b="0" i="0">
+              <a:rPr sz="2400" b="1" i="0">
                 <a:solidFill>
                   <a:srgbClr val="1A1A1A"/>
                 </a:solidFill>
@@ -9465,41 +9465,6 @@
                 <a:latin typeface="Century Schoolbook"/>
               </a:rPr>
               <a:t>Answer it.</a:t>
-            </a:r>
-          </a:p>
-        </p:txBody>
-      </p:sp>
-      <p:sp>
-        <p:nvSpPr>
-          <p:cNvPr id="17" name="TextBox 16"/>
-          <p:cNvSpPr txBox="1"/>
-          <p:nvPr/>
-        </p:nvSpPr>
-        <p:spPr>
-          <a:xfrm>
-            <a:off x="777240" y="4828032"/>
-            <a:ext cx="10607040" cy="365760"/>
-          </a:xfrm>
-          <a:prstGeom prst="rect">
-            <a:avLst/>
-          </a:prstGeom>
-          <a:noFill/>
-        </p:spPr>
-        <p:txBody>
-          <a:bodyPr wrap="square" lIns="45720" rIns="45720" tIns="18288" bIns="18288" anchor="t">
-            <a:spAutoFit/>
-          </a:bodyPr>
-          <a:lstStyle/>
-          <a:p>
-            <a:pPr algn="ctr"/>
-            <a:r>
-              <a:rPr sz="1900" b="0" i="1">
-                <a:solidFill>
-                  <a:srgbClr val="6B6B6B"/>
-                </a:solidFill>
-                <a:latin typeface="Century Schoolbook"/>
-              </a:rPr>
-              <a:t>Write it as a power of 2.</a:t>
             </a:r>
           </a:p>
         </p:txBody>
@@ -9775,8 +9740,8 @@
         </p:nvSpPr>
         <p:spPr>
           <a:xfrm>
-            <a:off x="3684410" y="2080260"/>
-            <a:ext cx="2535136" cy="457200"/>
+            <a:off x="1234440" y="1851660"/>
+            <a:ext cx="3170111" cy="457200"/>
           </a:xfrm>
           <a:prstGeom prst="rect">
             <a:avLst/>
@@ -9791,20 +9756,20 @@
           <a:p>
             <a:pPr algn="l"/>
             <a:r>
-              <a:rPr sz="2600" b="0" i="0">
+              <a:rPr sz="2400" b="0" i="0">
                 <a:solidFill>
                   <a:srgbClr val="1A1A1A"/>
                 </a:solidFill>
                 <a:latin typeface="Century Schoolbook"/>
               </a:rPr>
-              <a:t>A drive holds  </a:t>
+              <a:t>A flash drive holds  </a:t>
             </a:r>
           </a:p>
         </p:txBody>
       </p:sp>
       <p:pic>
         <p:nvPicPr>
-          <p:cNvPr id="10" name="Picture 9" descr="a6ec4c130c4a796b.png"/>
+          <p:cNvPr id="10" name="Picture 9" descr="e7e94afbdd4008a4.png"/>
           <p:cNvPicPr>
             <a:picLocks noChangeAspect="1"/>
           </p:cNvPicPr>
@@ -9818,8 +9783,8 @@
         </p:blipFill>
         <p:spPr>
           <a:xfrm>
-            <a:off x="6082387" y="2135124"/>
-            <a:ext cx="313944" cy="347472"/>
+            <a:off x="4267391" y="1940052"/>
+            <a:ext cx="256032" cy="280416"/>
           </a:xfrm>
           <a:prstGeom prst="rect">
             <a:avLst/>
@@ -9834,8 +9799,8 @@
         </p:nvSpPr>
         <p:spPr>
           <a:xfrm>
-            <a:off x="6396331" y="2080260"/>
-            <a:ext cx="2217937" cy="457200"/>
+            <a:off x="4523423" y="1851660"/>
+            <a:ext cx="2063493" cy="457200"/>
           </a:xfrm>
           <a:prstGeom prst="rect">
             <a:avLst/>
@@ -9850,7 +9815,7 @@
           <a:p>
             <a:pPr algn="l"/>
             <a:r>
-              <a:rPr sz="2600" b="0" i="0">
+              <a:rPr sz="2400" b="0" i="0">
                 <a:solidFill>
                   <a:srgbClr val="1A1A1A"/>
                 </a:solidFill>
@@ -9869,23 +9834,23 @@
         </p:nvSpPr>
         <p:spPr>
           <a:xfrm>
-            <a:off x="777240" y="2788920"/>
-            <a:ext cx="10607040" cy="465151"/>
-          </a:xfrm>
-          <a:prstGeom prst="rect">
-            <a:avLst/>
-          </a:prstGeom>
-          <a:noFill/>
-        </p:spPr>
-        <p:txBody>
-          <a:bodyPr wrap="square" lIns="45720" rIns="45720" tIns="18288" bIns="18288" anchor="t">
-            <a:spAutoFit/>
-          </a:bodyPr>
-          <a:lstStyle/>
-          <a:p>
-            <a:pPr algn="ctr"/>
-            <a:r>
-              <a:rPr sz="2600" b="0" i="0">
+            <a:off x="1234440" y="2487168"/>
+            <a:ext cx="10058400" cy="429370"/>
+          </a:xfrm>
+          <a:prstGeom prst="rect">
+            <a:avLst/>
+          </a:prstGeom>
+          <a:noFill/>
+        </p:spPr>
+        <p:txBody>
+          <a:bodyPr wrap="square" lIns="45720" rIns="45720" tIns="18288" bIns="18288" anchor="t">
+            <a:spAutoFit/>
+          </a:bodyPr>
+          <a:lstStyle/>
+          <a:p>
+            <a:pPr algn="l"/>
+            <a:r>
+              <a:rPr sz="2400" b="0" i="0">
                 <a:solidFill>
                   <a:srgbClr val="1A1A1A"/>
                 </a:solidFill>
@@ -9904,8 +9869,8 @@
         </p:nvSpPr>
         <p:spPr>
           <a:xfrm>
-            <a:off x="3961354" y="3340939"/>
-            <a:ext cx="1311040" cy="457200"/>
+            <a:off x="1234440" y="3003406"/>
+            <a:ext cx="1316509" cy="457200"/>
           </a:xfrm>
           <a:prstGeom prst="rect">
             <a:avLst/>
@@ -9920,7 +9885,7 @@
           <a:p>
             <a:pPr algn="l"/>
             <a:r>
-              <a:rPr sz="2600" b="0" i="0">
+              <a:rPr sz="2400" b="1" i="0">
                 <a:solidFill>
                   <a:srgbClr val="1A1A1A"/>
                 </a:solidFill>
@@ -9933,7 +9898,7 @@
       </p:sp>
       <p:pic>
         <p:nvPicPr>
-          <p:cNvPr id="14" name="Picture 13" descr="a6ec4c130c4a796b.png"/>
+          <p:cNvPr id="14" name="Picture 13" descr="e7e94afbdd4008a4.png"/>
           <p:cNvPicPr>
             <a:picLocks noChangeAspect="1"/>
           </p:cNvPicPr>
@@ -9947,8 +9912,8 @@
         </p:blipFill>
         <p:spPr>
           <a:xfrm>
-            <a:off x="5135235" y="3395803"/>
-            <a:ext cx="313944" cy="347472"/>
+            <a:off x="2413789" y="3091798"/>
+            <a:ext cx="256032" cy="280416"/>
           </a:xfrm>
           <a:prstGeom prst="rect">
             <a:avLst/>
@@ -9963,8 +9928,8 @@
         </p:nvSpPr>
         <p:spPr>
           <a:xfrm>
-            <a:off x="5449179" y="3340939"/>
-            <a:ext cx="2888145" cy="457200"/>
+            <a:off x="2669821" y="3003406"/>
+            <a:ext cx="2958453" cy="457200"/>
           </a:xfrm>
           <a:prstGeom prst="rect">
             <a:avLst/>
@@ -9979,7 +9944,7 @@
           <a:p>
             <a:pPr algn="l"/>
             <a:r>
-              <a:rPr sz="2600" b="0" i="0">
+              <a:rPr sz="2400" b="1" i="0">
                 <a:solidFill>
                   <a:srgbClr val="1A1A1A"/>
                 </a:solidFill>
@@ -9998,7 +9963,7 @@
         </p:nvSpPr>
         <p:spPr>
           <a:xfrm>
-            <a:off x="1828800" y="4095319"/>
+            <a:off x="1828800" y="3730354"/>
             <a:ext cx="8503920" cy="548640"/>
           </a:xfrm>
           <a:prstGeom prst="rect">
@@ -10078,7 +10043,7 @@
         </p:nvSpPr>
         <p:spPr>
           <a:xfrm>
-            <a:off x="4829556" y="4764355"/>
+            <a:off x="4829556" y="4600956"/>
             <a:ext cx="1920240" cy="548640"/>
           </a:xfrm>
           <a:prstGeom prst="rect">
@@ -10121,7 +10086,7 @@
         </p:blipFill>
         <p:spPr>
           <a:xfrm>
-            <a:off x="6749795" y="4826839"/>
+            <a:off x="6749795" y="4663440"/>
             <a:ext cx="582168" cy="423672"/>
           </a:xfrm>
           <a:prstGeom prst="rect">

--- a/a7/build/out/u3/A7 3.06  Slides.pptx
+++ b/a7/build/out/u3/A7 3.06  Slides.pptx
@@ -9220,7 +9220,7 @@
         <p:spPr>
           <a:xfrm>
             <a:off x="1234440" y="1851660"/>
-            <a:ext cx="3170111" cy="457200"/>
+            <a:ext cx="3547152" cy="457200"/>
           </a:xfrm>
           <a:prstGeom prst="rect">
             <a:avLst/>
@@ -9241,14 +9241,14 @@
                 </a:solidFill>
                 <a:latin typeface="Century Schoolbook"/>
               </a:rPr>
-              <a:t>A flash drive holds  </a:t>
+              <a:t>One flash drive holds  </a:t>
             </a:r>
           </a:p>
         </p:txBody>
       </p:sp>
       <p:pic>
         <p:nvPicPr>
-          <p:cNvPr id="10" name="Picture 9" descr="1d8988fc9968dd14.png"/>
+          <p:cNvPr id="10" name="Picture 9" descr="c591741850325583.png"/>
           <p:cNvPicPr>
             <a:picLocks noChangeAspect="1"/>
           </p:cNvPicPr>
@@ -9262,8 +9262,8 @@
         </p:blipFill>
         <p:spPr>
           <a:xfrm>
-            <a:off x="4267391" y="1940052"/>
-            <a:ext cx="252984" cy="280416"/>
+            <a:off x="4644432" y="1943100"/>
+            <a:ext cx="377952" cy="274320"/>
           </a:xfrm>
           <a:prstGeom prst="rect">
             <a:avLst/>
@@ -9278,7 +9278,7 @@
         </p:nvSpPr>
         <p:spPr>
           <a:xfrm>
-            <a:off x="4520375" y="1851660"/>
+            <a:off x="5022384" y="1851660"/>
             <a:ext cx="2063493" cy="457200"/>
           </a:xfrm>
           <a:prstGeom prst="rect">
@@ -9313,43 +9313,8 @@
         </p:nvSpPr>
         <p:spPr>
           <a:xfrm>
-            <a:off x="1234440" y="2487168"/>
-            <a:ext cx="10058400" cy="429370"/>
-          </a:xfrm>
-          <a:prstGeom prst="rect">
-            <a:avLst/>
-          </a:prstGeom>
-          <a:noFill/>
-        </p:spPr>
-        <p:txBody>
-          <a:bodyPr wrap="square" lIns="45720" rIns="45720" tIns="18288" bIns="18288" anchor="t">
-            <a:spAutoFit/>
-          </a:bodyPr>
-          <a:lstStyle/>
-          <a:p>
-            <a:pPr algn="l"/>
-            <a:r>
-              <a:rPr sz="2400" b="0" i="0">
-                <a:solidFill>
-                  <a:srgbClr val="1A1A1A"/>
-                </a:solidFill>
-                <a:latin typeface="Century Schoolbook"/>
-              </a:rPr>
-              <a:t>It costs 45 dollars.</a:t>
-            </a:r>
-          </a:p>
-        </p:txBody>
-      </p:sp>
-      <p:sp>
-        <p:nvSpPr>
-          <p:cNvPr id="13" name="TextBox 12"/>
-          <p:cNvSpPr txBox="1"/>
-          <p:nvPr/>
-        </p:nvSpPr>
-        <p:spPr>
-          <a:xfrm>
-            <a:off x="1234440" y="3003406"/>
-            <a:ext cx="1316509" cy="457200"/>
+            <a:off x="1234440" y="2464308"/>
+            <a:ext cx="2487756" cy="457200"/>
           </a:xfrm>
           <a:prstGeom prst="rect">
             <a:avLst/>
@@ -9364,34 +9329,34 @@
           <a:p>
             <a:pPr algn="l"/>
             <a:r>
-              <a:rPr sz="2400" b="1" i="0">
+              <a:rPr sz="2400" b="0" i="0">
                 <a:solidFill>
                   <a:srgbClr val="1A1A1A"/>
                 </a:solidFill>
                 <a:latin typeface="Century Schoolbook"/>
               </a:rPr>
-              <a:t>Write  </a:t>
+              <a:t>Another holds  </a:t>
             </a:r>
           </a:p>
         </p:txBody>
       </p:sp>
       <p:pic>
         <p:nvPicPr>
-          <p:cNvPr id="14" name="Picture 13" descr="1d8988fc9968dd14.png"/>
+          <p:cNvPr id="13" name="Picture 12" descr="1d8988fc9968dd14.png"/>
           <p:cNvPicPr>
             <a:picLocks noChangeAspect="1"/>
           </p:cNvPicPr>
           <p:nvPr/>
         </p:nvPicPr>
         <p:blipFill>
-          <a:blip r:embed="rId2"/>
+          <a:blip r:embed="rId3"/>
           <a:stretch>
             <a:fillRect/>
           </a:stretch>
         </p:blipFill>
         <p:spPr>
           <a:xfrm>
-            <a:off x="2413789" y="3091798"/>
+            <a:off x="3585036" y="2552700"/>
             <a:ext cx="252984" cy="280416"/>
           </a:xfrm>
           <a:prstGeom prst="rect">
@@ -9401,14 +9366,14 @@
       </p:pic>
       <p:sp>
         <p:nvSpPr>
-          <p:cNvPr id="15" name="TextBox 14"/>
-          <p:cNvSpPr txBox="1"/>
-          <p:nvPr/>
-        </p:nvSpPr>
-        <p:spPr>
-          <a:xfrm>
-            <a:off x="2666773" y="3003406"/>
-            <a:ext cx="2958453" cy="457200"/>
+          <p:cNvPr id="14" name="TextBox 13"/>
+          <p:cNvSpPr txBox="1"/>
+          <p:nvPr/>
+        </p:nvSpPr>
+        <p:spPr>
+          <a:xfrm>
+            <a:off x="3838020" y="2464308"/>
+            <a:ext cx="6509265" cy="457200"/>
           </a:xfrm>
           <a:prstGeom prst="rect">
             <a:avLst/>
@@ -9423,13 +9388,48 @@
           <a:p>
             <a:pPr algn="l"/>
             <a:r>
+              <a:rPr sz="2400" b="0" i="0">
+                <a:solidFill>
+                  <a:srgbClr val="1A1A1A"/>
+                </a:solidFill>
+                <a:latin typeface="Century Schoolbook"/>
+              </a:rPr>
+              <a:t>  megabytes. The first one costs 45 dollars.</a:t>
+            </a:r>
+          </a:p>
+        </p:txBody>
+      </p:sp>
+      <p:sp>
+        <p:nvSpPr>
+          <p:cNvPr id="15" name="TextBox 14"/>
+          <p:cNvSpPr txBox="1"/>
+          <p:nvPr/>
+        </p:nvSpPr>
+        <p:spPr>
+          <a:xfrm>
+            <a:off x="1234440" y="3099816"/>
+            <a:ext cx="10058400" cy="429370"/>
+          </a:xfrm>
+          <a:prstGeom prst="rect">
+            <a:avLst/>
+          </a:prstGeom>
+          <a:noFill/>
+        </p:spPr>
+        <p:txBody>
+          <a:bodyPr wrap="square" lIns="45720" rIns="45720" tIns="18288" bIns="18288" anchor="t">
+            <a:spAutoFit/>
+          </a:bodyPr>
+          <a:lstStyle/>
+          <a:p>
+            <a:pPr algn="l"/>
+            <a:r>
               <a:rPr sz="2400" b="1" i="0">
                 <a:solidFill>
                   <a:srgbClr val="1A1A1A"/>
                 </a:solidFill>
                 <a:latin typeface="Century Schoolbook"/>
               </a:rPr>
-              <a:t>  as a power of 2.</a:t>
+              <a:t>Which holds more — or is it the same? Show why.</a:t>
             </a:r>
           </a:p>
         </p:txBody>
@@ -9741,7 +9741,7 @@
         <p:spPr>
           <a:xfrm>
             <a:off x="1234440" y="1851660"/>
-            <a:ext cx="3170111" cy="457200"/>
+            <a:ext cx="3547152" cy="457200"/>
           </a:xfrm>
           <a:prstGeom prst="rect">
             <a:avLst/>
@@ -9762,14 +9762,14 @@
                 </a:solidFill>
                 <a:latin typeface="Century Schoolbook"/>
               </a:rPr>
-              <a:t>A flash drive holds  </a:t>
+              <a:t>One flash drive holds  </a:t>
             </a:r>
           </a:p>
         </p:txBody>
       </p:sp>
       <p:pic>
         <p:nvPicPr>
-          <p:cNvPr id="10" name="Picture 9" descr="e7e94afbdd4008a4.png"/>
+          <p:cNvPr id="10" name="Picture 9" descr="b4b5a35a336421b1.png"/>
           <p:cNvPicPr>
             <a:picLocks noChangeAspect="1"/>
           </p:cNvPicPr>
@@ -9783,8 +9783,8 @@
         </p:blipFill>
         <p:spPr>
           <a:xfrm>
-            <a:off x="4267391" y="1940052"/>
-            <a:ext cx="256032" cy="280416"/>
+            <a:off x="4644432" y="1943100"/>
+            <a:ext cx="381000" cy="274320"/>
           </a:xfrm>
           <a:prstGeom prst="rect">
             <a:avLst/>
@@ -9799,7 +9799,7 @@
         </p:nvSpPr>
         <p:spPr>
           <a:xfrm>
-            <a:off x="4523423" y="1851660"/>
+            <a:off x="5025432" y="1851660"/>
             <a:ext cx="2063493" cy="457200"/>
           </a:xfrm>
           <a:prstGeom prst="rect">
@@ -9834,43 +9834,8 @@
         </p:nvSpPr>
         <p:spPr>
           <a:xfrm>
-            <a:off x="1234440" y="2487168"/>
-            <a:ext cx="10058400" cy="429370"/>
-          </a:xfrm>
-          <a:prstGeom prst="rect">
-            <a:avLst/>
-          </a:prstGeom>
-          <a:noFill/>
-        </p:spPr>
-        <p:txBody>
-          <a:bodyPr wrap="square" lIns="45720" rIns="45720" tIns="18288" bIns="18288" anchor="t">
-            <a:spAutoFit/>
-          </a:bodyPr>
-          <a:lstStyle/>
-          <a:p>
-            <a:pPr algn="l"/>
-            <a:r>
-              <a:rPr sz="2400" b="0" i="0">
-                <a:solidFill>
-                  <a:srgbClr val="1A1A1A"/>
-                </a:solidFill>
-                <a:latin typeface="Century Schoolbook"/>
-              </a:rPr>
-              <a:t>It costs 45 dollars.</a:t>
-            </a:r>
-          </a:p>
-        </p:txBody>
-      </p:sp>
-      <p:sp>
-        <p:nvSpPr>
-          <p:cNvPr id="13" name="TextBox 12"/>
-          <p:cNvSpPr txBox="1"/>
-          <p:nvPr/>
-        </p:nvSpPr>
-        <p:spPr>
-          <a:xfrm>
-            <a:off x="1234440" y="3003406"/>
-            <a:ext cx="1316509" cy="457200"/>
+            <a:off x="1234440" y="2464308"/>
+            <a:ext cx="2487756" cy="457200"/>
           </a:xfrm>
           <a:prstGeom prst="rect">
             <a:avLst/>
@@ -9885,194 +9850,20 @@
           <a:p>
             <a:pPr algn="l"/>
             <a:r>
-              <a:rPr sz="2400" b="1" i="0">
+              <a:rPr sz="2400" b="0" i="0">
                 <a:solidFill>
                   <a:srgbClr val="1A1A1A"/>
                 </a:solidFill>
                 <a:latin typeface="Century Schoolbook"/>
               </a:rPr>
-              <a:t>Write  </a:t>
+              <a:t>Another holds  </a:t>
             </a:r>
           </a:p>
         </p:txBody>
       </p:sp>
       <p:pic>
         <p:nvPicPr>
-          <p:cNvPr id="14" name="Picture 13" descr="e7e94afbdd4008a4.png"/>
-          <p:cNvPicPr>
-            <a:picLocks noChangeAspect="1"/>
-          </p:cNvPicPr>
-          <p:nvPr/>
-        </p:nvPicPr>
-        <p:blipFill>
-          <a:blip r:embed="rId2"/>
-          <a:stretch>
-            <a:fillRect/>
-          </a:stretch>
-        </p:blipFill>
-        <p:spPr>
-          <a:xfrm>
-            <a:off x="2413789" y="3091798"/>
-            <a:ext cx="256032" cy="280416"/>
-          </a:xfrm>
-          <a:prstGeom prst="rect">
-            <a:avLst/>
-          </a:prstGeom>
-        </p:spPr>
-      </p:pic>
-      <p:sp>
-        <p:nvSpPr>
-          <p:cNvPr id="15" name="TextBox 14"/>
-          <p:cNvSpPr txBox="1"/>
-          <p:nvPr/>
-        </p:nvSpPr>
-        <p:spPr>
-          <a:xfrm>
-            <a:off x="2669821" y="3003406"/>
-            <a:ext cx="2958453" cy="457200"/>
-          </a:xfrm>
-          <a:prstGeom prst="rect">
-            <a:avLst/>
-          </a:prstGeom>
-          <a:noFill/>
-        </p:spPr>
-        <p:txBody>
-          <a:bodyPr wrap="none" lIns="45720" rIns="45720" tIns="18288" bIns="18288" anchor="ctr">
-            <a:noAutofit/>
-          </a:bodyPr>
-          <a:lstStyle/>
-          <a:p>
-            <a:pPr algn="l"/>
-            <a:r>
-              <a:rPr sz="2400" b="1" i="0">
-                <a:solidFill>
-                  <a:srgbClr val="1A1A1A"/>
-                </a:solidFill>
-                <a:latin typeface="Century Schoolbook"/>
-              </a:rPr>
-              <a:t>  as a power of 2.</a:t>
-            </a:r>
-          </a:p>
-        </p:txBody>
-      </p:sp>
-      <p:sp>
-        <p:nvSpPr>
-          <p:cNvPr id="16" name="TextBox 15"/>
-          <p:cNvSpPr txBox="1"/>
-          <p:nvPr/>
-        </p:nvSpPr>
-        <p:spPr>
-          <a:xfrm>
-            <a:off x="1828800" y="3730354"/>
-            <a:ext cx="8503920" cy="548640"/>
-          </a:xfrm>
-          <a:prstGeom prst="rect">
-            <a:avLst/>
-          </a:prstGeom>
-          <a:noFill/>
-        </p:spPr>
-        <p:txBody>
-          <a:bodyPr wrap="square" lIns="45720" rIns="45720" tIns="18288" bIns="18288" anchor="t">
-            <a:spAutoFit/>
-          </a:bodyPr>
-          <a:lstStyle/>
-          <a:p>
-            <a:pPr algn="ctr"/>
-            <a:r>
-              <a:rPr sz="2400" b="0" i="0">
-                <a:solidFill>
-                  <a:srgbClr val="6B6B6B"/>
-                </a:solidFill>
-                <a:latin typeface="Century Schoolbook"/>
-              </a:rPr>
-              <a:t>8 = 2</a:t>
-            </a:r>
-            <a:r>
-              <a:rPr sz="2400" b="0" i="0" baseline="30000">
-                <a:solidFill>
-                  <a:srgbClr val="6B6B6B"/>
-                </a:solidFill>
-                <a:latin typeface="Century Schoolbook"/>
-              </a:rPr>
-              <a:t>3</a:t>
-            </a:r>
-            <a:r>
-              <a:rPr sz="2400" b="0" i="0">
-                <a:solidFill>
-                  <a:srgbClr val="6B6B6B"/>
-                </a:solidFill>
-                <a:latin typeface="Century Schoolbook"/>
-              </a:rPr>
-              <a:t>, so (2</a:t>
-            </a:r>
-            <a:r>
-              <a:rPr sz="2400" b="0" i="0" baseline="30000">
-                <a:solidFill>
-                  <a:srgbClr val="6B6B6B"/>
-                </a:solidFill>
-                <a:latin typeface="Century Schoolbook"/>
-              </a:rPr>
-              <a:t>3</a:t>
-            </a:r>
-            <a:r>
-              <a:rPr sz="2400" b="0" i="0">
-                <a:solidFill>
-                  <a:srgbClr val="6B6B6B"/>
-                </a:solidFill>
-                <a:latin typeface="Century Schoolbook"/>
-              </a:rPr>
-              <a:t>)</a:t>
-            </a:r>
-            <a:r>
-              <a:rPr sz="2400" b="0" i="0" baseline="30000">
-                <a:solidFill>
-                  <a:srgbClr val="6B6B6B"/>
-                </a:solidFill>
-                <a:latin typeface="Century Schoolbook"/>
-              </a:rPr>
-              <a:t>5</a:t>
-            </a:r>
-          </a:p>
-        </p:txBody>
-      </p:sp>
-      <p:sp>
-        <p:nvSpPr>
-          <p:cNvPr id="17" name="TextBox 16"/>
-          <p:cNvSpPr txBox="1"/>
-          <p:nvPr/>
-        </p:nvSpPr>
-        <p:spPr>
-          <a:xfrm>
-            <a:off x="4829556" y="4600956"/>
-            <a:ext cx="1920240" cy="548640"/>
-          </a:xfrm>
-          <a:prstGeom prst="rect">
-            <a:avLst/>
-          </a:prstGeom>
-          <a:noFill/>
-        </p:spPr>
-        <p:txBody>
-          <a:bodyPr wrap="square" lIns="45720" rIns="45720" tIns="18288" bIns="18288" anchor="ctr">
-            <a:spAutoFit/>
-          </a:bodyPr>
-          <a:lstStyle/>
-          <a:p>
-            <a:pPr algn="l"/>
-            <a:r>
-              <a:rPr sz="3200" b="1" i="0">
-                <a:solidFill>
-                  <a:srgbClr val="9E1B32"/>
-                </a:solidFill>
-                <a:latin typeface="Century Schoolbook"/>
-              </a:rPr>
-              <a:t>Answer:</a:t>
-            </a:r>
-          </a:p>
-        </p:txBody>
-      </p:sp>
-      <p:pic>
-        <p:nvPicPr>
-          <p:cNvPr id="18" name="Picture 17" descr="6103e54678c6ecd2.png"/>
+          <p:cNvPr id="13" name="Picture 12" descr="e7e94afbdd4008a4.png"/>
           <p:cNvPicPr>
             <a:picLocks noChangeAspect="1"/>
           </p:cNvPicPr>
@@ -10086,14 +9877,280 @@
         </p:blipFill>
         <p:spPr>
           <a:xfrm>
-            <a:off x="6749795" y="4663440"/>
-            <a:ext cx="582168" cy="423672"/>
+            <a:off x="3585036" y="2552700"/>
+            <a:ext cx="256032" cy="280416"/>
           </a:xfrm>
           <a:prstGeom prst="rect">
             <a:avLst/>
           </a:prstGeom>
         </p:spPr>
       </p:pic>
+      <p:sp>
+        <p:nvSpPr>
+          <p:cNvPr id="14" name="TextBox 13"/>
+          <p:cNvSpPr txBox="1"/>
+          <p:nvPr/>
+        </p:nvSpPr>
+        <p:spPr>
+          <a:xfrm>
+            <a:off x="3841068" y="2464308"/>
+            <a:ext cx="6509265" cy="457200"/>
+          </a:xfrm>
+          <a:prstGeom prst="rect">
+            <a:avLst/>
+          </a:prstGeom>
+          <a:noFill/>
+        </p:spPr>
+        <p:txBody>
+          <a:bodyPr wrap="none" lIns="45720" rIns="45720" tIns="18288" bIns="18288" anchor="ctr">
+            <a:noAutofit/>
+          </a:bodyPr>
+          <a:lstStyle/>
+          <a:p>
+            <a:pPr algn="l"/>
+            <a:r>
+              <a:rPr sz="2400" b="0" i="0">
+                <a:solidFill>
+                  <a:srgbClr val="1A1A1A"/>
+                </a:solidFill>
+                <a:latin typeface="Century Schoolbook"/>
+              </a:rPr>
+              <a:t>  megabytes. The first one costs 45 dollars.</a:t>
+            </a:r>
+          </a:p>
+        </p:txBody>
+      </p:sp>
+      <p:sp>
+        <p:nvSpPr>
+          <p:cNvPr id="15" name="TextBox 14"/>
+          <p:cNvSpPr txBox="1"/>
+          <p:nvPr/>
+        </p:nvSpPr>
+        <p:spPr>
+          <a:xfrm>
+            <a:off x="1234440" y="3099816"/>
+            <a:ext cx="10058400" cy="429370"/>
+          </a:xfrm>
+          <a:prstGeom prst="rect">
+            <a:avLst/>
+          </a:prstGeom>
+          <a:noFill/>
+        </p:spPr>
+        <p:txBody>
+          <a:bodyPr wrap="square" lIns="45720" rIns="45720" tIns="18288" bIns="18288" anchor="t">
+            <a:spAutoFit/>
+          </a:bodyPr>
+          <a:lstStyle/>
+          <a:p>
+            <a:pPr algn="l"/>
+            <a:r>
+              <a:rPr sz="2400" b="1" i="0">
+                <a:solidFill>
+                  <a:srgbClr val="1A1A1A"/>
+                </a:solidFill>
+                <a:latin typeface="Century Schoolbook"/>
+              </a:rPr>
+              <a:t>Which holds more — or is it the same? Show why.</a:t>
+            </a:r>
+          </a:p>
+        </p:txBody>
+      </p:sp>
+      <p:sp>
+        <p:nvSpPr>
+          <p:cNvPr id="16" name="TextBox 15"/>
+          <p:cNvSpPr txBox="1"/>
+          <p:nvPr/>
+        </p:nvSpPr>
+        <p:spPr>
+          <a:xfrm>
+            <a:off x="1828800" y="3730354"/>
+            <a:ext cx="8503920" cy="548640"/>
+          </a:xfrm>
+          <a:prstGeom prst="rect">
+            <a:avLst/>
+          </a:prstGeom>
+          <a:noFill/>
+        </p:spPr>
+        <p:txBody>
+          <a:bodyPr wrap="square" lIns="45720" rIns="45720" tIns="18288" bIns="18288" anchor="t">
+            <a:spAutoFit/>
+          </a:bodyPr>
+          <a:lstStyle/>
+          <a:p>
+            <a:pPr algn="ctr"/>
+            <a:r>
+              <a:rPr sz="2400" b="0" i="0">
+                <a:solidFill>
+                  <a:srgbClr val="6B6B6B"/>
+                </a:solidFill>
+                <a:latin typeface="Century Schoolbook"/>
+              </a:rPr>
+              <a:t>8 = 2</a:t>
+            </a:r>
+            <a:r>
+              <a:rPr sz="2400" b="0" i="0" baseline="30000">
+                <a:solidFill>
+                  <a:srgbClr val="6B6B6B"/>
+                </a:solidFill>
+                <a:latin typeface="Century Schoolbook"/>
+              </a:rPr>
+              <a:t>3</a:t>
+            </a:r>
+            <a:r>
+              <a:rPr sz="2400" b="0" i="0">
+                <a:solidFill>
+                  <a:srgbClr val="6B6B6B"/>
+                </a:solidFill>
+                <a:latin typeface="Century Schoolbook"/>
+              </a:rPr>
+              <a:t>, so 8</a:t>
+            </a:r>
+            <a:r>
+              <a:rPr sz="2400" b="0" i="0" baseline="30000">
+                <a:solidFill>
+                  <a:srgbClr val="6B6B6B"/>
+                </a:solidFill>
+                <a:latin typeface="Century Schoolbook"/>
+              </a:rPr>
+              <a:t>5</a:t>
+            </a:r>
+            <a:r>
+              <a:rPr sz="2400" b="0" i="0">
+                <a:solidFill>
+                  <a:srgbClr val="6B6B6B"/>
+                </a:solidFill>
+                <a:latin typeface="Century Schoolbook"/>
+              </a:rPr>
+              <a:t> = (2</a:t>
+            </a:r>
+            <a:r>
+              <a:rPr sz="2400" b="0" i="0" baseline="30000">
+                <a:solidFill>
+                  <a:srgbClr val="6B6B6B"/>
+                </a:solidFill>
+                <a:latin typeface="Century Schoolbook"/>
+              </a:rPr>
+              <a:t>3</a:t>
+            </a:r>
+            <a:r>
+              <a:rPr sz="2400" b="0" i="0">
+                <a:solidFill>
+                  <a:srgbClr val="6B6B6B"/>
+                </a:solidFill>
+                <a:latin typeface="Century Schoolbook"/>
+              </a:rPr>
+              <a:t>)</a:t>
+            </a:r>
+            <a:r>
+              <a:rPr sz="2400" b="0" i="0" baseline="30000">
+                <a:solidFill>
+                  <a:srgbClr val="6B6B6B"/>
+                </a:solidFill>
+                <a:latin typeface="Century Schoolbook"/>
+              </a:rPr>
+              <a:t>5</a:t>
+            </a:r>
+          </a:p>
+        </p:txBody>
+      </p:sp>
+      <p:sp>
+        <p:nvSpPr>
+          <p:cNvPr id="17" name="TextBox 16"/>
+          <p:cNvSpPr txBox="1"/>
+          <p:nvPr/>
+        </p:nvSpPr>
+        <p:spPr>
+          <a:xfrm>
+            <a:off x="777240" y="4663440"/>
+            <a:ext cx="10607040" cy="548640"/>
+          </a:xfrm>
+          <a:prstGeom prst="rect">
+            <a:avLst/>
+          </a:prstGeom>
+          <a:noFill/>
+        </p:spPr>
+        <p:txBody>
+          <a:bodyPr wrap="square" lIns="45720" rIns="45720" tIns="18288" bIns="18288" anchor="t">
+            <a:spAutoFit/>
+          </a:bodyPr>
+          <a:lstStyle/>
+          <a:p>
+            <a:pPr algn="ctr"/>
+            <a:r>
+              <a:rPr sz="3200" b="1" i="0">
+                <a:solidFill>
+                  <a:srgbClr val="9E1B32"/>
+                </a:solidFill>
+                <a:latin typeface="Century Schoolbook"/>
+              </a:rPr>
+              <a:t>Answer:   The same: 8</a:t>
+            </a:r>
+            <a:r>
+              <a:rPr sz="3200" b="1" i="0" baseline="30000">
+                <a:solidFill>
+                  <a:srgbClr val="9E1B32"/>
+                </a:solidFill>
+                <a:latin typeface="Century Schoolbook"/>
+              </a:rPr>
+              <a:t>5</a:t>
+            </a:r>
+            <a:r>
+              <a:rPr sz="3200" b="1" i="0">
+                <a:solidFill>
+                  <a:srgbClr val="9E1B32"/>
+                </a:solidFill>
+                <a:latin typeface="Century Schoolbook"/>
+              </a:rPr>
+              <a:t> = (2</a:t>
+            </a:r>
+            <a:r>
+              <a:rPr sz="3200" b="1" i="0" baseline="30000">
+                <a:solidFill>
+                  <a:srgbClr val="9E1B32"/>
+                </a:solidFill>
+                <a:latin typeface="Century Schoolbook"/>
+              </a:rPr>
+              <a:t>3</a:t>
+            </a:r>
+            <a:r>
+              <a:rPr sz="3200" b="1" i="0">
+                <a:solidFill>
+                  <a:srgbClr val="9E1B32"/>
+                </a:solidFill>
+                <a:latin typeface="Century Schoolbook"/>
+              </a:rPr>
+              <a:t>)</a:t>
+            </a:r>
+            <a:r>
+              <a:rPr sz="3200" b="1" i="0" baseline="30000">
+                <a:solidFill>
+                  <a:srgbClr val="9E1B32"/>
+                </a:solidFill>
+                <a:latin typeface="Century Schoolbook"/>
+              </a:rPr>
+              <a:t>5</a:t>
+            </a:r>
+            <a:r>
+              <a:rPr sz="3200" b="1" i="0">
+                <a:solidFill>
+                  <a:srgbClr val="9E1B32"/>
+                </a:solidFill>
+                <a:latin typeface="Century Schoolbook"/>
+              </a:rPr>
+              <a:t> = 2</a:t>
+            </a:r>
+            <a:r>
+              <a:rPr sz="3200" b="1" i="0" baseline="30000">
+                <a:solidFill>
+                  <a:srgbClr val="9E1B32"/>
+                </a:solidFill>
+                <a:latin typeface="Century Schoolbook"/>
+              </a:rPr>
+              <a:t>15</a:t>
+            </a:r>
+          </a:p>
+        </p:txBody>
+      </p:sp>
     </p:spTree>
   </p:cSld>
   <p:clrMapOvr>
